--- a/课件/题集刷题导航/第9章-查找/第9章-查找.pptx
+++ b/课件/题集刷题导航/第9章-查找/第9章-查找.pptx
@@ -1,24 +1,24 @@
 
 <file path=ppt/presentation.xml><?xml version="1.0" encoding="utf-8"?>
-<p:presentation xmlns:a="http://schemas.openxmlformats.org/drawingml/2006/main" xmlns:r="http://schemas.openxmlformats.org/officeDocument/2006/relationships" xmlns:p="http://schemas.openxmlformats.org/presentationml/2006/main" saveSubsetFonts="1" autoCompressPictures="0">
+<p:presentation xmlns:a="http://schemas.openxmlformats.org/drawingml/2006/main" xmlns:r="http://schemas.openxmlformats.org/officeDocument/2006/relationships" xmlns:p="http://schemas.openxmlformats.org/presentationml/2006/main" autoCompressPictures="0">
   <p:sldMasterIdLst>
     <p:sldMasterId id="2147483648" r:id="rId1"/>
   </p:sldMasterIdLst>
+  <p:notesMasterIdLst>
+    <p:notesMasterId r:id="rId4"/>
+  </p:notesMasterIdLst>
   <p:sldIdLst>
-    <p:sldId id="256" r:id="rId2"/>
-    <p:sldId id="257" r:id="rId3"/>
-    <p:sldId id="258" r:id="rId4"/>
-    <p:sldId id="259" r:id="rId5"/>
-    <p:sldId id="260" r:id="rId6"/>
-    <p:sldId id="261" r:id="rId7"/>
-    <p:sldId id="262" r:id="rId8"/>
-    <p:sldId id="263" r:id="rId9"/>
+    <p:sldId id="256" r:id="rId3"/>
+    <p:sldId id="257" r:id="rId5"/>
+    <p:sldId id="258" r:id="rId6"/>
+    <p:sldId id="259" r:id="rId7"/>
+    <p:sldId id="260" r:id="rId8"/>
+    <p:sldId id="262" r:id="rId9"/>
+    <p:sldId id="261" r:id="rId10"/>
+    <p:sldId id="263" r:id="rId11"/>
   </p:sldIdLst>
-  <p:notesMasterIdLst>
-    <p:notesMasterId r:id="rId10"/>
-  </p:notesMasterIdLst>
-  <p:sldSz cx="12191695" cy="6858000"/>
-  <p:notesSz cx="6858000" cy="12191695"/>
+  <p:sldSz cx="12191365" cy="6858000"/>
+  <p:notesSz cx="6858000" cy="12191365"/>
   <p:defaultTextStyle>
     <a:lvl1pPr marL="0" algn="l" defTabSz="914400" rtl="0" eaLnBrk="1" latinLnBrk="0" hangingPunct="1">
       <a:defRPr sz="1800" kern="1200">
@@ -196,7 +196,6 @@
           <a:p>
             <a:fld id="{5282F153-3F37-0F45-9E97-73ACFA13230C}" type="datetimeFigureOut">
               <a:rPr lang="en-US"/>
-              <a:t>7/23/19</a:t>
             </a:fld>
             <a:endParaRPr lang="en-US"/>
           </a:p>
@@ -263,6 +262,7 @@
               <a:rPr lang="en-US"/>
               <a:t>Click to edit Master text styles</a:t>
             </a:r>
+            <a:endParaRPr lang="en-US"/>
           </a:p>
           <a:p>
             <a:pPr lvl="1"/>
@@ -270,6 +270,7 @@
               <a:rPr lang="en-US"/>
               <a:t>Second level</a:t>
             </a:r>
+            <a:endParaRPr lang="en-US"/>
           </a:p>
           <a:p>
             <a:pPr lvl="2"/>
@@ -277,6 +278,7 @@
               <a:rPr lang="en-US"/>
               <a:t>Third level</a:t>
             </a:r>
+            <a:endParaRPr lang="en-US"/>
           </a:p>
           <a:p>
             <a:pPr lvl="3"/>
@@ -284,6 +286,7 @@
               <a:rPr lang="en-US"/>
               <a:t>Fourth level</a:t>
             </a:r>
+            <a:endParaRPr lang="en-US"/>
           </a:p>
           <a:p>
             <a:pPr lvl="4"/>
@@ -291,6 +294,7 @@
               <a:rPr lang="en-US"/>
               <a:t>Fifth level</a:t>
             </a:r>
+            <a:endParaRPr lang="en-US"/>
           </a:p>
         </p:txBody>
       </p:sp>
@@ -354,18 +358,12 @@
           <a:p>
             <a:fld id="{CE5E9CC1-C706-0F49-92D6-E571CC5EEA8F}" type="slidenum">
               <a:rPr lang="en-US"/>
-              <a:t>‹#›</a:t>
             </a:fld>
             <a:endParaRPr lang="en-US"/>
           </a:p>
         </p:txBody>
       </p:sp>
     </p:spTree>
-    <p:extLst>
-      <p:ext uri="{BB962C8B-B14F-4D97-AF65-F5344CB8AC3E}">
-        <p14:creationId xmlns:p14="http://schemas.microsoft.com/office/powerpoint/2010/main" val="1024086991"/>
-      </p:ext>
-    </p:extLst>
   </p:cSld>
   <p:clrMap bg1="lt1" tx1="dk1" bg2="lt2" tx2="dk2" accent1="accent1" accent2="accent2" accent3="accent3" accent4="accent4" accent5="accent5" accent6="accent6" hlink="hlink" folHlink="folHlink"/>
   <p:notesStyle>
@@ -507,10 +505,6 @@
           <a:bodyPr/>
           <a:lstStyle/>
           <a:p>
-            <a:r>
-              <a:rPr lang="en-US" dirty="0"/>
-              <a:t/>
-            </a:r>
             <a:endParaRPr lang="en-US" dirty="0"/>
           </a:p>
         </p:txBody>
@@ -532,18 +526,12 @@
           <a:p>
             <a:fld id="{F7021451-1387-4CA6-816F-3879F97B5CBC}" type="slidenum">
               <a:rPr lang="en-US"/>
-              <a:t>1</a:t>
             </a:fld>
             <a:endParaRPr lang="en-US"/>
           </a:p>
         </p:txBody>
       </p:sp>
     </p:spTree>
-    <p:extLst>
-      <p:ext uri="{BB962C8B-B14F-4D97-AF65-F5344CB8AC3E}">
-        <p14:creationId xmlns:p14="http://schemas.microsoft.com/office/powerpoint/2010/main" val="1024086991"/>
-      </p:ext>
-    </p:extLst>
   </p:cSld>
   <p:clrMapOvr>
     <a:masterClrMapping/>
@@ -595,10 +583,6 @@
           <a:bodyPr/>
           <a:lstStyle/>
           <a:p>
-            <a:r>
-              <a:rPr lang="en-US" dirty="0"/>
-              <a:t/>
-            </a:r>
             <a:endParaRPr lang="en-US" dirty="0"/>
           </a:p>
         </p:txBody>
@@ -620,18 +604,12 @@
           <a:p>
             <a:fld id="{F7021451-1387-4CA6-816F-3879F97B5CBC}" type="slidenum">
               <a:rPr lang="en-US"/>
-              <a:t>2</a:t>
             </a:fld>
             <a:endParaRPr lang="en-US"/>
           </a:p>
         </p:txBody>
       </p:sp>
     </p:spTree>
-    <p:extLst>
-      <p:ext uri="{BB962C8B-B14F-4D97-AF65-F5344CB8AC3E}">
-        <p14:creationId xmlns:p14="http://schemas.microsoft.com/office/powerpoint/2010/main" val="1024086991"/>
-      </p:ext>
-    </p:extLst>
   </p:cSld>
   <p:clrMapOvr>
     <a:masterClrMapping/>
@@ -683,10 +661,6 @@
           <a:bodyPr/>
           <a:lstStyle/>
           <a:p>
-            <a:r>
-              <a:rPr lang="en-US" dirty="0"/>
-              <a:t/>
-            </a:r>
             <a:endParaRPr lang="en-US" dirty="0"/>
           </a:p>
         </p:txBody>
@@ -708,18 +682,12 @@
           <a:p>
             <a:fld id="{F7021451-1387-4CA6-816F-3879F97B5CBC}" type="slidenum">
               <a:rPr lang="en-US"/>
-              <a:t>3</a:t>
             </a:fld>
             <a:endParaRPr lang="en-US"/>
           </a:p>
         </p:txBody>
       </p:sp>
     </p:spTree>
-    <p:extLst>
-      <p:ext uri="{BB962C8B-B14F-4D97-AF65-F5344CB8AC3E}">
-        <p14:creationId xmlns:p14="http://schemas.microsoft.com/office/powerpoint/2010/main" val="1024086991"/>
-      </p:ext>
-    </p:extLst>
   </p:cSld>
   <p:clrMapOvr>
     <a:masterClrMapping/>
@@ -771,10 +739,6 @@
           <a:bodyPr/>
           <a:lstStyle/>
           <a:p>
-            <a:r>
-              <a:rPr lang="en-US" dirty="0"/>
-              <a:t/>
-            </a:r>
             <a:endParaRPr lang="en-US" dirty="0"/>
           </a:p>
         </p:txBody>
@@ -796,18 +760,12 @@
           <a:p>
             <a:fld id="{F7021451-1387-4CA6-816F-3879F97B5CBC}" type="slidenum">
               <a:rPr lang="en-US"/>
-              <a:t>4</a:t>
             </a:fld>
             <a:endParaRPr lang="en-US"/>
           </a:p>
         </p:txBody>
       </p:sp>
     </p:spTree>
-    <p:extLst>
-      <p:ext uri="{BB962C8B-B14F-4D97-AF65-F5344CB8AC3E}">
-        <p14:creationId xmlns:p14="http://schemas.microsoft.com/office/powerpoint/2010/main" val="1024086991"/>
-      </p:ext>
-    </p:extLst>
   </p:cSld>
   <p:clrMapOvr>
     <a:masterClrMapping/>
@@ -859,10 +817,6 @@
           <a:bodyPr/>
           <a:lstStyle/>
           <a:p>
-            <a:r>
-              <a:rPr lang="en-US" dirty="0"/>
-              <a:t/>
-            </a:r>
             <a:endParaRPr lang="en-US" dirty="0"/>
           </a:p>
         </p:txBody>
@@ -884,18 +838,12 @@
           <a:p>
             <a:fld id="{F7021451-1387-4CA6-816F-3879F97B5CBC}" type="slidenum">
               <a:rPr lang="en-US"/>
-              <a:t>5</a:t>
             </a:fld>
             <a:endParaRPr lang="en-US"/>
           </a:p>
         </p:txBody>
       </p:sp>
     </p:spTree>
-    <p:extLst>
-      <p:ext uri="{BB962C8B-B14F-4D97-AF65-F5344CB8AC3E}">
-        <p14:creationId xmlns:p14="http://schemas.microsoft.com/office/powerpoint/2010/main" val="1024086991"/>
-      </p:ext>
-    </p:extLst>
   </p:cSld>
   <p:clrMapOvr>
     <a:masterClrMapping/>
@@ -947,10 +895,6 @@
           <a:bodyPr/>
           <a:lstStyle/>
           <a:p>
-            <a:r>
-              <a:rPr lang="en-US" dirty="0"/>
-              <a:t/>
-            </a:r>
             <a:endParaRPr lang="en-US" dirty="0"/>
           </a:p>
         </p:txBody>
@@ -972,18 +916,12 @@
           <a:p>
             <a:fld id="{F7021451-1387-4CA6-816F-3879F97B5CBC}" type="slidenum">
               <a:rPr lang="en-US"/>
-              <a:t>6</a:t>
             </a:fld>
             <a:endParaRPr lang="en-US"/>
           </a:p>
         </p:txBody>
       </p:sp>
     </p:spTree>
-    <p:extLst>
-      <p:ext uri="{BB962C8B-B14F-4D97-AF65-F5344CB8AC3E}">
-        <p14:creationId xmlns:p14="http://schemas.microsoft.com/office/powerpoint/2010/main" val="1024086991"/>
-      </p:ext>
-    </p:extLst>
   </p:cSld>
   <p:clrMapOvr>
     <a:masterClrMapping/>
@@ -1035,10 +973,6 @@
           <a:bodyPr/>
           <a:lstStyle/>
           <a:p>
-            <a:r>
-              <a:rPr lang="en-US" dirty="0"/>
-              <a:t/>
-            </a:r>
             <a:endParaRPr lang="en-US" dirty="0"/>
           </a:p>
         </p:txBody>
@@ -1060,18 +994,12 @@
           <a:p>
             <a:fld id="{F7021451-1387-4CA6-816F-3879F97B5CBC}" type="slidenum">
               <a:rPr lang="en-US"/>
-              <a:t>7</a:t>
             </a:fld>
             <a:endParaRPr lang="en-US"/>
           </a:p>
         </p:txBody>
       </p:sp>
     </p:spTree>
-    <p:extLst>
-      <p:ext uri="{BB962C8B-B14F-4D97-AF65-F5344CB8AC3E}">
-        <p14:creationId xmlns:p14="http://schemas.microsoft.com/office/powerpoint/2010/main" val="1024086991"/>
-      </p:ext>
-    </p:extLst>
   </p:cSld>
   <p:clrMapOvr>
     <a:masterClrMapping/>
@@ -1123,10 +1051,6 @@
           <a:bodyPr/>
           <a:lstStyle/>
           <a:p>
-            <a:r>
-              <a:rPr lang="en-US" dirty="0"/>
-              <a:t/>
-            </a:r>
             <a:endParaRPr lang="en-US" dirty="0"/>
           </a:p>
         </p:txBody>
@@ -1148,18 +1072,12 @@
           <a:p>
             <a:fld id="{F7021451-1387-4CA6-816F-3879F97B5CBC}" type="slidenum">
               <a:rPr lang="en-US"/>
-              <a:t>8</a:t>
             </a:fld>
             <a:endParaRPr lang="en-US"/>
           </a:p>
         </p:txBody>
       </p:sp>
     </p:spTree>
-    <p:extLst>
-      <p:ext uri="{BB962C8B-B14F-4D97-AF65-F5344CB8AC3E}">
-        <p14:creationId xmlns:p14="http://schemas.microsoft.com/office/powerpoint/2010/main" val="1024086991"/>
-      </p:ext>
-    </p:extLst>
   </p:cSld>
   <p:clrMapOvr>
     <a:masterClrMapping/>
@@ -1200,6 +1118,11 @@
 <file path=ppt/slideMasters/slideMaster1.xml><?xml version="1.0" encoding="utf-8"?>
 <p:sldMaster xmlns:a="http://schemas.openxmlformats.org/drawingml/2006/main" xmlns:r="http://schemas.openxmlformats.org/officeDocument/2006/relationships" xmlns:p="http://schemas.openxmlformats.org/presentationml/2006/main">
   <p:cSld>
+    <p:bg>
+      <p:bgRef idx="1001">
+        <a:schemeClr val="bg1"/>
+      </p:bgRef>
+    </p:bg>
     <p:spTree>
       <p:nvGrpSpPr>
         <p:cNvPr id="1" name=""/>
@@ -1243,7 +1166,7 @@
         <a:spcBef>
           <a:spcPct val="20000"/>
         </a:spcBef>
-        <a:buFont typeface="Arial" pitchFamily="34" charset="0"/>
+        <a:buFont typeface="Arial" panose="020B0604020202020204" pitchFamily="34" charset="0"/>
         <a:buChar char="•"/>
         <a:defRPr sz="3200" kern="1200">
           <a:solidFill>
@@ -1258,7 +1181,7 @@
         <a:spcBef>
           <a:spcPct val="20000"/>
         </a:spcBef>
-        <a:buFont typeface="Arial" pitchFamily="34" charset="0"/>
+        <a:buFont typeface="Arial" panose="020B0604020202020204" pitchFamily="34" charset="0"/>
         <a:buChar char="–"/>
         <a:defRPr sz="2800" kern="1200">
           <a:solidFill>
@@ -1273,7 +1196,7 @@
         <a:spcBef>
           <a:spcPct val="20000"/>
         </a:spcBef>
-        <a:buFont typeface="Arial" pitchFamily="34" charset="0"/>
+        <a:buFont typeface="Arial" panose="020B0604020202020204" pitchFamily="34" charset="0"/>
         <a:buChar char="•"/>
         <a:defRPr sz="2400" kern="1200">
           <a:solidFill>
@@ -1288,7 +1211,7 @@
         <a:spcBef>
           <a:spcPct val="20000"/>
         </a:spcBef>
-        <a:buFont typeface="Arial" pitchFamily="34" charset="0"/>
+        <a:buFont typeface="Arial" panose="020B0604020202020204" pitchFamily="34" charset="0"/>
         <a:buChar char="–"/>
         <a:defRPr sz="2000" kern="1200">
           <a:solidFill>
@@ -1303,7 +1226,7 @@
         <a:spcBef>
           <a:spcPct val="20000"/>
         </a:spcBef>
-        <a:buFont typeface="Arial" pitchFamily="34" charset="0"/>
+        <a:buFont typeface="Arial" panose="020B0604020202020204" pitchFamily="34" charset="0"/>
         <a:buChar char="»"/>
         <a:defRPr sz="2000" kern="1200">
           <a:solidFill>
@@ -1318,7 +1241,7 @@
         <a:spcBef>
           <a:spcPct val="20000"/>
         </a:spcBef>
-        <a:buFont typeface="Arial" pitchFamily="34" charset="0"/>
+        <a:buFont typeface="Arial" panose="020B0604020202020204" pitchFamily="34" charset="0"/>
         <a:buChar char="•"/>
         <a:defRPr sz="2000" kern="1200">
           <a:solidFill>
@@ -1333,7 +1256,7 @@
         <a:spcBef>
           <a:spcPct val="20000"/>
         </a:spcBef>
-        <a:buFont typeface="Arial" pitchFamily="34" charset="0"/>
+        <a:buFont typeface="Arial" panose="020B0604020202020204" pitchFamily="34" charset="0"/>
         <a:buChar char="•"/>
         <a:defRPr sz="2000" kern="1200">
           <a:solidFill>
@@ -1348,7 +1271,7 @@
         <a:spcBef>
           <a:spcPct val="20000"/>
         </a:spcBef>
-        <a:buFont typeface="Arial" pitchFamily="34" charset="0"/>
+        <a:buFont typeface="Arial" panose="020B0604020202020204" pitchFamily="34" charset="0"/>
         <a:buChar char="•"/>
         <a:defRPr sz="2000" kern="1200">
           <a:solidFill>
@@ -1363,7 +1286,7 @@
         <a:spcBef>
           <a:spcPct val="20000"/>
         </a:spcBef>
-        <a:buFont typeface="Arial" pitchFamily="34" charset="0"/>
+        <a:buFont typeface="Arial" panose="020B0604020202020204" pitchFamily="34" charset="0"/>
         <a:buChar char="•"/>
         <a:defRPr sz="2000" kern="1200">
           <a:solidFill>
@@ -1476,7 +1399,7 @@
 
 <file path=ppt/slides/slide1.xml><?xml version="1.0" encoding="utf-8"?>
 <p:sld xmlns:a="http://schemas.openxmlformats.org/drawingml/2006/main" xmlns:r="http://schemas.openxmlformats.org/officeDocument/2006/relationships" xmlns:p="http://schemas.openxmlformats.org/presentationml/2006/main">
-  <p:cSld name="Slide 1">
+  <p:cSld>
     <p:bg>
       <p:bgPr>
         <a:blipFill dpi="0" rotWithShape="1">
@@ -1520,13 +1443,12 @@
             <a:avLst/>
           </a:prstGeom>
           <a:noFill/>
-          <a:ln/>
         </p:spPr>
         <p:txBody>
           <a:bodyPr wrap="square" rtlCol="0" anchor="ctr"/>
           <a:lstStyle/>
           <a:p>
-            <a:pPr algn="r" indent="0" marL="0">
+            <a:pPr marL="0" indent="0" algn="r">
               <a:buNone/>
             </a:pPr>
             <a:r>
@@ -1534,9 +1456,9 @@
                 <a:solidFill>
                   <a:srgbClr val="8A9099"/>
                 </a:solidFill>
-                <a:latin typeface="微软雅黑" pitchFamily="34" charset="0"/>
-                <a:ea typeface="微软雅黑" pitchFamily="34" charset="-122"/>
-                <a:cs typeface="微软雅黑" pitchFamily="34" charset="-120"/>
+                <a:latin typeface="微软雅黑" panose="020B0503020204020204" pitchFamily="34" charset="-122"/>
+                <a:ea typeface="微软雅黑" panose="020B0503020204020204" pitchFamily="34" charset="-122"/>
+                <a:cs typeface="微软雅黑" panose="020B0503020204020204" pitchFamily="34" charset="-120"/>
               </a:rPr>
               <a:t>1 / 8</a:t>
             </a:r>
@@ -1559,13 +1481,12 @@
             <a:avLst/>
           </a:prstGeom>
           <a:noFill/>
-          <a:ln/>
         </p:spPr>
         <p:txBody>
           <a:bodyPr wrap="square" rtlCol="0" anchor="ctr"/>
           <a:lstStyle/>
           <a:p>
-            <a:pPr algn="ctr" indent="0" marL="0">
+            <a:pPr marL="0" indent="0" algn="ctr">
               <a:buNone/>
             </a:pPr>
             <a:r>
@@ -1573,9 +1494,9 @@
                 <a:solidFill>
                   <a:srgbClr val="1F4E9C"/>
                 </a:solidFill>
-                <a:latin typeface="微软雅黑" pitchFamily="34" charset="0"/>
-                <a:ea typeface="微软雅黑" pitchFamily="34" charset="-122"/>
-                <a:cs typeface="微软雅黑" pitchFamily="34" charset="-120"/>
+                <a:latin typeface="微软雅黑" panose="020B0503020204020204" pitchFamily="34" charset="-122"/>
+                <a:ea typeface="微软雅黑" panose="020B0503020204020204" pitchFamily="34" charset="-122"/>
+                <a:cs typeface="微软雅黑" panose="020B0503020204020204" pitchFamily="34" charset="-120"/>
               </a:rPr>
               <a:t>重邮考研802 数据结构</a:t>
             </a:r>
@@ -1598,13 +1519,12 @@
             <a:avLst/>
           </a:prstGeom>
           <a:noFill/>
-          <a:ln/>
         </p:spPr>
         <p:txBody>
           <a:bodyPr wrap="square" rtlCol="0" anchor="ctr"/>
           <a:lstStyle/>
           <a:p>
-            <a:pPr algn="ctr" indent="0" marL="0">
+            <a:pPr marL="0" indent="0" algn="ctr">
               <a:buNone/>
             </a:pPr>
             <a:r>
@@ -1612,9 +1532,9 @@
                 <a:solidFill>
                   <a:srgbClr val="1F2329"/>
                 </a:solidFill>
-                <a:latin typeface="微软雅黑" pitchFamily="34" charset="0"/>
-                <a:ea typeface="微软雅黑" pitchFamily="34" charset="-122"/>
-                <a:cs typeface="微软雅黑" pitchFamily="34" charset="-120"/>
+                <a:latin typeface="微软雅黑" panose="020B0503020204020204" pitchFamily="34" charset="-122"/>
+                <a:ea typeface="微软雅黑" panose="020B0503020204020204" pitchFamily="34" charset="-122"/>
+                <a:cs typeface="微软雅黑" panose="020B0503020204020204" pitchFamily="34" charset="-120"/>
               </a:rPr>
               <a:t>习题集题目勾画 · 第9章 查找</a:t>
             </a:r>
@@ -1637,13 +1557,12 @@
             <a:avLst/>
           </a:prstGeom>
           <a:noFill/>
-          <a:ln/>
         </p:spPr>
         <p:txBody>
           <a:bodyPr wrap="square" rtlCol="0" anchor="ctr"/>
           <a:lstStyle/>
           <a:p>
-            <a:pPr algn="ctr" indent="0" marL="0">
+            <a:pPr marL="0" indent="0" algn="ctr">
               <a:buNone/>
             </a:pPr>
             <a:r>
@@ -1651,9 +1570,9 @@
                 <a:solidFill>
                   <a:srgbClr val="1F2329"/>
                 </a:solidFill>
-                <a:latin typeface="微软雅黑" pitchFamily="34" charset="0"/>
-                <a:ea typeface="微软雅黑" pitchFamily="34" charset="-122"/>
-                <a:cs typeface="微软雅黑" pitchFamily="34" charset="-120"/>
+                <a:latin typeface="微软雅黑" panose="020B0503020204020204" pitchFamily="34" charset="-122"/>
+                <a:ea typeface="微软雅黑" panose="020B0503020204020204" pitchFamily="34" charset="-122"/>
+                <a:cs typeface="微软雅黑" panose="020B0503020204020204" pitchFamily="34" charset="-120"/>
               </a:rPr>
               <a:t>严蔚敏《数据结构题集（第2版）》</a:t>
             </a:r>
@@ -1676,13 +1595,12 @@
             <a:avLst/>
           </a:prstGeom>
           <a:noFill/>
-          <a:ln/>
         </p:spPr>
         <p:txBody>
           <a:bodyPr wrap="square" rtlCol="0" anchor="ctr"/>
           <a:lstStyle/>
           <a:p>
-            <a:pPr algn="ctr" indent="0" marL="0">
+            <a:pPr marL="0" indent="0" algn="ctr">
               <a:buNone/>
             </a:pPr>
             <a:r>
@@ -1690,9 +1608,9 @@
                 <a:solidFill>
                   <a:srgbClr val="8A9099"/>
                 </a:solidFill>
-                <a:latin typeface="微软雅黑" pitchFamily="34" charset="0"/>
-                <a:ea typeface="微软雅黑" pitchFamily="34" charset="-122"/>
-                <a:cs typeface="微软雅黑" pitchFamily="34" charset="-120"/>
+                <a:latin typeface="微软雅黑" panose="020B0503020204020204" pitchFamily="34" charset="-122"/>
+                <a:ea typeface="微软雅黑" panose="020B0503020204020204" pitchFamily="34" charset="-122"/>
+                <a:cs typeface="微软雅黑" panose="020B0503020204020204" pitchFamily="34" charset="-120"/>
               </a:rPr>
               <a:t>依据：802考情与2020—2026真题 · 主讲：牙膏学长</a:t>
             </a:r>
@@ -1710,7 +1628,7 @@
 
 <file path=ppt/slides/slide2.xml><?xml version="1.0" encoding="utf-8"?>
 <p:sld xmlns:a="http://schemas.openxmlformats.org/drawingml/2006/main" xmlns:r="http://schemas.openxmlformats.org/officeDocument/2006/relationships" xmlns:p="http://schemas.openxmlformats.org/presentationml/2006/main">
-  <p:cSld name="Slide 2">
+  <p:cSld>
     <p:bg>
       <p:bgPr>
         <a:blipFill dpi="0" rotWithShape="1">
@@ -1754,13 +1672,12 @@
             <a:avLst/>
           </a:prstGeom>
           <a:noFill/>
-          <a:ln/>
         </p:spPr>
         <p:txBody>
           <a:bodyPr wrap="square" rtlCol="0" anchor="ctr"/>
           <a:lstStyle/>
           <a:p>
-            <a:pPr algn="r" indent="0" marL="0">
+            <a:pPr marL="0" indent="0" algn="r">
               <a:buNone/>
             </a:pPr>
             <a:r>
@@ -1768,9 +1685,9 @@
                 <a:solidFill>
                   <a:srgbClr val="8A9099"/>
                 </a:solidFill>
-                <a:latin typeface="微软雅黑" pitchFamily="34" charset="0"/>
-                <a:ea typeface="微软雅黑" pitchFamily="34" charset="-122"/>
-                <a:cs typeface="微软雅黑" pitchFamily="34" charset="-120"/>
+                <a:latin typeface="微软雅黑" panose="020B0503020204020204" pitchFamily="34" charset="-122"/>
+                <a:ea typeface="微软雅黑" panose="020B0503020204020204" pitchFamily="34" charset="-122"/>
+                <a:cs typeface="微软雅黑" panose="020B0503020204020204" pitchFamily="34" charset="-120"/>
               </a:rPr>
               <a:t>2 / 8</a:t>
             </a:r>
@@ -1793,13 +1710,12 @@
             <a:avLst/>
           </a:prstGeom>
           <a:noFill/>
-          <a:ln/>
         </p:spPr>
         <p:txBody>
           <a:bodyPr wrap="square" rtlCol="0" anchor="ctr"/>
           <a:lstStyle/>
           <a:p>
-            <a:pPr algn="l" indent="0" marL="0">
+            <a:pPr marL="0" indent="0" algn="l">
               <a:buNone/>
             </a:pPr>
             <a:r>
@@ -1807,9 +1723,9 @@
                 <a:solidFill>
                   <a:srgbClr val="1F4E9C"/>
                 </a:solidFill>
-                <a:latin typeface="微软雅黑" pitchFamily="34" charset="0"/>
-                <a:ea typeface="微软雅黑" pitchFamily="34" charset="-122"/>
-                <a:cs typeface="微软雅黑" pitchFamily="34" charset="-120"/>
+                <a:latin typeface="微软雅黑" panose="020B0503020204020204" pitchFamily="34" charset="-122"/>
+                <a:ea typeface="微软雅黑" panose="020B0503020204020204" pitchFamily="34" charset="-122"/>
+                <a:cs typeface="微软雅黑" panose="020B0503020204020204" pitchFamily="34" charset="-120"/>
               </a:rPr>
               <a:t>本章勾画总览</a:t>
             </a:r>
@@ -1832,13 +1748,12 @@
             <a:avLst/>
           </a:prstGeom>
           <a:noFill/>
-          <a:ln/>
         </p:spPr>
         <p:txBody>
           <a:bodyPr wrap="square" rtlCol="0" anchor="ctr"/>
           <a:lstStyle/>
           <a:p>
-            <a:pPr algn="l" indent="0" marL="0">
+            <a:pPr marL="0" indent="0" algn="l">
               <a:buNone/>
             </a:pPr>
             <a:r>
@@ -1846,9 +1761,9 @@
                 <a:solidFill>
                   <a:srgbClr val="1F2329"/>
                 </a:solidFill>
-                <a:latin typeface="微软雅黑" pitchFamily="34" charset="0"/>
-                <a:ea typeface="微软雅黑" pitchFamily="34" charset="-122"/>
-                <a:cs typeface="微软雅黑" pitchFamily="34" charset="-120"/>
+                <a:latin typeface="微软雅黑" panose="020B0503020204020204" pitchFamily="34" charset="-122"/>
+                <a:ea typeface="微软雅黑" panose="020B0503020204020204" pitchFamily="34" charset="-122"/>
+                <a:cs typeface="微软雅黑" panose="020B0503020204020204" pitchFamily="34" charset="-120"/>
               </a:rPr>
               <a:t>第9章三档题量与用法</a:t>
             </a:r>
@@ -1858,21 +1773,15 @@
       </p:sp>
       <p:graphicFrame>
         <p:nvGraphicFramePr>
-          <p:cNvPr id="3" name="Table 0"/>
+          <p:cNvPr id="5" name="Table 0"/>
           <p:cNvGraphicFramePr>
             <a:graphicFrameLocks noGrp="1"/>
           </p:cNvGraphicFramePr>
-          <p:nvPr>
-            <p:extLst>
-              <p:ext uri="{D42A27DB-BD31-4B8C-83A1-F6EECF244321}">
-                <p14:modId xmlns:p14="http://schemas.microsoft.com/office/powerpoint/2010/main" val="1579011935"/>
-              </p:ext>
-            </p:extLst>
-          </p:nvPr>
+          <p:nvPr/>
         </p:nvGraphicFramePr>
         <p:xfrm>
           <a:off x="822960" y="2395728"/>
-          <a:ext cx="10545775" cy="914400"/>
+          <a:ext cx="10545776" cy="1682496"/>
         </p:xfrm>
         <a:graphic>
           <a:graphicData uri="http://schemas.openxmlformats.org/drawingml/2006/table">
@@ -1890,7 +1799,7 @@
                     <a:bodyPr/>
                     <a:lstStyle/>
                     <a:p>
-                      <a:pPr algn="ctr" indent="0" marL="0">
+                      <a:pPr marL="0" indent="0" algn="ctr">
                         <a:buNone/>
                       </a:pPr>
                       <a:r>
@@ -1898,20 +1807,20 @@
                           <a:solidFill>
                             <a:srgbClr val="1F4E9C"/>
                           </a:solidFill>
-                          <a:latin typeface="微软雅黑" pitchFamily="34" charset="0"/>
-                          <a:ea typeface="微软雅黑" pitchFamily="34" charset="-122"/>
-                          <a:cs typeface="微软雅黑" pitchFamily="34" charset="-120"/>
+                          <a:latin typeface="微软雅黑" panose="020B0503020204020204" pitchFamily="34" charset="-122"/>
+                          <a:ea typeface="微软雅黑" panose="020B0503020204020204" pitchFamily="34" charset="-122"/>
+                          <a:cs typeface="微软雅黑" panose="020B0503020204020204" pitchFamily="34" charset="-120"/>
                         </a:rPr>
                         <a:t>方向</a:t>
                       </a:r>
                       <a:endParaRPr lang="en-US" sz="1500" dirty="0">
-                        <a:latin typeface="微软雅黑" charset="0"/>
-                        <a:ea typeface="微软雅黑" charset="0"/>
-                        <a:cs typeface="微软雅黑" charset="0"/>
+                        <a:latin typeface="微软雅黑" panose="020B0503020204020204" pitchFamily="34" charset="-122"/>
+                        <a:ea typeface="微软雅黑" panose="020B0503020204020204" pitchFamily="34" charset="-122"/>
+                        <a:cs typeface="微软雅黑" panose="020B0503020204020204" pitchFamily="34" charset="-122"/>
                       </a:endParaRPr>
                     </a:p>
                   </a:txBody>
-                  <a:tcPr marL="91440" marR="91440" marT="45720" marB="45720" anchor="ctr">
+                  <a:tcPr anchor="ctr">
                     <a:lnL w="9525" cap="flat" cmpd="sng" algn="ctr">
                       <a:solidFill>
                         <a:srgbClr val="D8DBE0"/>
@@ -1958,7 +1867,7 @@
                     <a:bodyPr/>
                     <a:lstStyle/>
                     <a:p>
-                      <a:pPr algn="ctr" indent="0" marL="0">
+                      <a:pPr marL="0" indent="0" algn="ctr">
                         <a:buNone/>
                       </a:pPr>
                       <a:r>
@@ -1966,20 +1875,20 @@
                           <a:solidFill>
                             <a:srgbClr val="1F4E9C"/>
                           </a:solidFill>
-                          <a:latin typeface="微软雅黑" pitchFamily="34" charset="0"/>
-                          <a:ea typeface="微软雅黑" pitchFamily="34" charset="-122"/>
-                          <a:cs typeface="微软雅黑" pitchFamily="34" charset="-120"/>
+                          <a:latin typeface="微软雅黑" panose="020B0503020204020204" pitchFamily="34" charset="-122"/>
+                          <a:ea typeface="微软雅黑" panose="020B0503020204020204" pitchFamily="34" charset="-122"/>
+                          <a:cs typeface="微软雅黑" panose="020B0503020204020204" pitchFamily="34" charset="-120"/>
                         </a:rPr>
                         <a:t>题数</a:t>
                       </a:r>
                       <a:endParaRPr lang="en-US" sz="1500" dirty="0">
-                        <a:latin typeface="微软雅黑" charset="0"/>
-                        <a:ea typeface="微软雅黑" charset="0"/>
-                        <a:cs typeface="微软雅黑" charset="0"/>
+                        <a:latin typeface="微软雅黑" panose="020B0503020204020204" pitchFamily="34" charset="-122"/>
+                        <a:ea typeface="微软雅黑" panose="020B0503020204020204" pitchFamily="34" charset="-122"/>
+                        <a:cs typeface="微软雅黑" panose="020B0503020204020204" pitchFamily="34" charset="-122"/>
                       </a:endParaRPr>
                     </a:p>
                   </a:txBody>
-                  <a:tcPr marL="91440" marR="91440" marT="45720" marB="45720" anchor="ctr">
+                  <a:tcPr anchor="ctr">
                     <a:lnL w="9525" cap="flat" cmpd="sng" algn="ctr">
                       <a:solidFill>
                         <a:srgbClr val="D8DBE0"/>
@@ -2026,7 +1935,7 @@
                     <a:bodyPr/>
                     <a:lstStyle/>
                     <a:p>
-                      <a:pPr algn="ctr" indent="0" marL="0">
+                      <a:pPr marL="0" indent="0" algn="ctr">
                         <a:buNone/>
                       </a:pPr>
                       <a:r>
@@ -2034,20 +1943,20 @@
                           <a:solidFill>
                             <a:srgbClr val="1F4E9C"/>
                           </a:solidFill>
-                          <a:latin typeface="微软雅黑" pitchFamily="34" charset="0"/>
-                          <a:ea typeface="微软雅黑" pitchFamily="34" charset="-122"/>
-                          <a:cs typeface="微软雅黑" pitchFamily="34" charset="-120"/>
+                          <a:latin typeface="微软雅黑" panose="020B0503020204020204" pitchFamily="34" charset="-122"/>
+                          <a:ea typeface="微软雅黑" panose="020B0503020204020204" pitchFamily="34" charset="-122"/>
+                          <a:cs typeface="微软雅黑" panose="020B0503020204020204" pitchFamily="34" charset="-120"/>
                         </a:rPr>
                         <a:t>占比</a:t>
                       </a:r>
                       <a:endParaRPr lang="en-US" sz="1500" dirty="0">
-                        <a:latin typeface="微软雅黑" charset="0"/>
-                        <a:ea typeface="微软雅黑" charset="0"/>
-                        <a:cs typeface="微软雅黑" charset="0"/>
+                        <a:latin typeface="微软雅黑" panose="020B0503020204020204" pitchFamily="34" charset="-122"/>
+                        <a:ea typeface="微软雅黑" panose="020B0503020204020204" pitchFamily="34" charset="-122"/>
+                        <a:cs typeface="微软雅黑" panose="020B0503020204020204" pitchFamily="34" charset="-122"/>
                       </a:endParaRPr>
                     </a:p>
                   </a:txBody>
-                  <a:tcPr marL="91440" marR="91440" marT="45720" marB="45720" anchor="ctr">
+                  <a:tcPr anchor="ctr">
                     <a:lnL w="9525" cap="flat" cmpd="sng" algn="ctr">
                       <a:solidFill>
                         <a:srgbClr val="D8DBE0"/>
@@ -2094,7 +2003,7 @@
                     <a:bodyPr/>
                     <a:lstStyle/>
                     <a:p>
-                      <a:pPr algn="ctr" indent="0" marL="0">
+                      <a:pPr marL="0" indent="0" algn="ctr">
                         <a:buNone/>
                       </a:pPr>
                       <a:r>
@@ -2102,20 +2011,20 @@
                           <a:solidFill>
                             <a:srgbClr val="1F4E9C"/>
                           </a:solidFill>
-                          <a:latin typeface="微软雅黑" pitchFamily="34" charset="0"/>
-                          <a:ea typeface="微软雅黑" pitchFamily="34" charset="-122"/>
-                          <a:cs typeface="微软雅黑" pitchFamily="34" charset="-120"/>
+                          <a:latin typeface="微软雅黑" panose="020B0503020204020204" pitchFamily="34" charset="-122"/>
+                          <a:ea typeface="微软雅黑" panose="020B0503020204020204" pitchFamily="34" charset="-122"/>
+                          <a:cs typeface="微软雅黑" panose="020B0503020204020204" pitchFamily="34" charset="-120"/>
                         </a:rPr>
                         <a:t>定位</a:t>
                       </a:r>
                       <a:endParaRPr lang="en-US" sz="1500" dirty="0">
-                        <a:latin typeface="微软雅黑" charset="0"/>
-                        <a:ea typeface="微软雅黑" charset="0"/>
-                        <a:cs typeface="微软雅黑" charset="0"/>
+                        <a:latin typeface="微软雅黑" panose="020B0503020204020204" pitchFamily="34" charset="-122"/>
+                        <a:ea typeface="微软雅黑" panose="020B0503020204020204" pitchFamily="34" charset="-122"/>
+                        <a:cs typeface="微软雅黑" panose="020B0503020204020204" pitchFamily="34" charset="-122"/>
                       </a:endParaRPr>
                     </a:p>
                   </a:txBody>
-                  <a:tcPr marL="91440" marR="91440" marT="45720" marB="45720" anchor="ctr">
+                  <a:tcPr anchor="ctr">
                     <a:lnL w="9525" cap="flat" cmpd="sng" algn="ctr">
                       <a:solidFill>
                         <a:srgbClr val="D8DBE0"/>
@@ -2164,7 +2073,7 @@
                     <a:bodyPr/>
                     <a:lstStyle/>
                     <a:p>
-                      <a:pPr algn="ctr" indent="0" marL="0">
+                      <a:pPr marL="0" indent="0" algn="ctr">
                         <a:buNone/>
                       </a:pPr>
                       <a:r>
@@ -2172,20 +2081,20 @@
                           <a:solidFill>
                             <a:srgbClr val="1F2329"/>
                           </a:solidFill>
-                          <a:latin typeface="微软雅黑" pitchFamily="34" charset="0"/>
-                          <a:ea typeface="微软雅黑" pitchFamily="34" charset="-122"/>
-                          <a:cs typeface="微软雅黑" pitchFamily="34" charset="-120"/>
+                          <a:latin typeface="微软雅黑" panose="020B0503020204020204" pitchFamily="34" charset="-122"/>
+                          <a:ea typeface="微软雅黑" panose="020B0503020204020204" pitchFamily="34" charset="-122"/>
+                          <a:cs typeface="微软雅黑" panose="020B0503020204020204" pitchFamily="34" charset="-120"/>
                         </a:rPr>
                         <a:t>有价值必做</a:t>
                       </a:r>
                       <a:endParaRPr lang="en-US" sz="1500" dirty="0">
-                        <a:latin typeface="微软雅黑" charset="0"/>
-                        <a:ea typeface="微软雅黑" charset="0"/>
-                        <a:cs typeface="微软雅黑" charset="0"/>
+                        <a:latin typeface="微软雅黑" panose="020B0503020204020204" pitchFamily="34" charset="-122"/>
+                        <a:ea typeface="微软雅黑" panose="020B0503020204020204" pitchFamily="34" charset="-122"/>
+                        <a:cs typeface="微软雅黑" panose="020B0503020204020204" pitchFamily="34" charset="-122"/>
                       </a:endParaRPr>
                     </a:p>
                   </a:txBody>
-                  <a:tcPr marL="91440" marR="91440" marT="45720" marB="45720" anchor="ctr">
+                  <a:tcPr anchor="ctr">
                     <a:lnL w="9525" cap="flat" cmpd="sng" algn="ctr">
                       <a:solidFill>
                         <a:srgbClr val="D8DBE0"/>
@@ -2232,7 +2141,7 @@
                     <a:bodyPr/>
                     <a:lstStyle/>
                     <a:p>
-                      <a:pPr algn="ctr" indent="0" marL="0">
+                      <a:pPr marL="0" indent="0" algn="ctr">
                         <a:buNone/>
                       </a:pPr>
                       <a:r>
@@ -2240,20 +2149,20 @@
                           <a:solidFill>
                             <a:srgbClr val="1F2329"/>
                           </a:solidFill>
-                          <a:latin typeface="微软雅黑" pitchFamily="34" charset="0"/>
-                          <a:ea typeface="微软雅黑" pitchFamily="34" charset="-122"/>
-                          <a:cs typeface="微软雅黑" pitchFamily="34" charset="-120"/>
+                          <a:latin typeface="微软雅黑" panose="020B0503020204020204" pitchFamily="34" charset="-122"/>
+                          <a:ea typeface="微软雅黑" panose="020B0503020204020204" pitchFamily="34" charset="-122"/>
+                          <a:cs typeface="微软雅黑" panose="020B0503020204020204" pitchFamily="34" charset="-120"/>
                         </a:rPr>
                         <a:t>16</a:t>
                       </a:r>
                       <a:endParaRPr lang="en-US" sz="1500" dirty="0">
-                        <a:latin typeface="微软雅黑" charset="0"/>
-                        <a:ea typeface="微软雅黑" charset="0"/>
-                        <a:cs typeface="微软雅黑" charset="0"/>
+                        <a:latin typeface="微软雅黑" panose="020B0503020204020204" pitchFamily="34" charset="-122"/>
+                        <a:ea typeface="微软雅黑" panose="020B0503020204020204" pitchFamily="34" charset="-122"/>
+                        <a:cs typeface="微软雅黑" panose="020B0503020204020204" pitchFamily="34" charset="-122"/>
                       </a:endParaRPr>
                     </a:p>
                   </a:txBody>
-                  <a:tcPr marL="91440" marR="91440" marT="45720" marB="45720" anchor="ctr">
+                  <a:tcPr anchor="ctr">
                     <a:lnL w="9525" cap="flat" cmpd="sng" algn="ctr">
                       <a:solidFill>
                         <a:srgbClr val="D8DBE0"/>
@@ -2300,7 +2209,7 @@
                     <a:bodyPr/>
                     <a:lstStyle/>
                     <a:p>
-                      <a:pPr algn="ctr" indent="0" marL="0">
+                      <a:pPr marL="0" indent="0" algn="ctr">
                         <a:buNone/>
                       </a:pPr>
                       <a:r>
@@ -2308,20 +2217,20 @@
                           <a:solidFill>
                             <a:srgbClr val="1F2329"/>
                           </a:solidFill>
-                          <a:latin typeface="微软雅黑" pitchFamily="34" charset="0"/>
-                          <a:ea typeface="微软雅黑" pitchFamily="34" charset="-122"/>
-                          <a:cs typeface="微软雅黑" pitchFamily="34" charset="-120"/>
+                          <a:latin typeface="微软雅黑" panose="020B0503020204020204" pitchFamily="34" charset="-122"/>
+                          <a:ea typeface="微软雅黑" panose="020B0503020204020204" pitchFamily="34" charset="-122"/>
+                          <a:cs typeface="微软雅黑" panose="020B0503020204020204" pitchFamily="34" charset="-120"/>
                         </a:rPr>
                         <a:t>12%</a:t>
                       </a:r>
                       <a:endParaRPr lang="en-US" sz="1500" dirty="0">
-                        <a:latin typeface="微软雅黑" charset="0"/>
-                        <a:ea typeface="微软雅黑" charset="0"/>
-                        <a:cs typeface="微软雅黑" charset="0"/>
+                        <a:latin typeface="微软雅黑" panose="020B0503020204020204" pitchFamily="34" charset="-122"/>
+                        <a:ea typeface="微软雅黑" panose="020B0503020204020204" pitchFamily="34" charset="-122"/>
+                        <a:cs typeface="微软雅黑" panose="020B0503020204020204" pitchFamily="34" charset="-122"/>
                       </a:endParaRPr>
                     </a:p>
                   </a:txBody>
-                  <a:tcPr marL="91440" marR="91440" marT="45720" marB="45720" anchor="ctr">
+                  <a:tcPr anchor="ctr">
                     <a:lnL w="9525" cap="flat" cmpd="sng" algn="ctr">
                       <a:solidFill>
                         <a:srgbClr val="D8DBE0"/>
@@ -2368,7 +2277,7 @@
                     <a:bodyPr/>
                     <a:lstStyle/>
                     <a:p>
-                      <a:pPr algn="ctr" indent="0" marL="0">
+                      <a:pPr marL="0" indent="0" algn="ctr">
                         <a:buNone/>
                       </a:pPr>
                       <a:r>
@@ -2376,20 +2285,20 @@
                           <a:solidFill>
                             <a:srgbClr val="1F2329"/>
                           </a:solidFill>
-                          <a:latin typeface="微软雅黑" pitchFamily="34" charset="0"/>
-                          <a:ea typeface="微软雅黑" pitchFamily="34" charset="-122"/>
-                          <a:cs typeface="微软雅黑" pitchFamily="34" charset="-120"/>
+                          <a:latin typeface="微软雅黑" panose="020B0503020204020204" pitchFamily="34" charset="-122"/>
+                          <a:ea typeface="微软雅黑" panose="020B0503020204020204" pitchFamily="34" charset="-122"/>
+                          <a:cs typeface="微软雅黑" panose="020B0503020204020204" pitchFamily="34" charset="-120"/>
                         </a:rPr>
                         <a:t>对应真题题型，逐题精做</a:t>
                       </a:r>
                       <a:endParaRPr lang="en-US" sz="1500" dirty="0">
-                        <a:latin typeface="微软雅黑" charset="0"/>
-                        <a:ea typeface="微软雅黑" charset="0"/>
-                        <a:cs typeface="微软雅黑" charset="0"/>
+                        <a:latin typeface="微软雅黑" panose="020B0503020204020204" pitchFamily="34" charset="-122"/>
+                        <a:ea typeface="微软雅黑" panose="020B0503020204020204" pitchFamily="34" charset="-122"/>
+                        <a:cs typeface="微软雅黑" panose="020B0503020204020204" pitchFamily="34" charset="-122"/>
                       </a:endParaRPr>
                     </a:p>
                   </a:txBody>
-                  <a:tcPr marL="91440" marR="91440" marT="45720" marB="45720" anchor="ctr">
+                  <a:tcPr anchor="ctr">
                     <a:lnL w="9525" cap="flat" cmpd="sng" algn="ctr">
                       <a:solidFill>
                         <a:srgbClr val="D8DBE0"/>
@@ -2438,7 +2347,7 @@
                     <a:bodyPr/>
                     <a:lstStyle/>
                     <a:p>
-                      <a:pPr algn="ctr" indent="0" marL="0">
+                      <a:pPr marL="0" indent="0" algn="ctr">
                         <a:buNone/>
                       </a:pPr>
                       <a:r>
@@ -2446,20 +2355,20 @@
                           <a:solidFill>
                             <a:srgbClr val="1F2329"/>
                           </a:solidFill>
-                          <a:latin typeface="微软雅黑" pitchFamily="34" charset="0"/>
-                          <a:ea typeface="微软雅黑" pitchFamily="34" charset="-122"/>
-                          <a:cs typeface="微软雅黑" pitchFamily="34" charset="-120"/>
+                          <a:latin typeface="微软雅黑" panose="020B0503020204020204" pitchFamily="34" charset="-122"/>
+                          <a:ea typeface="微软雅黑" panose="020B0503020204020204" pitchFamily="34" charset="-122"/>
+                          <a:cs typeface="微软雅黑" panose="020B0503020204020204" pitchFamily="34" charset="-120"/>
                         </a:rPr>
                         <a:t>可做可不做</a:t>
                       </a:r>
                       <a:endParaRPr lang="en-US" sz="1500" dirty="0">
-                        <a:latin typeface="微软雅黑" charset="0"/>
-                        <a:ea typeface="微软雅黑" charset="0"/>
-                        <a:cs typeface="微软雅黑" charset="0"/>
+                        <a:latin typeface="微软雅黑" panose="020B0503020204020204" pitchFamily="34" charset="-122"/>
+                        <a:ea typeface="微软雅黑" panose="020B0503020204020204" pitchFamily="34" charset="-122"/>
+                        <a:cs typeface="微软雅黑" panose="020B0503020204020204" pitchFamily="34" charset="-122"/>
                       </a:endParaRPr>
                     </a:p>
                   </a:txBody>
-                  <a:tcPr marL="91440" marR="91440" marT="45720" marB="45720" anchor="ctr">
+                  <a:tcPr anchor="ctr">
                     <a:lnL w="9525" cap="flat" cmpd="sng" algn="ctr">
                       <a:solidFill>
                         <a:srgbClr val="D8DBE0"/>
@@ -2506,7 +2415,7 @@
                     <a:bodyPr/>
                     <a:lstStyle/>
                     <a:p>
-                      <a:pPr algn="ctr" indent="0" marL="0">
+                      <a:pPr marL="0" indent="0" algn="ctr">
                         <a:buNone/>
                       </a:pPr>
                       <a:r>
@@ -2514,20 +2423,20 @@
                           <a:solidFill>
                             <a:srgbClr val="1F2329"/>
                           </a:solidFill>
-                          <a:latin typeface="微软雅黑" pitchFamily="34" charset="0"/>
-                          <a:ea typeface="微软雅黑" pitchFamily="34" charset="-122"/>
-                          <a:cs typeface="微软雅黑" pitchFamily="34" charset="-120"/>
+                          <a:latin typeface="微软雅黑" panose="020B0503020204020204" pitchFamily="34" charset="-122"/>
+                          <a:ea typeface="微软雅黑" panose="020B0503020204020204" pitchFamily="34" charset="-122"/>
+                          <a:cs typeface="微软雅黑" panose="020B0503020204020204" pitchFamily="34" charset="-120"/>
                         </a:rPr>
                         <a:t>80</a:t>
                       </a:r>
                       <a:endParaRPr lang="en-US" sz="1500" dirty="0">
-                        <a:latin typeface="微软雅黑" charset="0"/>
-                        <a:ea typeface="微软雅黑" charset="0"/>
-                        <a:cs typeface="微软雅黑" charset="0"/>
+                        <a:latin typeface="微软雅黑" panose="020B0503020204020204" pitchFamily="34" charset="-122"/>
+                        <a:ea typeface="微软雅黑" panose="020B0503020204020204" pitchFamily="34" charset="-122"/>
+                        <a:cs typeface="微软雅黑" panose="020B0503020204020204" pitchFamily="34" charset="-122"/>
                       </a:endParaRPr>
                     </a:p>
                   </a:txBody>
-                  <a:tcPr marL="91440" marR="91440" marT="45720" marB="45720" anchor="ctr">
+                  <a:tcPr anchor="ctr">
                     <a:lnL w="9525" cap="flat" cmpd="sng" algn="ctr">
                       <a:solidFill>
                         <a:srgbClr val="D8DBE0"/>
@@ -2574,7 +2483,7 @@
                     <a:bodyPr/>
                     <a:lstStyle/>
                     <a:p>
-                      <a:pPr algn="ctr" indent="0" marL="0">
+                      <a:pPr marL="0" indent="0" algn="ctr">
                         <a:buNone/>
                       </a:pPr>
                       <a:r>
@@ -2582,20 +2491,20 @@
                           <a:solidFill>
                             <a:srgbClr val="1F2329"/>
                           </a:solidFill>
-                          <a:latin typeface="微软雅黑" pitchFamily="34" charset="0"/>
-                          <a:ea typeface="微软雅黑" pitchFamily="34" charset="-122"/>
-                          <a:cs typeface="微软雅黑" pitchFamily="34" charset="-120"/>
+                          <a:latin typeface="微软雅黑" panose="020B0503020204020204" pitchFamily="34" charset="-122"/>
+                          <a:ea typeface="微软雅黑" panose="020B0503020204020204" pitchFamily="34" charset="-122"/>
+                          <a:cs typeface="微软雅黑" panose="020B0503020204020204" pitchFamily="34" charset="-120"/>
                         </a:rPr>
                         <a:t>58%</a:t>
                       </a:r>
                       <a:endParaRPr lang="en-US" sz="1500" dirty="0">
-                        <a:latin typeface="微软雅黑" charset="0"/>
-                        <a:ea typeface="微软雅黑" charset="0"/>
-                        <a:cs typeface="微软雅黑" charset="0"/>
+                        <a:latin typeface="微软雅黑" panose="020B0503020204020204" pitchFamily="34" charset="-122"/>
+                        <a:ea typeface="微软雅黑" panose="020B0503020204020204" pitchFamily="34" charset="-122"/>
+                        <a:cs typeface="微软雅黑" panose="020B0503020204020204" pitchFamily="34" charset="-122"/>
                       </a:endParaRPr>
                     </a:p>
                   </a:txBody>
-                  <a:tcPr marL="91440" marR="91440" marT="45720" marB="45720" anchor="ctr">
+                  <a:tcPr anchor="ctr">
                     <a:lnL w="9525" cap="flat" cmpd="sng" algn="ctr">
                       <a:solidFill>
                         <a:srgbClr val="D8DBE0"/>
@@ -2642,7 +2551,7 @@
                     <a:bodyPr/>
                     <a:lstStyle/>
                     <a:p>
-                      <a:pPr algn="ctr" indent="0" marL="0">
+                      <a:pPr marL="0" indent="0" algn="ctr">
                         <a:buNone/>
                       </a:pPr>
                       <a:r>
@@ -2650,20 +2559,20 @@
                           <a:solidFill>
                             <a:srgbClr val="1F2329"/>
                           </a:solidFill>
-                          <a:latin typeface="微软雅黑" pitchFamily="34" charset="0"/>
-                          <a:ea typeface="微软雅黑" pitchFamily="34" charset="-122"/>
-                          <a:cs typeface="微软雅黑" pitchFamily="34" charset="-120"/>
+                          <a:latin typeface="微软雅黑" panose="020B0503020204020204" pitchFamily="34" charset="-122"/>
+                          <a:ea typeface="微软雅黑" panose="020B0503020204020204" pitchFamily="34" charset="-122"/>
+                          <a:cs typeface="微软雅黑" panose="020B0503020204020204" pitchFamily="34" charset="-120"/>
                         </a:rPr>
                         <a:t>在纲内、考频低，限时巩固</a:t>
                       </a:r>
                       <a:endParaRPr lang="en-US" sz="1500" dirty="0">
-                        <a:latin typeface="微软雅黑" charset="0"/>
-                        <a:ea typeface="微软雅黑" charset="0"/>
-                        <a:cs typeface="微软雅黑" charset="0"/>
+                        <a:latin typeface="微软雅黑" panose="020B0503020204020204" pitchFamily="34" charset="-122"/>
+                        <a:ea typeface="微软雅黑" panose="020B0503020204020204" pitchFamily="34" charset="-122"/>
+                        <a:cs typeface="微软雅黑" panose="020B0503020204020204" pitchFamily="34" charset="-122"/>
                       </a:endParaRPr>
                     </a:p>
                   </a:txBody>
-                  <a:tcPr marL="91440" marR="91440" marT="45720" marB="45720" anchor="ctr">
+                  <a:tcPr anchor="ctr">
                     <a:lnL w="9525" cap="flat" cmpd="sng" algn="ctr">
                       <a:solidFill>
                         <a:srgbClr val="D8DBE0"/>
@@ -2712,7 +2621,7 @@
                     <a:bodyPr/>
                     <a:lstStyle/>
                     <a:p>
-                      <a:pPr algn="ctr" indent="0" marL="0">
+                      <a:pPr marL="0" indent="0" algn="ctr">
                         <a:buNone/>
                       </a:pPr>
                       <a:r>
@@ -2720,20 +2629,20 @@
                           <a:solidFill>
                             <a:srgbClr val="1F2329"/>
                           </a:solidFill>
-                          <a:latin typeface="微软雅黑" pitchFamily="34" charset="0"/>
-                          <a:ea typeface="微软雅黑" pitchFamily="34" charset="-122"/>
-                          <a:cs typeface="微软雅黑" pitchFamily="34" charset="-120"/>
+                          <a:latin typeface="微软雅黑" panose="020B0503020204020204" pitchFamily="34" charset="-122"/>
+                          <a:ea typeface="微软雅黑" panose="020B0503020204020204" pitchFamily="34" charset="-122"/>
+                          <a:cs typeface="微软雅黑" panose="020B0503020204020204" pitchFamily="34" charset="-120"/>
                         </a:rPr>
                         <a:t>完全不做</a:t>
                       </a:r>
                       <a:endParaRPr lang="en-US" sz="1500" dirty="0">
-                        <a:latin typeface="微软雅黑" charset="0"/>
-                        <a:ea typeface="微软雅黑" charset="0"/>
-                        <a:cs typeface="微软雅黑" charset="0"/>
+                        <a:latin typeface="微软雅黑" panose="020B0503020204020204" pitchFamily="34" charset="-122"/>
+                        <a:ea typeface="微软雅黑" panose="020B0503020204020204" pitchFamily="34" charset="-122"/>
+                        <a:cs typeface="微软雅黑" panose="020B0503020204020204" pitchFamily="34" charset="-122"/>
                       </a:endParaRPr>
                     </a:p>
                   </a:txBody>
-                  <a:tcPr marL="91440" marR="91440" marT="45720" marB="45720" anchor="ctr">
+                  <a:tcPr anchor="ctr">
                     <a:lnL w="9525" cap="flat" cmpd="sng" algn="ctr">
                       <a:solidFill>
                         <a:srgbClr val="D8DBE0"/>
@@ -2780,7 +2689,7 @@
                     <a:bodyPr/>
                     <a:lstStyle/>
                     <a:p>
-                      <a:pPr algn="ctr" indent="0" marL="0">
+                      <a:pPr marL="0" indent="0" algn="ctr">
                         <a:buNone/>
                       </a:pPr>
                       <a:r>
@@ -2788,20 +2697,20 @@
                           <a:solidFill>
                             <a:srgbClr val="1F2329"/>
                           </a:solidFill>
-                          <a:latin typeface="微软雅黑" pitchFamily="34" charset="0"/>
-                          <a:ea typeface="微软雅黑" pitchFamily="34" charset="-122"/>
-                          <a:cs typeface="微软雅黑" pitchFamily="34" charset="-120"/>
+                          <a:latin typeface="微软雅黑" panose="020B0503020204020204" pitchFamily="34" charset="-122"/>
+                          <a:ea typeface="微软雅黑" panose="020B0503020204020204" pitchFamily="34" charset="-122"/>
+                          <a:cs typeface="微软雅黑" panose="020B0503020204020204" pitchFamily="34" charset="-120"/>
                         </a:rPr>
                         <a:t>42</a:t>
                       </a:r>
                       <a:endParaRPr lang="en-US" sz="1500" dirty="0">
-                        <a:latin typeface="微软雅黑" charset="0"/>
-                        <a:ea typeface="微软雅黑" charset="0"/>
-                        <a:cs typeface="微软雅黑" charset="0"/>
+                        <a:latin typeface="微软雅黑" panose="020B0503020204020204" pitchFamily="34" charset="-122"/>
+                        <a:ea typeface="微软雅黑" panose="020B0503020204020204" pitchFamily="34" charset="-122"/>
+                        <a:cs typeface="微软雅黑" panose="020B0503020204020204" pitchFamily="34" charset="-122"/>
                       </a:endParaRPr>
                     </a:p>
                   </a:txBody>
-                  <a:tcPr marL="91440" marR="91440" marT="45720" marB="45720" anchor="ctr">
+                  <a:tcPr anchor="ctr">
                     <a:lnL w="9525" cap="flat" cmpd="sng" algn="ctr">
                       <a:solidFill>
                         <a:srgbClr val="D8DBE0"/>
@@ -2848,7 +2757,7 @@
                     <a:bodyPr/>
                     <a:lstStyle/>
                     <a:p>
-                      <a:pPr algn="ctr" indent="0" marL="0">
+                      <a:pPr marL="0" indent="0" algn="ctr">
                         <a:buNone/>
                       </a:pPr>
                       <a:r>
@@ -2856,20 +2765,20 @@
                           <a:solidFill>
                             <a:srgbClr val="1F2329"/>
                           </a:solidFill>
-                          <a:latin typeface="微软雅黑" pitchFamily="34" charset="0"/>
-                          <a:ea typeface="微软雅黑" pitchFamily="34" charset="-122"/>
-                          <a:cs typeface="微软雅黑" pitchFamily="34" charset="-120"/>
+                          <a:latin typeface="微软雅黑" panose="020B0503020204020204" pitchFamily="34" charset="-122"/>
+                          <a:ea typeface="微软雅黑" panose="020B0503020204020204" pitchFamily="34" charset="-122"/>
+                          <a:cs typeface="微软雅黑" panose="020B0503020204020204" pitchFamily="34" charset="-120"/>
                         </a:rPr>
                         <a:t>30%</a:t>
                       </a:r>
                       <a:endParaRPr lang="en-US" sz="1500" dirty="0">
-                        <a:latin typeface="微软雅黑" charset="0"/>
-                        <a:ea typeface="微软雅黑" charset="0"/>
-                        <a:cs typeface="微软雅黑" charset="0"/>
+                        <a:latin typeface="微软雅黑" panose="020B0503020204020204" pitchFamily="34" charset="-122"/>
+                        <a:ea typeface="微软雅黑" panose="020B0503020204020204" pitchFamily="34" charset="-122"/>
+                        <a:cs typeface="微软雅黑" panose="020B0503020204020204" pitchFamily="34" charset="-122"/>
                       </a:endParaRPr>
                     </a:p>
                   </a:txBody>
-                  <a:tcPr marL="91440" marR="91440" marT="45720" marB="45720" anchor="ctr">
+                  <a:tcPr anchor="ctr">
                     <a:lnL w="9525" cap="flat" cmpd="sng" algn="ctr">
                       <a:solidFill>
                         <a:srgbClr val="D8DBE0"/>
@@ -2916,7 +2825,7 @@
                     <a:bodyPr/>
                     <a:lstStyle/>
                     <a:p>
-                      <a:pPr algn="ctr" indent="0" marL="0">
+                      <a:pPr marL="0" indent="0" algn="ctr">
                         <a:buNone/>
                       </a:pPr>
                       <a:r>
@@ -2924,20 +2833,20 @@
                           <a:solidFill>
                             <a:srgbClr val="1F2329"/>
                           </a:solidFill>
-                          <a:latin typeface="微软雅黑" pitchFamily="34" charset="0"/>
-                          <a:ea typeface="微软雅黑" pitchFamily="34" charset="-122"/>
-                          <a:cs typeface="微软雅黑" pitchFamily="34" charset="-120"/>
+                          <a:latin typeface="微软雅黑" panose="020B0503020204020204" pitchFamily="34" charset="-122"/>
+                          <a:ea typeface="微软雅黑" panose="020B0503020204020204" pitchFamily="34" charset="-122"/>
+                          <a:cs typeface="微软雅黑" panose="020B0503020204020204" pitchFamily="34" charset="-120"/>
                         </a:rPr>
                         <a:t>超纲或无对应题型，直接跳过</a:t>
                       </a:r>
                       <a:endParaRPr lang="en-US" sz="1500" dirty="0">
-                        <a:latin typeface="微软雅黑" charset="0"/>
-                        <a:ea typeface="微软雅黑" charset="0"/>
-                        <a:cs typeface="微软雅黑" charset="0"/>
+                        <a:latin typeface="微软雅黑" panose="020B0503020204020204" pitchFamily="34" charset="-122"/>
+                        <a:ea typeface="微软雅黑" panose="020B0503020204020204" pitchFamily="34" charset="-122"/>
+                        <a:cs typeface="微软雅黑" panose="020B0503020204020204" pitchFamily="34" charset="-122"/>
                       </a:endParaRPr>
                     </a:p>
                   </a:txBody>
-                  <a:tcPr marL="91440" marR="91440" marT="45720" marB="45720" anchor="ctr">
+                  <a:tcPr anchor="ctr">
                     <a:lnL w="9525" cap="flat" cmpd="sng" algn="ctr">
                       <a:solidFill>
                         <a:srgbClr val="D8DBE0"/>
@@ -2999,13 +2908,12 @@
             <a:avLst/>
           </a:prstGeom>
           <a:noFill/>
-          <a:ln/>
         </p:spPr>
         <p:txBody>
           <a:bodyPr wrap="square" rtlCol="0" anchor="t"/>
           <a:lstStyle/>
           <a:p>
-            <a:pPr algn="l" indent="0" marL="0">
+            <a:pPr marL="0" indent="0" algn="l">
               <a:buNone/>
             </a:pPr>
             <a:r>
@@ -3013,9 +2921,9 @@
                 <a:solidFill>
                   <a:srgbClr val="8A9099"/>
                 </a:solidFill>
-                <a:latin typeface="微软雅黑" pitchFamily="34" charset="0"/>
-                <a:ea typeface="微软雅黑" pitchFamily="34" charset="-122"/>
-                <a:cs typeface="微软雅黑" pitchFamily="34" charset="-120"/>
+                <a:latin typeface="微软雅黑" panose="020B0503020204020204" pitchFamily="34" charset="-122"/>
+                <a:ea typeface="微软雅黑" panose="020B0503020204020204" pitchFamily="34" charset="-122"/>
+                <a:cs typeface="微软雅黑" panose="020B0503020204020204" pitchFamily="34" charset="-120"/>
               </a:rPr>
               <a:t>题号口径：选N＝本章单项选择题第N题，答N＝解答题第N题，算N＝算法设计题第N题；页码为题集PDF页（书页＝PDF页−9）。</a:t>
             </a:r>
@@ -3033,7 +2941,7 @@
 
 <file path=ppt/slides/slide3.xml><?xml version="1.0" encoding="utf-8"?>
 <p:sld xmlns:a="http://schemas.openxmlformats.org/drawingml/2006/main" xmlns:r="http://schemas.openxmlformats.org/officeDocument/2006/relationships" xmlns:p="http://schemas.openxmlformats.org/presentationml/2006/main">
-  <p:cSld name="Slide 3">
+  <p:cSld>
     <p:bg>
       <p:bgPr>
         <a:blipFill dpi="0" rotWithShape="1">
@@ -3077,13 +2985,12 @@
             <a:avLst/>
           </a:prstGeom>
           <a:noFill/>
-          <a:ln/>
         </p:spPr>
         <p:txBody>
           <a:bodyPr wrap="square" rtlCol="0" anchor="ctr"/>
           <a:lstStyle/>
           <a:p>
-            <a:pPr algn="r" indent="0" marL="0">
+            <a:pPr marL="0" indent="0" algn="r">
               <a:buNone/>
             </a:pPr>
             <a:r>
@@ -3091,9 +2998,9 @@
                 <a:solidFill>
                   <a:srgbClr val="8A9099"/>
                 </a:solidFill>
-                <a:latin typeface="微软雅黑" pitchFamily="34" charset="0"/>
-                <a:ea typeface="微软雅黑" pitchFamily="34" charset="-122"/>
-                <a:cs typeface="微软雅黑" pitchFamily="34" charset="-120"/>
+                <a:latin typeface="微软雅黑" panose="020B0503020204020204" pitchFamily="34" charset="-122"/>
+                <a:ea typeface="微软雅黑" panose="020B0503020204020204" pitchFamily="34" charset="-122"/>
+                <a:cs typeface="微软雅黑" panose="020B0503020204020204" pitchFamily="34" charset="-120"/>
               </a:rPr>
               <a:t>3 / 8</a:t>
             </a:r>
@@ -3116,13 +3023,12 @@
             <a:avLst/>
           </a:prstGeom>
           <a:noFill/>
-          <a:ln/>
         </p:spPr>
         <p:txBody>
           <a:bodyPr wrap="square" rtlCol="0" anchor="ctr"/>
           <a:lstStyle/>
           <a:p>
-            <a:pPr algn="l" indent="0" marL="0">
+            <a:pPr marL="0" indent="0" algn="l">
               <a:buNone/>
             </a:pPr>
             <a:r>
@@ -3130,9 +3036,9 @@
                 <a:solidFill>
                   <a:srgbClr val="1F4E9C"/>
                 </a:solidFill>
-                <a:latin typeface="微软雅黑" pitchFamily="34" charset="0"/>
-                <a:ea typeface="微软雅黑" pitchFamily="34" charset="-122"/>
-                <a:cs typeface="微软雅黑" pitchFamily="34" charset="-120"/>
+                <a:latin typeface="微软雅黑" panose="020B0503020204020204" pitchFamily="34" charset="-122"/>
+                <a:ea typeface="微软雅黑" panose="020B0503020204020204" pitchFamily="34" charset="-122"/>
+                <a:cs typeface="微软雅黑" panose="020B0503020204020204" pitchFamily="34" charset="-120"/>
               </a:rPr>
               <a:t>有价值必做</a:t>
             </a:r>
@@ -3155,13 +3061,12 @@
             <a:avLst/>
           </a:prstGeom>
           <a:noFill/>
-          <a:ln/>
         </p:spPr>
         <p:txBody>
           <a:bodyPr wrap="square" rtlCol="0" anchor="ctr"/>
           <a:lstStyle/>
           <a:p>
-            <a:pPr algn="l" indent="0" marL="0">
+            <a:pPr marL="0" indent="0" algn="l">
               <a:buNone/>
             </a:pPr>
             <a:r>
@@ -3169,9 +3074,9 @@
                 <a:solidFill>
                   <a:srgbClr val="1F2329"/>
                 </a:solidFill>
-                <a:latin typeface="微软雅黑" pitchFamily="34" charset="0"/>
-                <a:ea typeface="微软雅黑" pitchFamily="34" charset="-122"/>
-                <a:cs typeface="微软雅黑" pitchFamily="34" charset="-120"/>
+                <a:latin typeface="微软雅黑" panose="020B0503020204020204" pitchFamily="34" charset="-122"/>
+                <a:ea typeface="微软雅黑" panose="020B0503020204020204" pitchFamily="34" charset="-122"/>
+                <a:cs typeface="微软雅黑" panose="020B0503020204020204" pitchFamily="34" charset="-120"/>
               </a:rPr>
               <a:t>必做题（1/3）</a:t>
             </a:r>
@@ -3181,21 +3086,15 @@
       </p:sp>
       <p:graphicFrame>
         <p:nvGraphicFramePr>
-          <p:cNvPr id="4" name="Table 0"/>
+          <p:cNvPr id="5" name="Table 0"/>
           <p:cNvGraphicFramePr>
             <a:graphicFrameLocks noGrp="1"/>
           </p:cNvGraphicFramePr>
-          <p:nvPr>
-            <p:extLst>
-              <p:ext uri="{D42A27DB-BD31-4B8C-83A1-F6EECF244321}">
-                <p14:modId xmlns:p14="http://schemas.microsoft.com/office/powerpoint/2010/main" val="1579011935"/>
-              </p:ext>
-            </p:extLst>
-          </p:nvPr>
+          <p:nvPr/>
         </p:nvGraphicFramePr>
         <p:xfrm>
           <a:off x="822960" y="2395728"/>
-          <a:ext cx="10545775" cy="914400"/>
+          <a:ext cx="10545775" cy="2944368"/>
         </p:xfrm>
         <a:graphic>
           <a:graphicData uri="http://schemas.openxmlformats.org/drawingml/2006/table">
@@ -3212,7 +3111,7 @@
                     <a:bodyPr/>
                     <a:lstStyle/>
                     <a:p>
-                      <a:pPr algn="l" indent="0" marL="0">
+                      <a:pPr marL="0" indent="0" algn="l">
                         <a:buNone/>
                       </a:pPr>
                       <a:r>
@@ -3220,20 +3119,20 @@
                           <a:solidFill>
                             <a:srgbClr val="1F4E9C"/>
                           </a:solidFill>
-                          <a:latin typeface="微软雅黑" pitchFamily="34" charset="0"/>
-                          <a:ea typeface="微软雅黑" pitchFamily="34" charset="-122"/>
-                          <a:cs typeface="微软雅黑" pitchFamily="34" charset="-120"/>
+                          <a:latin typeface="微软雅黑" panose="020B0503020204020204" pitchFamily="34" charset="-122"/>
+                          <a:ea typeface="微软雅黑" panose="020B0503020204020204" pitchFamily="34" charset="-122"/>
+                          <a:cs typeface="微软雅黑" panose="020B0503020204020204" pitchFamily="34" charset="-120"/>
                         </a:rPr>
                         <a:t>题号</a:t>
                       </a:r>
                       <a:endParaRPr lang="en-US" sz="1500" dirty="0">
-                        <a:latin typeface="微软雅黑" charset="0"/>
-                        <a:ea typeface="微软雅黑" charset="0"/>
-                        <a:cs typeface="微软雅黑" charset="0"/>
+                        <a:latin typeface="微软雅黑" panose="020B0503020204020204" pitchFamily="34" charset="-122"/>
+                        <a:ea typeface="微软雅黑" panose="020B0503020204020204" pitchFamily="34" charset="-122"/>
+                        <a:cs typeface="微软雅黑" panose="020B0503020204020204" pitchFamily="34" charset="-122"/>
                       </a:endParaRPr>
                     </a:p>
                   </a:txBody>
-                  <a:tcPr marL="91440" marR="91440" marT="45720" marB="45720" anchor="ctr">
+                  <a:tcPr anchor="ctr">
                     <a:lnL w="9525" cap="flat" cmpd="sng" algn="ctr">
                       <a:solidFill>
                         <a:srgbClr val="D8DBE0"/>
@@ -3280,7 +3179,7 @@
                     <a:bodyPr/>
                     <a:lstStyle/>
                     <a:p>
-                      <a:pPr algn="l" indent="0" marL="0">
+                      <a:pPr marL="0" indent="0" algn="l">
                         <a:buNone/>
                       </a:pPr>
                       <a:r>
@@ -3288,20 +3187,20 @@
                           <a:solidFill>
                             <a:srgbClr val="1F4E9C"/>
                           </a:solidFill>
-                          <a:latin typeface="微软雅黑" pitchFamily="34" charset="0"/>
-                          <a:ea typeface="微软雅黑" pitchFamily="34" charset="-122"/>
-                          <a:cs typeface="微软雅黑" pitchFamily="34" charset="-120"/>
+                          <a:latin typeface="微软雅黑" panose="020B0503020204020204" pitchFamily="34" charset="-122"/>
+                          <a:ea typeface="微软雅黑" panose="020B0503020204020204" pitchFamily="34" charset="-122"/>
+                          <a:cs typeface="微软雅黑" panose="020B0503020204020204" pitchFamily="34" charset="-120"/>
                         </a:rPr>
                         <a:t>考点</a:t>
                       </a:r>
                       <a:endParaRPr lang="en-US" sz="1500" dirty="0">
-                        <a:latin typeface="微软雅黑" charset="0"/>
-                        <a:ea typeface="微软雅黑" charset="0"/>
-                        <a:cs typeface="微软雅黑" charset="0"/>
+                        <a:latin typeface="微软雅黑" panose="020B0503020204020204" pitchFamily="34" charset="-122"/>
+                        <a:ea typeface="微软雅黑" panose="020B0503020204020204" pitchFamily="34" charset="-122"/>
+                        <a:cs typeface="微软雅黑" panose="020B0503020204020204" pitchFamily="34" charset="-122"/>
                       </a:endParaRPr>
                     </a:p>
                   </a:txBody>
-                  <a:tcPr marL="91440" marR="91440" marT="45720" marB="45720" anchor="ctr">
+                  <a:tcPr anchor="ctr">
                     <a:lnL w="9525" cap="flat" cmpd="sng" algn="ctr">
                       <a:solidFill>
                         <a:srgbClr val="D8DBE0"/>
@@ -3348,7 +3247,7 @@
                     <a:bodyPr/>
                     <a:lstStyle/>
                     <a:p>
-                      <a:pPr algn="l" indent="0" marL="0">
+                      <a:pPr marL="0" indent="0" algn="l">
                         <a:buNone/>
                       </a:pPr>
                       <a:r>
@@ -3356,20 +3255,20 @@
                           <a:solidFill>
                             <a:srgbClr val="1F4E9C"/>
                           </a:solidFill>
-                          <a:latin typeface="微软雅黑" pitchFamily="34" charset="0"/>
-                          <a:ea typeface="微软雅黑" pitchFamily="34" charset="-122"/>
-                          <a:cs typeface="微软雅黑" pitchFamily="34" charset="-120"/>
+                          <a:latin typeface="微软雅黑" panose="020B0503020204020204" pitchFamily="34" charset="-122"/>
+                          <a:ea typeface="微软雅黑" panose="020B0503020204020204" pitchFamily="34" charset="-122"/>
+                          <a:cs typeface="微软雅黑" panose="020B0503020204020204" pitchFamily="34" charset="-120"/>
                         </a:rPr>
                         <a:t>价值</a:t>
                       </a:r>
                       <a:endParaRPr lang="en-US" sz="1500" dirty="0">
-                        <a:latin typeface="微软雅黑" charset="0"/>
-                        <a:ea typeface="微软雅黑" charset="0"/>
-                        <a:cs typeface="微软雅黑" charset="0"/>
+                        <a:latin typeface="微软雅黑" panose="020B0503020204020204" pitchFamily="34" charset="-122"/>
+                        <a:ea typeface="微软雅黑" panose="020B0503020204020204" pitchFamily="34" charset="-122"/>
+                        <a:cs typeface="微软雅黑" panose="020B0503020204020204" pitchFamily="34" charset="-122"/>
                       </a:endParaRPr>
                     </a:p>
                   </a:txBody>
-                  <a:tcPr marL="91440" marR="91440" marT="45720" marB="45720" anchor="ctr">
+                  <a:tcPr anchor="ctr">
                     <a:lnL w="9525" cap="flat" cmpd="sng" algn="ctr">
                       <a:solidFill>
                         <a:srgbClr val="D8DBE0"/>
@@ -3418,7 +3317,7 @@
                     <a:bodyPr/>
                     <a:lstStyle/>
                     <a:p>
-                      <a:pPr algn="l" indent="0" marL="0">
+                      <a:pPr marL="0" indent="0" algn="l">
                         <a:buNone/>
                       </a:pPr>
                       <a:r>
@@ -3426,20 +3325,20 @@
                           <a:solidFill>
                             <a:srgbClr val="1F2329"/>
                           </a:solidFill>
-                          <a:latin typeface="微软雅黑" pitchFamily="34" charset="0"/>
-                          <a:ea typeface="微软雅黑" pitchFamily="34" charset="-122"/>
-                          <a:cs typeface="微软雅黑" pitchFamily="34" charset="-120"/>
+                          <a:latin typeface="微软雅黑" panose="020B0503020204020204" pitchFamily="34" charset="-122"/>
+                          <a:ea typeface="微软雅黑" panose="020B0503020204020204" pitchFamily="34" charset="-122"/>
+                          <a:cs typeface="微软雅黑" panose="020B0503020204020204" pitchFamily="34" charset="-120"/>
                         </a:rPr>
                         <a:t>9选2</a:t>
                       </a:r>
                       <a:endParaRPr lang="en-US" sz="1500" dirty="0">
-                        <a:latin typeface="微软雅黑" charset="0"/>
-                        <a:ea typeface="微软雅黑" charset="0"/>
-                        <a:cs typeface="微软雅黑" charset="0"/>
+                        <a:latin typeface="微软雅黑" panose="020B0503020204020204" pitchFamily="34" charset="-122"/>
+                        <a:ea typeface="微软雅黑" panose="020B0503020204020204" pitchFamily="34" charset="-122"/>
+                        <a:cs typeface="微软雅黑" panose="020B0503020204020204" pitchFamily="34" charset="-122"/>
                       </a:endParaRPr>
                     </a:p>
                   </a:txBody>
-                  <a:tcPr marL="91440" marR="91440" marT="45720" marB="45720" anchor="ctr">
+                  <a:tcPr anchor="ctr">
                     <a:lnL w="9525" cap="flat" cmpd="sng" algn="ctr">
                       <a:solidFill>
                         <a:srgbClr val="D8DBE0"/>
@@ -3486,7 +3385,7 @@
                     <a:bodyPr/>
                     <a:lstStyle/>
                     <a:p>
-                      <a:pPr algn="l" indent="0" marL="0">
+                      <a:pPr marL="0" indent="0" algn="l">
                         <a:buNone/>
                       </a:pPr>
                       <a:r>
@@ -3494,20 +3393,20 @@
                           <a:solidFill>
                             <a:srgbClr val="1F2329"/>
                           </a:solidFill>
-                          <a:latin typeface="微软雅黑" pitchFamily="34" charset="0"/>
-                          <a:ea typeface="微软雅黑" pitchFamily="34" charset="-122"/>
-                          <a:cs typeface="微软雅黑" pitchFamily="34" charset="-120"/>
+                          <a:latin typeface="微软雅黑" panose="020B0503020204020204" pitchFamily="34" charset="-122"/>
+                          <a:ea typeface="微软雅黑" panose="020B0503020204020204" pitchFamily="34" charset="-122"/>
+                          <a:cs typeface="微软雅黑" panose="020B0503020204020204" pitchFamily="34" charset="-120"/>
                         </a:rPr>
                         <a:t>折半比较次数</a:t>
                       </a:r>
                       <a:endParaRPr lang="en-US" sz="1500" dirty="0">
-                        <a:latin typeface="微软雅黑" charset="0"/>
-                        <a:ea typeface="微软雅黑" charset="0"/>
-                        <a:cs typeface="微软雅黑" charset="0"/>
+                        <a:latin typeface="微软雅黑" panose="020B0503020204020204" pitchFamily="34" charset="-122"/>
+                        <a:ea typeface="微软雅黑" panose="020B0503020204020204" pitchFamily="34" charset="-122"/>
+                        <a:cs typeface="微软雅黑" panose="020B0503020204020204" pitchFamily="34" charset="-122"/>
                       </a:endParaRPr>
                     </a:p>
                   </a:txBody>
-                  <a:tcPr marL="91440" marR="91440" marT="45720" marB="45720" anchor="ctr">
+                  <a:tcPr anchor="ctr">
                     <a:lnL w="9525" cap="flat" cmpd="sng" algn="ctr">
                       <a:solidFill>
                         <a:srgbClr val="D8DBE0"/>
@@ -3554,7 +3453,7 @@
                     <a:bodyPr/>
                     <a:lstStyle/>
                     <a:p>
-                      <a:pPr algn="l" indent="0" marL="0">
+                      <a:pPr marL="0" indent="0" algn="l">
                         <a:buNone/>
                       </a:pPr>
                       <a:r>
@@ -3562,20 +3461,20 @@
                           <a:solidFill>
                             <a:srgbClr val="1F2329"/>
                           </a:solidFill>
-                          <a:latin typeface="微软雅黑" pitchFamily="34" charset="0"/>
-                          <a:ea typeface="微软雅黑" pitchFamily="34" charset="-122"/>
-                          <a:cs typeface="微软雅黑" pitchFamily="34" charset="-120"/>
+                          <a:latin typeface="微软雅黑" panose="020B0503020204020204" pitchFamily="34" charset="-122"/>
+                          <a:ea typeface="微软雅黑" panose="020B0503020204020204" pitchFamily="34" charset="-122"/>
+                          <a:cs typeface="微软雅黑" panose="020B0503020204020204" pitchFamily="34" charset="-120"/>
                         </a:rPr>
                         <a:t>三关键字比较次数，2026填13</a:t>
                       </a:r>
                       <a:endParaRPr lang="en-US" sz="1500" dirty="0">
-                        <a:latin typeface="微软雅黑" charset="0"/>
-                        <a:ea typeface="微软雅黑" charset="0"/>
-                        <a:cs typeface="微软雅黑" charset="0"/>
+                        <a:latin typeface="微软雅黑" panose="020B0503020204020204" pitchFamily="34" charset="-122"/>
+                        <a:ea typeface="微软雅黑" panose="020B0503020204020204" pitchFamily="34" charset="-122"/>
+                        <a:cs typeface="微软雅黑" panose="020B0503020204020204" pitchFamily="34" charset="-122"/>
                       </a:endParaRPr>
                     </a:p>
                   </a:txBody>
-                  <a:tcPr marL="91440" marR="91440" marT="45720" marB="45720" anchor="ctr">
+                  <a:tcPr anchor="ctr">
                     <a:lnL w="9525" cap="flat" cmpd="sng" algn="ctr">
                       <a:solidFill>
                         <a:srgbClr val="D8DBE0"/>
@@ -3624,7 +3523,7 @@
                     <a:bodyPr/>
                     <a:lstStyle/>
                     <a:p>
-                      <a:pPr algn="l" indent="0" marL="0">
+                      <a:pPr marL="0" indent="0" algn="l">
                         <a:buNone/>
                       </a:pPr>
                       <a:r>
@@ -3632,20 +3531,20 @@
                           <a:solidFill>
                             <a:srgbClr val="1F2329"/>
                           </a:solidFill>
-                          <a:latin typeface="微软雅黑" pitchFamily="34" charset="0"/>
-                          <a:ea typeface="微软雅黑" pitchFamily="34" charset="-122"/>
-                          <a:cs typeface="微软雅黑" pitchFamily="34" charset="-120"/>
+                          <a:latin typeface="微软雅黑" panose="020B0503020204020204" pitchFamily="34" charset="-122"/>
+                          <a:ea typeface="微软雅黑" panose="020B0503020204020204" pitchFamily="34" charset="-122"/>
+                          <a:cs typeface="微软雅黑" panose="020B0503020204020204" pitchFamily="34" charset="-120"/>
                         </a:rPr>
                         <a:t>9选4</a:t>
                       </a:r>
                       <a:endParaRPr lang="en-US" sz="1500" dirty="0">
-                        <a:latin typeface="微软雅黑" charset="0"/>
-                        <a:ea typeface="微软雅黑" charset="0"/>
-                        <a:cs typeface="微软雅黑" charset="0"/>
+                        <a:latin typeface="微软雅黑" panose="020B0503020204020204" pitchFamily="34" charset="-122"/>
+                        <a:ea typeface="微软雅黑" panose="020B0503020204020204" pitchFamily="34" charset="-122"/>
+                        <a:cs typeface="微软雅黑" panose="020B0503020204020204" pitchFamily="34" charset="-122"/>
                       </a:endParaRPr>
                     </a:p>
                   </a:txBody>
-                  <a:tcPr marL="91440" marR="91440" marT="45720" marB="45720" anchor="ctr">
+                  <a:tcPr anchor="ctr">
                     <a:lnL w="9525" cap="flat" cmpd="sng" algn="ctr">
                       <a:solidFill>
                         <a:srgbClr val="D8DBE0"/>
@@ -3692,7 +3591,7 @@
                     <a:bodyPr/>
                     <a:lstStyle/>
                     <a:p>
-                      <a:pPr algn="l" indent="0" marL="0">
+                      <a:pPr marL="0" indent="0" algn="l">
                         <a:buNone/>
                       </a:pPr>
                       <a:r>
@@ -3700,20 +3599,20 @@
                           <a:solidFill>
                             <a:srgbClr val="1F2329"/>
                           </a:solidFill>
-                          <a:latin typeface="微软雅黑" pitchFamily="34" charset="0"/>
-                          <a:ea typeface="微软雅黑" pitchFamily="34" charset="-122"/>
-                          <a:cs typeface="微软雅黑" pitchFamily="34" charset="-120"/>
+                          <a:latin typeface="微软雅黑" panose="020B0503020204020204" pitchFamily="34" charset="-122"/>
+                          <a:ea typeface="微软雅黑" panose="020B0503020204020204" pitchFamily="34" charset="-122"/>
+                          <a:cs typeface="微软雅黑" panose="020B0503020204020204" pitchFamily="34" charset="-120"/>
                         </a:rPr>
                         <a:t>折半比较序列</a:t>
                       </a:r>
                       <a:endParaRPr lang="en-US" sz="1500" dirty="0">
-                        <a:latin typeface="微软雅黑" charset="0"/>
-                        <a:ea typeface="微软雅黑" charset="0"/>
-                        <a:cs typeface="微软雅黑" charset="0"/>
+                        <a:latin typeface="微软雅黑" panose="020B0503020204020204" pitchFamily="34" charset="-122"/>
+                        <a:ea typeface="微软雅黑" panose="020B0503020204020204" pitchFamily="34" charset="-122"/>
+                        <a:cs typeface="微软雅黑" panose="020B0503020204020204" pitchFamily="34" charset="-122"/>
                       </a:endParaRPr>
                     </a:p>
                   </a:txBody>
-                  <a:tcPr marL="91440" marR="91440" marT="45720" marB="45720" anchor="ctr">
+                  <a:tcPr anchor="ctr">
                     <a:lnL w="9525" cap="flat" cmpd="sng" algn="ctr">
                       <a:solidFill>
                         <a:srgbClr val="D8DBE0"/>
@@ -3760,7 +3659,7 @@
                     <a:bodyPr/>
                     <a:lstStyle/>
                     <a:p>
-                      <a:pPr algn="l" indent="0" marL="0">
+                      <a:pPr marL="0" indent="0" algn="l">
                         <a:buNone/>
                       </a:pPr>
                       <a:r>
@@ -3768,20 +3667,20 @@
                           <a:solidFill>
                             <a:srgbClr val="1F2329"/>
                           </a:solidFill>
-                          <a:latin typeface="微软雅黑" pitchFamily="34" charset="0"/>
-                          <a:ea typeface="微软雅黑" pitchFamily="34" charset="-122"/>
-                          <a:cs typeface="微软雅黑" pitchFamily="34" charset="-120"/>
+                          <a:latin typeface="微软雅黑" panose="020B0503020204020204" pitchFamily="34" charset="-122"/>
+                          <a:ea typeface="微软雅黑" panose="020B0503020204020204" pitchFamily="34" charset="-122"/>
+                          <a:cs typeface="微软雅黑" panose="020B0503020204020204" pitchFamily="34" charset="-120"/>
                         </a:rPr>
                         <a:t>二分查b的比较序列，2025综合4(2)(3)同型</a:t>
                       </a:r>
                       <a:endParaRPr lang="en-US" sz="1500" dirty="0">
-                        <a:latin typeface="微软雅黑" charset="0"/>
-                        <a:ea typeface="微软雅黑" charset="0"/>
-                        <a:cs typeface="微软雅黑" charset="0"/>
+                        <a:latin typeface="微软雅黑" panose="020B0503020204020204" pitchFamily="34" charset="-122"/>
+                        <a:ea typeface="微软雅黑" panose="020B0503020204020204" pitchFamily="34" charset="-122"/>
+                        <a:cs typeface="微软雅黑" panose="020B0503020204020204" pitchFamily="34" charset="-122"/>
                       </a:endParaRPr>
                     </a:p>
                   </a:txBody>
-                  <a:tcPr marL="91440" marR="91440" marT="45720" marB="45720" anchor="ctr">
+                  <a:tcPr anchor="ctr">
                     <a:lnL w="9525" cap="flat" cmpd="sng" algn="ctr">
                       <a:solidFill>
                         <a:srgbClr val="D8DBE0"/>
@@ -3830,7 +3729,7 @@
                     <a:bodyPr/>
                     <a:lstStyle/>
                     <a:p>
-                      <a:pPr algn="l" indent="0" marL="0">
+                      <a:pPr marL="0" indent="0" algn="l">
                         <a:buNone/>
                       </a:pPr>
                       <a:r>
@@ -3838,20 +3737,20 @@
                           <a:solidFill>
                             <a:srgbClr val="1F2329"/>
                           </a:solidFill>
-                          <a:latin typeface="微软雅黑" pitchFamily="34" charset="0"/>
-                          <a:ea typeface="微软雅黑" pitchFamily="34" charset="-122"/>
-                          <a:cs typeface="微软雅黑" pitchFamily="34" charset="-120"/>
+                          <a:latin typeface="微软雅黑" panose="020B0503020204020204" pitchFamily="34" charset="-122"/>
+                          <a:ea typeface="微软雅黑" panose="020B0503020204020204" pitchFamily="34" charset="-122"/>
+                          <a:cs typeface="微软雅黑" panose="020B0503020204020204" pitchFamily="34" charset="-120"/>
                         </a:rPr>
                         <a:t>9选7</a:t>
                       </a:r>
                       <a:endParaRPr lang="en-US" sz="1500" dirty="0">
-                        <a:latin typeface="微软雅黑" charset="0"/>
-                        <a:ea typeface="微软雅黑" charset="0"/>
-                        <a:cs typeface="微软雅黑" charset="0"/>
+                        <a:latin typeface="微软雅黑" panose="020B0503020204020204" pitchFamily="34" charset="-122"/>
+                        <a:ea typeface="微软雅黑" panose="020B0503020204020204" pitchFamily="34" charset="-122"/>
+                        <a:cs typeface="微软雅黑" panose="020B0503020204020204" pitchFamily="34" charset="-122"/>
                       </a:endParaRPr>
                     </a:p>
                   </a:txBody>
-                  <a:tcPr marL="91440" marR="91440" marT="45720" marB="45720" anchor="ctr">
+                  <a:tcPr anchor="ctr">
                     <a:lnL w="9525" cap="flat" cmpd="sng" algn="ctr">
                       <a:solidFill>
                         <a:srgbClr val="D8DBE0"/>
@@ -3898,7 +3797,7 @@
                     <a:bodyPr/>
                     <a:lstStyle/>
                     <a:p>
-                      <a:pPr algn="l" indent="0" marL="0">
+                      <a:pPr marL="0" indent="0" algn="l">
                         <a:buNone/>
                       </a:pPr>
                       <a:r>
@@ -3906,20 +3805,20 @@
                           <a:solidFill>
                             <a:srgbClr val="1F2329"/>
                           </a:solidFill>
-                          <a:latin typeface="微软雅黑" pitchFamily="34" charset="0"/>
-                          <a:ea typeface="微软雅黑" pitchFamily="34" charset="-122"/>
-                          <a:cs typeface="微软雅黑" pitchFamily="34" charset="-120"/>
+                          <a:latin typeface="微软雅黑" panose="020B0503020204020204" pitchFamily="34" charset="-122"/>
+                          <a:ea typeface="微软雅黑" panose="020B0503020204020204" pitchFamily="34" charset="-122"/>
+                          <a:cs typeface="微软雅黑" panose="020B0503020204020204" pitchFamily="34" charset="-120"/>
                         </a:rPr>
                         <a:t>BST插入序列</a:t>
                       </a:r>
                       <a:endParaRPr lang="en-US" sz="1500" dirty="0">
-                        <a:latin typeface="微软雅黑" charset="0"/>
-                        <a:ea typeface="微软雅黑" charset="0"/>
-                        <a:cs typeface="微软雅黑" charset="0"/>
+                        <a:latin typeface="微软雅黑" panose="020B0503020204020204" pitchFamily="34" charset="-122"/>
+                        <a:ea typeface="微软雅黑" panose="020B0503020204020204" pitchFamily="34" charset="-122"/>
+                        <a:cs typeface="微软雅黑" panose="020B0503020204020204" pitchFamily="34" charset="-122"/>
                       </a:endParaRPr>
                     </a:p>
                   </a:txBody>
-                  <a:tcPr marL="91440" marR="91440" marT="45720" marB="45720" anchor="ctr">
+                  <a:tcPr anchor="ctr">
                     <a:lnL w="9525" cap="flat" cmpd="sng" algn="ctr">
                       <a:solidFill>
                         <a:srgbClr val="D8DBE0"/>
@@ -3966,7 +3865,7 @@
                     <a:bodyPr/>
                     <a:lstStyle/>
                     <a:p>
-                      <a:pPr algn="l" indent="0" marL="0">
+                      <a:pPr marL="0" indent="0" algn="l">
                         <a:buNone/>
                       </a:pPr>
                       <a:r>
@@ -3974,20 +3873,20 @@
                           <a:solidFill>
                             <a:srgbClr val="1F2329"/>
                           </a:solidFill>
-                          <a:latin typeface="微软雅黑" pitchFamily="34" charset="0"/>
-                          <a:ea typeface="微软雅黑" pitchFamily="34" charset="-122"/>
-                          <a:cs typeface="微软雅黑" pitchFamily="34" charset="-120"/>
+                          <a:latin typeface="微软雅黑" panose="020B0503020204020204" pitchFamily="34" charset="-122"/>
+                          <a:ea typeface="微软雅黑" panose="020B0503020204020204" pitchFamily="34" charset="-122"/>
+                          <a:cs typeface="微软雅黑" panose="020B0503020204020204" pitchFamily="34" charset="-120"/>
                         </a:rPr>
                         <a:t>判不可能生成给定BST的序列，2026综合18(1)</a:t>
                       </a:r>
                       <a:endParaRPr lang="en-US" sz="1500" dirty="0">
-                        <a:latin typeface="微软雅黑" charset="0"/>
-                        <a:ea typeface="微软雅黑" charset="0"/>
-                        <a:cs typeface="微软雅黑" charset="0"/>
+                        <a:latin typeface="微软雅黑" panose="020B0503020204020204" pitchFamily="34" charset="-122"/>
+                        <a:ea typeface="微软雅黑" panose="020B0503020204020204" pitchFamily="34" charset="-122"/>
+                        <a:cs typeface="微软雅黑" panose="020B0503020204020204" pitchFamily="34" charset="-122"/>
                       </a:endParaRPr>
                     </a:p>
                   </a:txBody>
-                  <a:tcPr marL="91440" marR="91440" marT="45720" marB="45720" anchor="ctr">
+                  <a:tcPr anchor="ctr">
                     <a:lnL w="9525" cap="flat" cmpd="sng" algn="ctr">
                       <a:solidFill>
                         <a:srgbClr val="D8DBE0"/>
@@ -4036,7 +3935,7 @@
                     <a:bodyPr/>
                     <a:lstStyle/>
                     <a:p>
-                      <a:pPr algn="l" indent="0" marL="0">
+                      <a:pPr marL="0" indent="0" algn="l">
                         <a:buNone/>
                       </a:pPr>
                       <a:r>
@@ -4044,20 +3943,20 @@
                           <a:solidFill>
                             <a:srgbClr val="1F2329"/>
                           </a:solidFill>
-                          <a:latin typeface="微软雅黑" pitchFamily="34" charset="0"/>
-                          <a:ea typeface="微软雅黑" pitchFamily="34" charset="-122"/>
-                          <a:cs typeface="微软雅黑" pitchFamily="34" charset="-120"/>
+                          <a:latin typeface="微软雅黑" panose="020B0503020204020204" pitchFamily="34" charset="-122"/>
+                          <a:ea typeface="微软雅黑" panose="020B0503020204020204" pitchFamily="34" charset="-122"/>
+                          <a:cs typeface="微软雅黑" panose="020B0503020204020204" pitchFamily="34" charset="-120"/>
                         </a:rPr>
                         <a:t>9选10</a:t>
                       </a:r>
                       <a:endParaRPr lang="en-US" sz="1500" dirty="0">
-                        <a:latin typeface="微软雅黑" charset="0"/>
-                        <a:ea typeface="微软雅黑" charset="0"/>
-                        <a:cs typeface="微软雅黑" charset="0"/>
+                        <a:latin typeface="微软雅黑" panose="020B0503020204020204" pitchFamily="34" charset="-122"/>
+                        <a:ea typeface="微软雅黑" panose="020B0503020204020204" pitchFamily="34" charset="-122"/>
+                        <a:cs typeface="微软雅黑" panose="020B0503020204020204" pitchFamily="34" charset="-122"/>
                       </a:endParaRPr>
                     </a:p>
                   </a:txBody>
-                  <a:tcPr marL="91440" marR="91440" marT="45720" marB="45720" anchor="ctr">
+                  <a:tcPr anchor="ctr">
                     <a:lnL w="9525" cap="flat" cmpd="sng" algn="ctr">
                       <a:solidFill>
                         <a:srgbClr val="D8DBE0"/>
@@ -4104,7 +4003,7 @@
                     <a:bodyPr/>
                     <a:lstStyle/>
                     <a:p>
-                      <a:pPr algn="l" indent="0" marL="0">
+                      <a:pPr marL="0" indent="0" algn="l">
                         <a:buNone/>
                       </a:pPr>
                       <a:r>
@@ -4112,20 +4011,20 @@
                           <a:solidFill>
                             <a:srgbClr val="1F2329"/>
                           </a:solidFill>
-                          <a:latin typeface="微软雅黑" pitchFamily="34" charset="0"/>
-                          <a:ea typeface="微软雅黑" pitchFamily="34" charset="-122"/>
-                          <a:cs typeface="微软雅黑" pitchFamily="34" charset="-120"/>
+                          <a:latin typeface="微软雅黑" panose="020B0503020204020204" pitchFamily="34" charset="-122"/>
+                          <a:ea typeface="微软雅黑" panose="020B0503020204020204" pitchFamily="34" charset="-122"/>
+                          <a:cs typeface="微软雅黑" panose="020B0503020204020204" pitchFamily="34" charset="-120"/>
                         </a:rPr>
                         <a:t>BST的ASL</a:t>
                       </a:r>
                       <a:endParaRPr lang="en-US" sz="1500" dirty="0">
-                        <a:latin typeface="微软雅黑" charset="0"/>
-                        <a:ea typeface="微软雅黑" charset="0"/>
-                        <a:cs typeface="微软雅黑" charset="0"/>
+                        <a:latin typeface="微软雅黑" panose="020B0503020204020204" pitchFamily="34" charset="-122"/>
+                        <a:ea typeface="微软雅黑" panose="020B0503020204020204" pitchFamily="34" charset="-122"/>
+                        <a:cs typeface="微软雅黑" panose="020B0503020204020204" pitchFamily="34" charset="-122"/>
                       </a:endParaRPr>
                     </a:p>
                   </a:txBody>
-                  <a:tcPr marL="91440" marR="91440" marT="45720" marB="45720" anchor="ctr">
+                  <a:tcPr anchor="ctr">
                     <a:lnL w="9525" cap="flat" cmpd="sng" algn="ctr">
                       <a:solidFill>
                         <a:srgbClr val="D8DBE0"/>
@@ -4172,7 +4071,7 @@
                     <a:bodyPr/>
                     <a:lstStyle/>
                     <a:p>
-                      <a:pPr algn="l" indent="0" marL="0">
+                      <a:pPr marL="0" indent="0" algn="l">
                         <a:buNone/>
                       </a:pPr>
                       <a:r>
@@ -4180,20 +4079,20 @@
                           <a:solidFill>
                             <a:srgbClr val="1F2329"/>
                           </a:solidFill>
-                          <a:latin typeface="微软雅黑" pitchFamily="34" charset="0"/>
-                          <a:ea typeface="微软雅黑" pitchFamily="34" charset="-122"/>
-                          <a:cs typeface="微软雅黑" pitchFamily="34" charset="-120"/>
+                          <a:latin typeface="微软雅黑" panose="020B0503020204020204" pitchFamily="34" charset="-122"/>
+                          <a:ea typeface="微软雅黑" panose="020B0503020204020204" pitchFamily="34" charset="-122"/>
+                          <a:cs typeface="微软雅黑" panose="020B0503020204020204" pitchFamily="34" charset="-120"/>
                         </a:rPr>
                         <a:t>完全二叉形态BST求ASL，2024综合6(1)</a:t>
                       </a:r>
                       <a:endParaRPr lang="en-US" sz="1500" dirty="0">
-                        <a:latin typeface="微软雅黑" charset="0"/>
-                        <a:ea typeface="微软雅黑" charset="0"/>
-                        <a:cs typeface="微软雅黑" charset="0"/>
+                        <a:latin typeface="微软雅黑" panose="020B0503020204020204" pitchFamily="34" charset="-122"/>
+                        <a:ea typeface="微软雅黑" panose="020B0503020204020204" pitchFamily="34" charset="-122"/>
+                        <a:cs typeface="微软雅黑" panose="020B0503020204020204" pitchFamily="34" charset="-122"/>
                       </a:endParaRPr>
                     </a:p>
                   </a:txBody>
-                  <a:tcPr marL="91440" marR="91440" marT="45720" marB="45720" anchor="ctr">
+                  <a:tcPr anchor="ctr">
                     <a:lnL w="9525" cap="flat" cmpd="sng" algn="ctr">
                       <a:solidFill>
                         <a:srgbClr val="D8DBE0"/>
@@ -4242,7 +4141,7 @@
                     <a:bodyPr/>
                     <a:lstStyle/>
                     <a:p>
-                      <a:pPr algn="l" indent="0" marL="0">
+                      <a:pPr marL="0" indent="0" algn="l">
                         <a:buNone/>
                       </a:pPr>
                       <a:r>
@@ -4250,20 +4149,20 @@
                           <a:solidFill>
                             <a:srgbClr val="1F2329"/>
                           </a:solidFill>
-                          <a:latin typeface="微软雅黑" pitchFamily="34" charset="0"/>
-                          <a:ea typeface="微软雅黑" pitchFamily="34" charset="-122"/>
-                          <a:cs typeface="微软雅黑" pitchFamily="34" charset="-120"/>
+                          <a:latin typeface="微软雅黑" panose="020B0503020204020204" pitchFamily="34" charset="-122"/>
+                          <a:ea typeface="微软雅黑" panose="020B0503020204020204" pitchFamily="34" charset="-122"/>
+                          <a:cs typeface="微软雅黑" panose="020B0503020204020204" pitchFamily="34" charset="-120"/>
                         </a:rPr>
                         <a:t>9选12</a:t>
                       </a:r>
                       <a:endParaRPr lang="en-US" sz="1500" dirty="0">
-                        <a:latin typeface="微软雅黑" charset="0"/>
-                        <a:ea typeface="微软雅黑" charset="0"/>
-                        <a:cs typeface="微软雅黑" charset="0"/>
+                        <a:latin typeface="微软雅黑" panose="020B0503020204020204" pitchFamily="34" charset="-122"/>
+                        <a:ea typeface="微软雅黑" panose="020B0503020204020204" pitchFamily="34" charset="-122"/>
+                        <a:cs typeface="微软雅黑" panose="020B0503020204020204" pitchFamily="34" charset="-122"/>
                       </a:endParaRPr>
                     </a:p>
                   </a:txBody>
-                  <a:tcPr marL="91440" marR="91440" marT="45720" marB="45720" anchor="ctr">
+                  <a:tcPr anchor="ctr">
                     <a:lnL w="9525" cap="flat" cmpd="sng" algn="ctr">
                       <a:solidFill>
                         <a:srgbClr val="D8DBE0"/>
@@ -4310,7 +4209,7 @@
                     <a:bodyPr/>
                     <a:lstStyle/>
                     <a:p>
-                      <a:pPr algn="l" indent="0" marL="0">
+                      <a:pPr marL="0" indent="0" algn="l">
                         <a:buNone/>
                       </a:pPr>
                       <a:r>
@@ -4318,20 +4217,20 @@
                           <a:solidFill>
                             <a:srgbClr val="1F2329"/>
                           </a:solidFill>
-                          <a:latin typeface="微软雅黑" pitchFamily="34" charset="0"/>
-                          <a:ea typeface="微软雅黑" pitchFamily="34" charset="-122"/>
-                          <a:cs typeface="微软雅黑" pitchFamily="34" charset="-120"/>
+                          <a:latin typeface="微软雅黑" panose="020B0503020204020204" pitchFamily="34" charset="-122"/>
+                          <a:ea typeface="微软雅黑" panose="020B0503020204020204" pitchFamily="34" charset="-122"/>
+                          <a:cs typeface="微软雅黑" panose="020B0503020204020204" pitchFamily="34" charset="-120"/>
                         </a:rPr>
                         <a:t>BST查找路径</a:t>
                       </a:r>
                       <a:endParaRPr lang="en-US" sz="1500" dirty="0">
-                        <a:latin typeface="微软雅黑" charset="0"/>
-                        <a:ea typeface="微软雅黑" charset="0"/>
-                        <a:cs typeface="微软雅黑" charset="0"/>
+                        <a:latin typeface="微软雅黑" panose="020B0503020204020204" pitchFamily="34" charset="-122"/>
+                        <a:ea typeface="微软雅黑" panose="020B0503020204020204" pitchFamily="34" charset="-122"/>
+                        <a:cs typeface="微软雅黑" panose="020B0503020204020204" pitchFamily="34" charset="-122"/>
                       </a:endParaRPr>
                     </a:p>
                   </a:txBody>
-                  <a:tcPr marL="91440" marR="91440" marT="45720" marB="45720" anchor="ctr">
+                  <a:tcPr anchor="ctr">
                     <a:lnL w="9525" cap="flat" cmpd="sng" algn="ctr">
                       <a:solidFill>
                         <a:srgbClr val="D8DBE0"/>
@@ -4378,7 +4277,7 @@
                     <a:bodyPr/>
                     <a:lstStyle/>
                     <a:p>
-                      <a:pPr algn="l" indent="0" marL="0">
+                      <a:pPr marL="0" indent="0" algn="l">
                         <a:buNone/>
                       </a:pPr>
                       <a:r>
@@ -4386,20 +4285,20 @@
                           <a:solidFill>
                             <a:srgbClr val="1F2329"/>
                           </a:solidFill>
-                          <a:latin typeface="微软雅黑" pitchFamily="34" charset="0"/>
-                          <a:ea typeface="微软雅黑" pitchFamily="34" charset="-122"/>
-                          <a:cs typeface="微软雅黑" pitchFamily="34" charset="-120"/>
+                          <a:latin typeface="微软雅黑" panose="020B0503020204020204" pitchFamily="34" charset="-122"/>
+                          <a:ea typeface="微软雅黑" panose="020B0503020204020204" pitchFamily="34" charset="-122"/>
+                          <a:cs typeface="微软雅黑" panose="020B0503020204020204" pitchFamily="34" charset="-120"/>
                         </a:rPr>
                         <a:t>判不可能的查找路径，BST路径性质</a:t>
                       </a:r>
                       <a:endParaRPr lang="en-US" sz="1500" dirty="0">
-                        <a:latin typeface="微软雅黑" charset="0"/>
-                        <a:ea typeface="微软雅黑" charset="0"/>
-                        <a:cs typeface="微软雅黑" charset="0"/>
+                        <a:latin typeface="微软雅黑" panose="020B0503020204020204" pitchFamily="34" charset="-122"/>
+                        <a:ea typeface="微软雅黑" panose="020B0503020204020204" pitchFamily="34" charset="-122"/>
+                        <a:cs typeface="微软雅黑" panose="020B0503020204020204" pitchFamily="34" charset="-122"/>
                       </a:endParaRPr>
                     </a:p>
                   </a:txBody>
-                  <a:tcPr marL="91440" marR="91440" marT="45720" marB="45720" anchor="ctr">
+                  <a:tcPr anchor="ctr">
                     <a:lnL w="9525" cap="flat" cmpd="sng" algn="ctr">
                       <a:solidFill>
                         <a:srgbClr val="D8DBE0"/>
@@ -4448,7 +4347,7 @@
                     <a:bodyPr/>
                     <a:lstStyle/>
                     <a:p>
-                      <a:pPr algn="l" indent="0" marL="0">
+                      <a:pPr marL="0" indent="0" algn="l">
                         <a:buNone/>
                       </a:pPr>
                       <a:r>
@@ -4456,20 +4355,20 @@
                           <a:solidFill>
                             <a:srgbClr val="1F2329"/>
                           </a:solidFill>
-                          <a:latin typeface="微软雅黑" pitchFamily="34" charset="0"/>
-                          <a:ea typeface="微软雅黑" pitchFamily="34" charset="-122"/>
-                          <a:cs typeface="微软雅黑" pitchFamily="34" charset="-120"/>
+                          <a:latin typeface="微软雅黑" panose="020B0503020204020204" pitchFamily="34" charset="-122"/>
+                          <a:ea typeface="微软雅黑" panose="020B0503020204020204" pitchFamily="34" charset="-122"/>
+                          <a:cs typeface="微软雅黑" panose="020B0503020204020204" pitchFamily="34" charset="-120"/>
                         </a:rPr>
                         <a:t>9选14</a:t>
                       </a:r>
                       <a:endParaRPr lang="en-US" sz="1500" dirty="0">
-                        <a:latin typeface="微软雅黑" charset="0"/>
-                        <a:ea typeface="微软雅黑" charset="0"/>
-                        <a:cs typeface="微软雅黑" charset="0"/>
+                        <a:latin typeface="微软雅黑" panose="020B0503020204020204" pitchFamily="34" charset="-122"/>
+                        <a:ea typeface="微软雅黑" panose="020B0503020204020204" pitchFamily="34" charset="-122"/>
+                        <a:cs typeface="微软雅黑" panose="020B0503020204020204" pitchFamily="34" charset="-122"/>
                       </a:endParaRPr>
                     </a:p>
                   </a:txBody>
-                  <a:tcPr marL="91440" marR="91440" marT="45720" marB="45720" anchor="ctr">
+                  <a:tcPr anchor="ctr">
                     <a:lnL w="9525" cap="flat" cmpd="sng" algn="ctr">
                       <a:solidFill>
                         <a:srgbClr val="D8DBE0"/>
@@ -4516,7 +4415,7 @@
                     <a:bodyPr/>
                     <a:lstStyle/>
                     <a:p>
-                      <a:pPr algn="l" indent="0" marL="0">
+                      <a:pPr marL="0" indent="0" algn="l">
                         <a:buNone/>
                       </a:pPr>
                       <a:r>
@@ -4524,20 +4423,20 @@
                           <a:solidFill>
                             <a:srgbClr val="1F2329"/>
                           </a:solidFill>
-                          <a:latin typeface="微软雅黑" pitchFamily="34" charset="0"/>
-                          <a:ea typeface="微软雅黑" pitchFamily="34" charset="-122"/>
-                          <a:cs typeface="微软雅黑" pitchFamily="34" charset="-120"/>
+                          <a:latin typeface="微软雅黑" panose="020B0503020204020204" pitchFamily="34" charset="-122"/>
+                          <a:ea typeface="微软雅黑" panose="020B0503020204020204" pitchFamily="34" charset="-122"/>
+                          <a:cs typeface="微软雅黑" panose="020B0503020204020204" pitchFamily="34" charset="-120"/>
                         </a:rPr>
                         <a:t>AVL插入</a:t>
                       </a:r>
                       <a:endParaRPr lang="en-US" sz="1500" dirty="0">
-                        <a:latin typeface="微软雅黑" charset="0"/>
-                        <a:ea typeface="微软雅黑" charset="0"/>
-                        <a:cs typeface="微软雅黑" charset="0"/>
+                        <a:latin typeface="微软雅黑" panose="020B0503020204020204" pitchFamily="34" charset="-122"/>
+                        <a:ea typeface="微软雅黑" panose="020B0503020204020204" pitchFamily="34" charset="-122"/>
+                        <a:cs typeface="微软雅黑" panose="020B0503020204020204" pitchFamily="34" charset="-122"/>
                       </a:endParaRPr>
                     </a:p>
                   </a:txBody>
-                  <a:tcPr marL="91440" marR="91440" marT="45720" marB="45720" anchor="ctr">
+                  <a:tcPr anchor="ctr">
                     <a:lnL w="9525" cap="flat" cmpd="sng" algn="ctr">
                       <a:solidFill>
                         <a:srgbClr val="D8DBE0"/>
@@ -4584,7 +4483,7 @@
                     <a:bodyPr/>
                     <a:lstStyle/>
                     <a:p>
-                      <a:pPr algn="l" indent="0" marL="0">
+                      <a:pPr marL="0" indent="0" algn="l">
                         <a:buNone/>
                       </a:pPr>
                       <a:r>
@@ -4592,20 +4491,20 @@
                           <a:solidFill>
                             <a:srgbClr val="1F2329"/>
                           </a:solidFill>
-                          <a:latin typeface="微软雅黑" pitchFamily="34" charset="0"/>
-                          <a:ea typeface="微软雅黑" pitchFamily="34" charset="-122"/>
-                          <a:cs typeface="微软雅黑" pitchFamily="34" charset="-120"/>
+                          <a:latin typeface="微软雅黑" panose="020B0503020204020204" pitchFamily="34" charset="-122"/>
+                          <a:ea typeface="微软雅黑" panose="020B0503020204020204" pitchFamily="34" charset="-122"/>
+                          <a:cs typeface="微软雅黑" panose="020B0503020204020204" pitchFamily="34" charset="-120"/>
                         </a:rPr>
                         <a:t>1..7插入AVL求平衡因子0结点数，2024填5原题</a:t>
                       </a:r>
                       <a:endParaRPr lang="en-US" sz="1500" dirty="0">
-                        <a:latin typeface="微软雅黑" charset="0"/>
-                        <a:ea typeface="微软雅黑" charset="0"/>
-                        <a:cs typeface="微软雅黑" charset="0"/>
+                        <a:latin typeface="微软雅黑" panose="020B0503020204020204" pitchFamily="34" charset="-122"/>
+                        <a:ea typeface="微软雅黑" panose="020B0503020204020204" pitchFamily="34" charset="-122"/>
+                        <a:cs typeface="微软雅黑" panose="020B0503020204020204" pitchFamily="34" charset="-122"/>
                       </a:endParaRPr>
                     </a:p>
                   </a:txBody>
-                  <a:tcPr marL="91440" marR="91440" marT="45720" marB="45720" anchor="ctr">
+                  <a:tcPr anchor="ctr">
                     <a:lnL w="9525" cap="flat" cmpd="sng" algn="ctr">
                       <a:solidFill>
                         <a:srgbClr val="D8DBE0"/>
@@ -4662,7 +4561,7 @@
 
 <file path=ppt/slides/slide4.xml><?xml version="1.0" encoding="utf-8"?>
 <p:sld xmlns:a="http://schemas.openxmlformats.org/drawingml/2006/main" xmlns:r="http://schemas.openxmlformats.org/officeDocument/2006/relationships" xmlns:p="http://schemas.openxmlformats.org/presentationml/2006/main">
-  <p:cSld name="Slide 4">
+  <p:cSld>
     <p:bg>
       <p:bgPr>
         <a:blipFill dpi="0" rotWithShape="1">
@@ -4706,13 +4605,12 @@
             <a:avLst/>
           </a:prstGeom>
           <a:noFill/>
-          <a:ln/>
         </p:spPr>
         <p:txBody>
           <a:bodyPr wrap="square" rtlCol="0" anchor="ctr"/>
           <a:lstStyle/>
           <a:p>
-            <a:pPr algn="r" indent="0" marL="0">
+            <a:pPr marL="0" indent="0" algn="r">
               <a:buNone/>
             </a:pPr>
             <a:r>
@@ -4720,9 +4618,9 @@
                 <a:solidFill>
                   <a:srgbClr val="8A9099"/>
                 </a:solidFill>
-                <a:latin typeface="微软雅黑" pitchFamily="34" charset="0"/>
-                <a:ea typeface="微软雅黑" pitchFamily="34" charset="-122"/>
-                <a:cs typeface="微软雅黑" pitchFamily="34" charset="-120"/>
+                <a:latin typeface="微软雅黑" panose="020B0503020204020204" pitchFamily="34" charset="-122"/>
+                <a:ea typeface="微软雅黑" panose="020B0503020204020204" pitchFamily="34" charset="-122"/>
+                <a:cs typeface="微软雅黑" panose="020B0503020204020204" pitchFamily="34" charset="-120"/>
               </a:rPr>
               <a:t>4 / 8</a:t>
             </a:r>
@@ -4745,13 +4643,12 @@
             <a:avLst/>
           </a:prstGeom>
           <a:noFill/>
-          <a:ln/>
         </p:spPr>
         <p:txBody>
           <a:bodyPr wrap="square" rtlCol="0" anchor="ctr"/>
           <a:lstStyle/>
           <a:p>
-            <a:pPr algn="l" indent="0" marL="0">
+            <a:pPr marL="0" indent="0" algn="l">
               <a:buNone/>
             </a:pPr>
             <a:r>
@@ -4759,9 +4656,9 @@
                 <a:solidFill>
                   <a:srgbClr val="1F4E9C"/>
                 </a:solidFill>
-                <a:latin typeface="微软雅黑" pitchFamily="34" charset="0"/>
-                <a:ea typeface="微软雅黑" pitchFamily="34" charset="-122"/>
-                <a:cs typeface="微软雅黑" pitchFamily="34" charset="-120"/>
+                <a:latin typeface="微软雅黑" panose="020B0503020204020204" pitchFamily="34" charset="-122"/>
+                <a:ea typeface="微软雅黑" panose="020B0503020204020204" pitchFamily="34" charset="-122"/>
+                <a:cs typeface="微软雅黑" panose="020B0503020204020204" pitchFamily="34" charset="-120"/>
               </a:rPr>
               <a:t>有价值必做</a:t>
             </a:r>
@@ -4784,13 +4681,12 @@
             <a:avLst/>
           </a:prstGeom>
           <a:noFill/>
-          <a:ln/>
         </p:spPr>
         <p:txBody>
           <a:bodyPr wrap="square" rtlCol="0" anchor="ctr"/>
           <a:lstStyle/>
           <a:p>
-            <a:pPr algn="l" indent="0" marL="0">
+            <a:pPr marL="0" indent="0" algn="l">
               <a:buNone/>
             </a:pPr>
             <a:r>
@@ -4798,9 +4694,9 @@
                 <a:solidFill>
                   <a:srgbClr val="1F2329"/>
                 </a:solidFill>
-                <a:latin typeface="微软雅黑" pitchFamily="34" charset="0"/>
-                <a:ea typeface="微软雅黑" pitchFamily="34" charset="-122"/>
-                <a:cs typeface="微软雅黑" pitchFamily="34" charset="-120"/>
+                <a:latin typeface="微软雅黑" panose="020B0503020204020204" pitchFamily="34" charset="-122"/>
+                <a:ea typeface="微软雅黑" panose="020B0503020204020204" pitchFamily="34" charset="-122"/>
+                <a:cs typeface="微软雅黑" panose="020B0503020204020204" pitchFamily="34" charset="-120"/>
               </a:rPr>
               <a:t>必做题（2/3）</a:t>
             </a:r>
@@ -4814,17 +4710,11 @@
           <p:cNvGraphicFramePr>
             <a:graphicFrameLocks noGrp="1"/>
           </p:cNvGraphicFramePr>
-          <p:nvPr>
-            <p:extLst>
-              <p:ext uri="{D42A27DB-BD31-4B8C-83A1-F6EECF244321}">
-                <p14:modId xmlns:p14="http://schemas.microsoft.com/office/powerpoint/2010/main" val="1579011935"/>
-              </p:ext>
-            </p:extLst>
-          </p:nvPr>
+          <p:nvPr/>
         </p:nvGraphicFramePr>
         <p:xfrm>
           <a:off x="822960" y="2395728"/>
-          <a:ext cx="10545775" cy="914400"/>
+          <a:ext cx="10545775" cy="2944368"/>
         </p:xfrm>
         <a:graphic>
           <a:graphicData uri="http://schemas.openxmlformats.org/drawingml/2006/table">
@@ -4841,7 +4731,7 @@
                     <a:bodyPr/>
                     <a:lstStyle/>
                     <a:p>
-                      <a:pPr algn="l" indent="0" marL="0">
+                      <a:pPr marL="0" indent="0" algn="l">
                         <a:buNone/>
                       </a:pPr>
                       <a:r>
@@ -4849,20 +4739,20 @@
                           <a:solidFill>
                             <a:srgbClr val="1F4E9C"/>
                           </a:solidFill>
-                          <a:latin typeface="微软雅黑" pitchFamily="34" charset="0"/>
-                          <a:ea typeface="微软雅黑" pitchFamily="34" charset="-122"/>
-                          <a:cs typeface="微软雅黑" pitchFamily="34" charset="-120"/>
+                          <a:latin typeface="微软雅黑" panose="020B0503020204020204" pitchFamily="34" charset="-122"/>
+                          <a:ea typeface="微软雅黑" panose="020B0503020204020204" pitchFamily="34" charset="-122"/>
+                          <a:cs typeface="微软雅黑" panose="020B0503020204020204" pitchFamily="34" charset="-120"/>
                         </a:rPr>
                         <a:t>题号</a:t>
                       </a:r>
                       <a:endParaRPr lang="en-US" sz="1500" dirty="0">
-                        <a:latin typeface="微软雅黑" charset="0"/>
-                        <a:ea typeface="微软雅黑" charset="0"/>
-                        <a:cs typeface="微软雅黑" charset="0"/>
+                        <a:latin typeface="微软雅黑" panose="020B0503020204020204" pitchFamily="34" charset="-122"/>
+                        <a:ea typeface="微软雅黑" panose="020B0503020204020204" pitchFamily="34" charset="-122"/>
+                        <a:cs typeface="微软雅黑" panose="020B0503020204020204" pitchFamily="34" charset="-122"/>
                       </a:endParaRPr>
                     </a:p>
                   </a:txBody>
-                  <a:tcPr marL="91440" marR="91440" marT="45720" marB="45720" anchor="ctr">
+                  <a:tcPr anchor="ctr">
                     <a:lnL w="9525" cap="flat" cmpd="sng" algn="ctr">
                       <a:solidFill>
                         <a:srgbClr val="D8DBE0"/>
@@ -4909,7 +4799,7 @@
                     <a:bodyPr/>
                     <a:lstStyle/>
                     <a:p>
-                      <a:pPr algn="l" indent="0" marL="0">
+                      <a:pPr marL="0" indent="0" algn="l">
                         <a:buNone/>
                       </a:pPr>
                       <a:r>
@@ -4917,20 +4807,20 @@
                           <a:solidFill>
                             <a:srgbClr val="1F4E9C"/>
                           </a:solidFill>
-                          <a:latin typeface="微软雅黑" pitchFamily="34" charset="0"/>
-                          <a:ea typeface="微软雅黑" pitchFamily="34" charset="-122"/>
-                          <a:cs typeface="微软雅黑" pitchFamily="34" charset="-120"/>
+                          <a:latin typeface="微软雅黑" panose="020B0503020204020204" pitchFamily="34" charset="-122"/>
+                          <a:ea typeface="微软雅黑" panose="020B0503020204020204" pitchFamily="34" charset="-122"/>
+                          <a:cs typeface="微软雅黑" panose="020B0503020204020204" pitchFamily="34" charset="-120"/>
                         </a:rPr>
                         <a:t>考点</a:t>
                       </a:r>
                       <a:endParaRPr lang="en-US" sz="1500" dirty="0">
-                        <a:latin typeface="微软雅黑" charset="0"/>
-                        <a:ea typeface="微软雅黑" charset="0"/>
-                        <a:cs typeface="微软雅黑" charset="0"/>
+                        <a:latin typeface="微软雅黑" panose="020B0503020204020204" pitchFamily="34" charset="-122"/>
+                        <a:ea typeface="微软雅黑" panose="020B0503020204020204" pitchFamily="34" charset="-122"/>
+                        <a:cs typeface="微软雅黑" panose="020B0503020204020204" pitchFamily="34" charset="-122"/>
                       </a:endParaRPr>
                     </a:p>
                   </a:txBody>
-                  <a:tcPr marL="91440" marR="91440" marT="45720" marB="45720" anchor="ctr">
+                  <a:tcPr anchor="ctr">
                     <a:lnL w="9525" cap="flat" cmpd="sng" algn="ctr">
                       <a:solidFill>
                         <a:srgbClr val="D8DBE0"/>
@@ -4977,7 +4867,7 @@
                     <a:bodyPr/>
                     <a:lstStyle/>
                     <a:p>
-                      <a:pPr algn="l" indent="0" marL="0">
+                      <a:pPr marL="0" indent="0" algn="l">
                         <a:buNone/>
                       </a:pPr>
                       <a:r>
@@ -4985,20 +4875,20 @@
                           <a:solidFill>
                             <a:srgbClr val="1F4E9C"/>
                           </a:solidFill>
-                          <a:latin typeface="微软雅黑" pitchFamily="34" charset="0"/>
-                          <a:ea typeface="微软雅黑" pitchFamily="34" charset="-122"/>
-                          <a:cs typeface="微软雅黑" pitchFamily="34" charset="-120"/>
+                          <a:latin typeface="微软雅黑" panose="020B0503020204020204" pitchFamily="34" charset="-122"/>
+                          <a:ea typeface="微软雅黑" panose="020B0503020204020204" pitchFamily="34" charset="-122"/>
+                          <a:cs typeface="微软雅黑" panose="020B0503020204020204" pitchFamily="34" charset="-120"/>
                         </a:rPr>
                         <a:t>价值</a:t>
                       </a:r>
                       <a:endParaRPr lang="en-US" sz="1500" dirty="0">
-                        <a:latin typeface="微软雅黑" charset="0"/>
-                        <a:ea typeface="微软雅黑" charset="0"/>
-                        <a:cs typeface="微软雅黑" charset="0"/>
+                        <a:latin typeface="微软雅黑" panose="020B0503020204020204" pitchFamily="34" charset="-122"/>
+                        <a:ea typeface="微软雅黑" panose="020B0503020204020204" pitchFamily="34" charset="-122"/>
+                        <a:cs typeface="微软雅黑" panose="020B0503020204020204" pitchFamily="34" charset="-122"/>
                       </a:endParaRPr>
                     </a:p>
                   </a:txBody>
-                  <a:tcPr marL="91440" marR="91440" marT="45720" marB="45720" anchor="ctr">
+                  <a:tcPr anchor="ctr">
                     <a:lnL w="9525" cap="flat" cmpd="sng" algn="ctr">
                       <a:solidFill>
                         <a:srgbClr val="D8DBE0"/>
@@ -5047,7 +4937,7 @@
                     <a:bodyPr/>
                     <a:lstStyle/>
                     <a:p>
-                      <a:pPr algn="l" indent="0" marL="0">
+                      <a:pPr marL="0" indent="0" algn="l">
                         <a:buNone/>
                       </a:pPr>
                       <a:r>
@@ -5055,20 +4945,20 @@
                           <a:solidFill>
                             <a:srgbClr val="1F2329"/>
                           </a:solidFill>
-                          <a:latin typeface="微软雅黑" pitchFamily="34" charset="0"/>
-                          <a:ea typeface="微软雅黑" pitchFamily="34" charset="-122"/>
-                          <a:cs typeface="微软雅黑" pitchFamily="34" charset="-120"/>
+                          <a:latin typeface="微软雅黑" panose="020B0503020204020204" pitchFamily="34" charset="-122"/>
+                          <a:ea typeface="微软雅黑" panose="020B0503020204020204" pitchFamily="34" charset="-122"/>
+                          <a:cs typeface="微软雅黑" panose="020B0503020204020204" pitchFamily="34" charset="-120"/>
                         </a:rPr>
                         <a:t>9选20</a:t>
                       </a:r>
                       <a:endParaRPr lang="en-US" sz="1500" dirty="0">
-                        <a:latin typeface="微软雅黑" charset="0"/>
-                        <a:ea typeface="微软雅黑" charset="0"/>
-                        <a:cs typeface="微软雅黑" charset="0"/>
+                        <a:latin typeface="微软雅黑" panose="020B0503020204020204" pitchFamily="34" charset="-122"/>
+                        <a:ea typeface="微软雅黑" panose="020B0503020204020204" pitchFamily="34" charset="-122"/>
+                        <a:cs typeface="微软雅黑" panose="020B0503020204020204" pitchFamily="34" charset="-122"/>
                       </a:endParaRPr>
                     </a:p>
                   </a:txBody>
-                  <a:tcPr marL="91440" marR="91440" marT="45720" marB="45720" anchor="ctr">
+                  <a:tcPr anchor="ctr">
                     <a:lnL w="9525" cap="flat" cmpd="sng" algn="ctr">
                       <a:solidFill>
                         <a:srgbClr val="D8DBE0"/>
@@ -5115,7 +5005,7 @@
                     <a:bodyPr/>
                     <a:lstStyle/>
                     <a:p>
-                      <a:pPr algn="l" indent="0" marL="0">
+                      <a:pPr marL="0" indent="0" algn="l">
                         <a:buNone/>
                       </a:pPr>
                       <a:r>
@@ -5123,20 +5013,20 @@
                           <a:solidFill>
                             <a:srgbClr val="1F2329"/>
                           </a:solidFill>
-                          <a:latin typeface="微软雅黑" pitchFamily="34" charset="0"/>
-                          <a:ea typeface="微软雅黑" pitchFamily="34" charset="-122"/>
-                          <a:cs typeface="微软雅黑" pitchFamily="34" charset="-120"/>
+                          <a:latin typeface="微软雅黑" panose="020B0503020204020204" pitchFamily="34" charset="-122"/>
+                          <a:ea typeface="微软雅黑" panose="020B0503020204020204" pitchFamily="34" charset="-122"/>
+                          <a:cs typeface="微软雅黑" panose="020B0503020204020204" pitchFamily="34" charset="-120"/>
                         </a:rPr>
                         <a:t>AVL插入旋转</a:t>
                       </a:r>
                       <a:endParaRPr lang="en-US" sz="1500" dirty="0">
-                        <a:latin typeface="微软雅黑" charset="0"/>
-                        <a:ea typeface="微软雅黑" charset="0"/>
-                        <a:cs typeface="微软雅黑" charset="0"/>
+                        <a:latin typeface="微软雅黑" panose="020B0503020204020204" pitchFamily="34" charset="-122"/>
+                        <a:ea typeface="微软雅黑" panose="020B0503020204020204" pitchFamily="34" charset="-122"/>
+                        <a:cs typeface="微软雅黑" panose="020B0503020204020204" pitchFamily="34" charset="-122"/>
                       </a:endParaRPr>
                     </a:p>
                   </a:txBody>
-                  <a:tcPr marL="91440" marR="91440" marT="45720" marB="45720" anchor="ctr">
+                  <a:tcPr anchor="ctr">
                     <a:lnL w="9525" cap="flat" cmpd="sng" algn="ctr">
                       <a:solidFill>
                         <a:srgbClr val="D8DBE0"/>
@@ -5183,7 +5073,7 @@
                     <a:bodyPr/>
                     <a:lstStyle/>
                     <a:p>
-                      <a:pPr algn="l" indent="0" marL="0">
+                      <a:pPr marL="0" indent="0" algn="l">
                         <a:buNone/>
                       </a:pPr>
                       <a:r>
@@ -5191,20 +5081,20 @@
                           <a:solidFill>
                             <a:srgbClr val="1F2329"/>
                           </a:solidFill>
-                          <a:latin typeface="微软雅黑" pitchFamily="34" charset="0"/>
-                          <a:ea typeface="微软雅黑" pitchFamily="34" charset="-122"/>
-                          <a:cs typeface="微软雅黑" pitchFamily="34" charset="-120"/>
+                          <a:latin typeface="微软雅黑" panose="020B0503020204020204" pitchFamily="34" charset="-122"/>
+                          <a:ea typeface="微软雅黑" panose="020B0503020204020204" pitchFamily="34" charset="-122"/>
+                          <a:cs typeface="微软雅黑" panose="020B0503020204020204" pitchFamily="34" charset="-120"/>
                         </a:rPr>
                         <a:t>插62后求结点孩子，2026综合18(3)（平衡调整）同型</a:t>
                       </a:r>
                       <a:endParaRPr lang="en-US" sz="1500" dirty="0">
-                        <a:latin typeface="微软雅黑" charset="0"/>
-                        <a:ea typeface="微软雅黑" charset="0"/>
-                        <a:cs typeface="微软雅黑" charset="0"/>
+                        <a:latin typeface="微软雅黑" panose="020B0503020204020204" pitchFamily="34" charset="-122"/>
+                        <a:ea typeface="微软雅黑" panose="020B0503020204020204" pitchFamily="34" charset="-122"/>
+                        <a:cs typeface="微软雅黑" panose="020B0503020204020204" pitchFamily="34" charset="-122"/>
                       </a:endParaRPr>
                     </a:p>
                   </a:txBody>
-                  <a:tcPr marL="91440" marR="91440" marT="45720" marB="45720" anchor="ctr">
+                  <a:tcPr anchor="ctr">
                     <a:lnL w="9525" cap="flat" cmpd="sng" algn="ctr">
                       <a:solidFill>
                         <a:srgbClr val="D8DBE0"/>
@@ -5253,7 +5143,7 @@
                     <a:bodyPr/>
                     <a:lstStyle/>
                     <a:p>
-                      <a:pPr algn="l" indent="0" marL="0">
+                      <a:pPr marL="0" indent="0" algn="l">
                         <a:buNone/>
                       </a:pPr>
                       <a:r>
@@ -5261,20 +5151,20 @@
                           <a:solidFill>
                             <a:srgbClr val="1F2329"/>
                           </a:solidFill>
-                          <a:latin typeface="微软雅黑" pitchFamily="34" charset="0"/>
-                          <a:ea typeface="微软雅黑" pitchFamily="34" charset="-122"/>
-                          <a:cs typeface="微软雅黑" pitchFamily="34" charset="-120"/>
+                          <a:latin typeface="微软雅黑" panose="020B0503020204020204" pitchFamily="34" charset="-122"/>
+                          <a:ea typeface="微软雅黑" panose="020B0503020204020204" pitchFamily="34" charset="-122"/>
+                          <a:cs typeface="微软雅黑" panose="020B0503020204020204" pitchFamily="34" charset="-120"/>
                         </a:rPr>
                         <a:t>9选68</a:t>
                       </a:r>
                       <a:endParaRPr lang="en-US" sz="1500" dirty="0">
-                        <a:latin typeface="微软雅黑" charset="0"/>
-                        <a:ea typeface="微软雅黑" charset="0"/>
-                        <a:cs typeface="微软雅黑" charset="0"/>
+                        <a:latin typeface="微软雅黑" panose="020B0503020204020204" pitchFamily="34" charset="-122"/>
+                        <a:ea typeface="微软雅黑" panose="020B0503020204020204" pitchFamily="34" charset="-122"/>
+                        <a:cs typeface="微软雅黑" panose="020B0503020204020204" pitchFamily="34" charset="-122"/>
                       </a:endParaRPr>
                     </a:p>
                   </a:txBody>
-                  <a:tcPr marL="91440" marR="91440" marT="45720" marB="45720" anchor="ctr">
+                  <a:tcPr anchor="ctr">
                     <a:lnL w="9525" cap="flat" cmpd="sng" algn="ctr">
                       <a:solidFill>
                         <a:srgbClr val="D8DBE0"/>
@@ -5321,7 +5211,7 @@
                     <a:bodyPr/>
                     <a:lstStyle/>
                     <a:p>
-                      <a:pPr algn="l" indent="0" marL="0">
+                      <a:pPr marL="0" indent="0" algn="l">
                         <a:buNone/>
                       </a:pPr>
                       <a:r>
@@ -5329,20 +5219,20 @@
                           <a:solidFill>
                             <a:srgbClr val="1F2329"/>
                           </a:solidFill>
-                          <a:latin typeface="微软雅黑" pitchFamily="34" charset="0"/>
-                          <a:ea typeface="微软雅黑" pitchFamily="34" charset="-122"/>
-                          <a:cs typeface="微软雅黑" pitchFamily="34" charset="-120"/>
+                          <a:latin typeface="微软雅黑" panose="020B0503020204020204" pitchFamily="34" charset="-122"/>
+                          <a:ea typeface="微软雅黑" panose="020B0503020204020204" pitchFamily="34" charset="-122"/>
+                          <a:cs typeface="微软雅黑" panose="020B0503020204020204" pitchFamily="34" charset="-120"/>
                         </a:rPr>
                         <a:t>散列同义词</a:t>
                       </a:r>
                       <a:endParaRPr lang="en-US" sz="1500" dirty="0">
-                        <a:latin typeface="微软雅黑" charset="0"/>
-                        <a:ea typeface="微软雅黑" charset="0"/>
-                        <a:cs typeface="微软雅黑" charset="0"/>
+                        <a:latin typeface="微软雅黑" panose="020B0503020204020204" pitchFamily="34" charset="-122"/>
+                        <a:ea typeface="微软雅黑" panose="020B0503020204020204" pitchFamily="34" charset="-122"/>
+                        <a:cs typeface="微软雅黑" panose="020B0503020204020204" pitchFamily="34" charset="-122"/>
                       </a:endParaRPr>
                     </a:p>
                   </a:txBody>
-                  <a:tcPr marL="91440" marR="91440" marT="45720" marB="45720" anchor="ctr">
+                  <a:tcPr anchor="ctr">
                     <a:lnL w="9525" cap="flat" cmpd="sng" algn="ctr">
                       <a:solidFill>
                         <a:srgbClr val="D8DBE0"/>
@@ -5389,7 +5279,7 @@
                     <a:bodyPr/>
                     <a:lstStyle/>
                     <a:p>
-                      <a:pPr algn="l" indent="0" marL="0">
+                      <a:pPr marL="0" indent="0" algn="l">
                         <a:buNone/>
                       </a:pPr>
                       <a:r>
@@ -5397,20 +5287,20 @@
                           <a:solidFill>
                             <a:srgbClr val="1F2329"/>
                           </a:solidFill>
-                          <a:latin typeface="微软雅黑" pitchFamily="34" charset="0"/>
-                          <a:ea typeface="微软雅黑" pitchFamily="34" charset="-122"/>
-                          <a:cs typeface="微软雅黑" pitchFamily="34" charset="-120"/>
+                          <a:latin typeface="微软雅黑" panose="020B0503020204020204" pitchFamily="34" charset="-122"/>
+                          <a:ea typeface="微软雅黑" panose="020B0503020204020204" pitchFamily="34" charset="-122"/>
+                          <a:cs typeface="微软雅黑" panose="020B0503020204020204" pitchFamily="34" charset="-120"/>
                         </a:rPr>
                         <a:t>%13判同义词，2026综合17（H=Key%13）第一步</a:t>
                       </a:r>
                       <a:endParaRPr lang="en-US" sz="1500" dirty="0">
-                        <a:latin typeface="微软雅黑" charset="0"/>
-                        <a:ea typeface="微软雅黑" charset="0"/>
-                        <a:cs typeface="微软雅黑" charset="0"/>
+                        <a:latin typeface="微软雅黑" panose="020B0503020204020204" pitchFamily="34" charset="-122"/>
+                        <a:ea typeface="微软雅黑" panose="020B0503020204020204" pitchFamily="34" charset="-122"/>
+                        <a:cs typeface="微软雅黑" panose="020B0503020204020204" pitchFamily="34" charset="-122"/>
                       </a:endParaRPr>
                     </a:p>
                   </a:txBody>
-                  <a:tcPr marL="91440" marR="91440" marT="45720" marB="45720" anchor="ctr">
+                  <a:tcPr anchor="ctr">
                     <a:lnL w="9525" cap="flat" cmpd="sng" algn="ctr">
                       <a:solidFill>
                         <a:srgbClr val="D8DBE0"/>
@@ -5459,7 +5349,7 @@
                     <a:bodyPr/>
                     <a:lstStyle/>
                     <a:p>
-                      <a:pPr algn="l" indent="0" marL="0">
+                      <a:pPr marL="0" indent="0" algn="l">
                         <a:buNone/>
                       </a:pPr>
                       <a:r>
@@ -5467,20 +5357,20 @@
                           <a:solidFill>
                             <a:srgbClr val="1F2329"/>
                           </a:solidFill>
-                          <a:latin typeface="微软雅黑" pitchFamily="34" charset="0"/>
-                          <a:ea typeface="微软雅黑" pitchFamily="34" charset="-122"/>
-                          <a:cs typeface="微软雅黑" pitchFamily="34" charset="-120"/>
+                          <a:latin typeface="微软雅黑" panose="020B0503020204020204" pitchFamily="34" charset="-122"/>
+                          <a:ea typeface="微软雅黑" panose="020B0503020204020204" pitchFamily="34" charset="-122"/>
+                          <a:cs typeface="微软雅黑" panose="020B0503020204020204" pitchFamily="34" charset="-120"/>
                         </a:rPr>
                         <a:t>9答2</a:t>
                       </a:r>
                       <a:endParaRPr lang="en-US" sz="1500" dirty="0">
-                        <a:latin typeface="微软雅黑" charset="0"/>
-                        <a:ea typeface="微软雅黑" charset="0"/>
-                        <a:cs typeface="微软雅黑" charset="0"/>
+                        <a:latin typeface="微软雅黑" panose="020B0503020204020204" pitchFamily="34" charset="-122"/>
+                        <a:ea typeface="微软雅黑" panose="020B0503020204020204" pitchFamily="34" charset="-122"/>
+                        <a:cs typeface="微软雅黑" panose="020B0503020204020204" pitchFamily="34" charset="-122"/>
                       </a:endParaRPr>
                     </a:p>
                   </a:txBody>
-                  <a:tcPr marL="91440" marR="91440" marT="45720" marB="45720" anchor="ctr">
+                  <a:tcPr anchor="ctr">
                     <a:lnL w="9525" cap="flat" cmpd="sng" algn="ctr">
                       <a:solidFill>
                         <a:srgbClr val="D8DBE0"/>
@@ -5527,7 +5417,7 @@
                     <a:bodyPr/>
                     <a:lstStyle/>
                     <a:p>
-                      <a:pPr algn="l" indent="0" marL="0">
+                      <a:pPr marL="0" indent="0" algn="l">
                         <a:buNone/>
                       </a:pPr>
                       <a:r>
@@ -5535,20 +5425,20 @@
                           <a:solidFill>
                             <a:srgbClr val="1F2329"/>
                           </a:solidFill>
-                          <a:latin typeface="微软雅黑" pitchFamily="34" charset="0"/>
-                          <a:ea typeface="微软雅黑" pitchFamily="34" charset="-122"/>
-                          <a:cs typeface="微软雅黑" pitchFamily="34" charset="-120"/>
+                          <a:latin typeface="微软雅黑" panose="020B0503020204020204" pitchFamily="34" charset="-122"/>
+                          <a:ea typeface="微软雅黑" panose="020B0503020204020204" pitchFamily="34" charset="-122"/>
+                          <a:cs typeface="微软雅黑" panose="020B0503020204020204" pitchFamily="34" charset="-120"/>
                         </a:rPr>
                         <a:t>折半查找过程</a:t>
                       </a:r>
                       <a:endParaRPr lang="en-US" sz="1500" dirty="0">
-                        <a:latin typeface="微软雅黑" charset="0"/>
-                        <a:ea typeface="微软雅黑" charset="0"/>
-                        <a:cs typeface="微软雅黑" charset="0"/>
+                        <a:latin typeface="微软雅黑" panose="020B0503020204020204" pitchFamily="34" charset="-122"/>
+                        <a:ea typeface="微软雅黑" panose="020B0503020204020204" pitchFamily="34" charset="-122"/>
+                        <a:cs typeface="微软雅黑" panose="020B0503020204020204" pitchFamily="34" charset="-122"/>
                       </a:endParaRPr>
                     </a:p>
                   </a:txBody>
-                  <a:tcPr marL="91440" marR="91440" marT="45720" marB="45720" anchor="ctr">
+                  <a:tcPr anchor="ctr">
                     <a:lnL w="9525" cap="flat" cmpd="sng" algn="ctr">
                       <a:solidFill>
                         <a:srgbClr val="D8DBE0"/>
@@ -5595,7 +5485,7 @@
                     <a:bodyPr/>
                     <a:lstStyle/>
                     <a:p>
-                      <a:pPr algn="l" indent="0" marL="0">
+                      <a:pPr marL="0" indent="0" algn="l">
                         <a:buNone/>
                       </a:pPr>
                       <a:r>
@@ -5603,20 +5493,20 @@
                           <a:solidFill>
                             <a:srgbClr val="1F2329"/>
                           </a:solidFill>
-                          <a:latin typeface="微软雅黑" pitchFamily="34" charset="0"/>
-                          <a:ea typeface="微软雅黑" pitchFamily="34" charset="-122"/>
-                          <a:cs typeface="微软雅黑" pitchFamily="34" charset="-120"/>
+                          <a:latin typeface="微软雅黑" panose="020B0503020204020204" pitchFamily="34" charset="-122"/>
+                          <a:ea typeface="微软雅黑" panose="020B0503020204020204" pitchFamily="34" charset="-122"/>
+                          <a:cs typeface="微软雅黑" panose="020B0503020204020204" pitchFamily="34" charset="-120"/>
                         </a:rPr>
                         <a:t>画查e/f/g过程，折半手算（2026综合23族）</a:t>
                       </a:r>
                       <a:endParaRPr lang="en-US" sz="1500" dirty="0">
-                        <a:latin typeface="微软雅黑" charset="0"/>
-                        <a:ea typeface="微软雅黑" charset="0"/>
-                        <a:cs typeface="微软雅黑" charset="0"/>
+                        <a:latin typeface="微软雅黑" panose="020B0503020204020204" pitchFamily="34" charset="-122"/>
+                        <a:ea typeface="微软雅黑" panose="020B0503020204020204" pitchFamily="34" charset="-122"/>
+                        <a:cs typeface="微软雅黑" panose="020B0503020204020204" pitchFamily="34" charset="-122"/>
                       </a:endParaRPr>
                     </a:p>
                   </a:txBody>
-                  <a:tcPr marL="91440" marR="91440" marT="45720" marB="45720" anchor="ctr">
+                  <a:tcPr anchor="ctr">
                     <a:lnL w="9525" cap="flat" cmpd="sng" algn="ctr">
                       <a:solidFill>
                         <a:srgbClr val="D8DBE0"/>
@@ -5665,7 +5555,7 @@
                     <a:bodyPr/>
                     <a:lstStyle/>
                     <a:p>
-                      <a:pPr algn="l" indent="0" marL="0">
+                      <a:pPr marL="0" indent="0" algn="l">
                         <a:buNone/>
                       </a:pPr>
                       <a:r>
@@ -5673,20 +5563,20 @@
                           <a:solidFill>
                             <a:srgbClr val="1F2329"/>
                           </a:solidFill>
-                          <a:latin typeface="微软雅黑" pitchFamily="34" charset="0"/>
-                          <a:ea typeface="微软雅黑" pitchFamily="34" charset="-122"/>
-                          <a:cs typeface="微软雅黑" pitchFamily="34" charset="-120"/>
+                          <a:latin typeface="微软雅黑" panose="020B0503020204020204" pitchFamily="34" charset="-122"/>
+                          <a:ea typeface="微软雅黑" panose="020B0503020204020204" pitchFamily="34" charset="-122"/>
+                          <a:cs typeface="微软雅黑" panose="020B0503020204020204" pitchFamily="34" charset="-120"/>
                         </a:rPr>
                         <a:t>9答3</a:t>
                       </a:r>
                       <a:endParaRPr lang="en-US" sz="1500" dirty="0">
-                        <a:latin typeface="微软雅黑" charset="0"/>
-                        <a:ea typeface="微软雅黑" charset="0"/>
-                        <a:cs typeface="微软雅黑" charset="0"/>
+                        <a:latin typeface="微软雅黑" panose="020B0503020204020204" pitchFamily="34" charset="-122"/>
+                        <a:ea typeface="微软雅黑" panose="020B0503020204020204" pitchFamily="34" charset="-122"/>
+                        <a:cs typeface="微软雅黑" panose="020B0503020204020204" pitchFamily="34" charset="-122"/>
                       </a:endParaRPr>
                     </a:p>
                   </a:txBody>
-                  <a:tcPr marL="91440" marR="91440" marT="45720" marB="45720" anchor="ctr">
+                  <a:tcPr anchor="ctr">
                     <a:lnL w="9525" cap="flat" cmpd="sng" algn="ctr">
                       <a:solidFill>
                         <a:srgbClr val="D8DBE0"/>
@@ -5733,7 +5623,7 @@
                     <a:bodyPr/>
                     <a:lstStyle/>
                     <a:p>
-                      <a:pPr algn="l" indent="0" marL="0">
+                      <a:pPr marL="0" indent="0" algn="l">
                         <a:buNone/>
                       </a:pPr>
                       <a:r>
@@ -5741,20 +5631,20 @@
                           <a:solidFill>
                             <a:srgbClr val="1F2329"/>
                           </a:solidFill>
-                          <a:latin typeface="微软雅黑" pitchFamily="34" charset="0"/>
-                          <a:ea typeface="微软雅黑" pitchFamily="34" charset="-122"/>
-                          <a:cs typeface="微软雅黑" pitchFamily="34" charset="-120"/>
+                          <a:latin typeface="微软雅黑" panose="020B0503020204020204" pitchFamily="34" charset="-122"/>
+                          <a:ea typeface="微软雅黑" panose="020B0503020204020204" pitchFamily="34" charset="-122"/>
+                          <a:cs typeface="微软雅黑" panose="020B0503020204020204" pitchFamily="34" charset="-120"/>
                         </a:rPr>
                         <a:t>折半判定树+ASL</a:t>
                       </a:r>
                       <a:endParaRPr lang="en-US" sz="1500" dirty="0">
-                        <a:latin typeface="微软雅黑" charset="0"/>
-                        <a:ea typeface="微软雅黑" charset="0"/>
-                        <a:cs typeface="微软雅黑" charset="0"/>
+                        <a:latin typeface="微软雅黑" panose="020B0503020204020204" pitchFamily="34" charset="-122"/>
+                        <a:ea typeface="微软雅黑" panose="020B0503020204020204" pitchFamily="34" charset="-122"/>
+                        <a:cs typeface="微软雅黑" panose="020B0503020204020204" pitchFamily="34" charset="-122"/>
                       </a:endParaRPr>
                     </a:p>
                   </a:txBody>
-                  <a:tcPr marL="91440" marR="91440" marT="45720" marB="45720" anchor="ctr">
+                  <a:tcPr anchor="ctr">
                     <a:lnL w="9525" cap="flat" cmpd="sng" algn="ctr">
                       <a:solidFill>
                         <a:srgbClr val="D8DBE0"/>
@@ -5801,7 +5691,7 @@
                     <a:bodyPr/>
                     <a:lstStyle/>
                     <a:p>
-                      <a:pPr algn="l" indent="0" marL="0">
+                      <a:pPr marL="0" indent="0" algn="l">
                         <a:buNone/>
                       </a:pPr>
                       <a:r>
@@ -5809,20 +5699,20 @@
                           <a:solidFill>
                             <a:srgbClr val="1F2329"/>
                           </a:solidFill>
-                          <a:latin typeface="微软雅黑" pitchFamily="34" charset="0"/>
-                          <a:ea typeface="微软雅黑" pitchFamily="34" charset="-122"/>
-                          <a:cs typeface="微软雅黑" pitchFamily="34" charset="-120"/>
+                          <a:latin typeface="微软雅黑" panose="020B0503020204020204" pitchFamily="34" charset="-122"/>
+                          <a:ea typeface="微软雅黑" panose="020B0503020204020204" pitchFamily="34" charset="-122"/>
+                          <a:cs typeface="微软雅黑" panose="020B0503020204020204" pitchFamily="34" charset="-120"/>
                         </a:rPr>
                         <a:t>画判定树求成功ASL，2026综合23(1)(3)/2025综合4…</a:t>
                       </a:r>
                       <a:endParaRPr lang="en-US" sz="1500" dirty="0">
-                        <a:latin typeface="微软雅黑" charset="0"/>
-                        <a:ea typeface="微软雅黑" charset="0"/>
-                        <a:cs typeface="微软雅黑" charset="0"/>
+                        <a:latin typeface="微软雅黑" panose="020B0503020204020204" pitchFamily="34" charset="-122"/>
+                        <a:ea typeface="微软雅黑" panose="020B0503020204020204" pitchFamily="34" charset="-122"/>
+                        <a:cs typeface="微软雅黑" panose="020B0503020204020204" pitchFamily="34" charset="-122"/>
                       </a:endParaRPr>
                     </a:p>
                   </a:txBody>
-                  <a:tcPr marL="91440" marR="91440" marT="45720" marB="45720" anchor="ctr">
+                  <a:tcPr anchor="ctr">
                     <a:lnL w="9525" cap="flat" cmpd="sng" algn="ctr">
                       <a:solidFill>
                         <a:srgbClr val="D8DBE0"/>
@@ -5871,7 +5761,7 @@
                     <a:bodyPr/>
                     <a:lstStyle/>
                     <a:p>
-                      <a:pPr algn="l" indent="0" marL="0">
+                      <a:pPr marL="0" indent="0" algn="l">
                         <a:buNone/>
                       </a:pPr>
                       <a:r>
@@ -5879,20 +5769,20 @@
                           <a:solidFill>
                             <a:srgbClr val="1F2329"/>
                           </a:solidFill>
-                          <a:latin typeface="微软雅黑" pitchFamily="34" charset="0"/>
-                          <a:ea typeface="微软雅黑" pitchFamily="34" charset="-122"/>
-                          <a:cs typeface="微软雅黑" pitchFamily="34" charset="-120"/>
+                          <a:latin typeface="微软雅黑" panose="020B0503020204020204" pitchFamily="34" charset="-122"/>
+                          <a:ea typeface="微软雅黑" panose="020B0503020204020204" pitchFamily="34" charset="-122"/>
+                          <a:cs typeface="微软雅黑" panose="020B0503020204020204" pitchFamily="34" charset="-120"/>
                         </a:rPr>
                         <a:t>9答9</a:t>
                       </a:r>
                       <a:endParaRPr lang="en-US" sz="1500" dirty="0">
-                        <a:latin typeface="微软雅黑" charset="0"/>
-                        <a:ea typeface="微软雅黑" charset="0"/>
-                        <a:cs typeface="微软雅黑" charset="0"/>
+                        <a:latin typeface="微软雅黑" panose="020B0503020204020204" pitchFamily="34" charset="-122"/>
+                        <a:ea typeface="微软雅黑" panose="020B0503020204020204" pitchFamily="34" charset="-122"/>
+                        <a:cs typeface="微软雅黑" panose="020B0503020204020204" pitchFamily="34" charset="-122"/>
                       </a:endParaRPr>
                     </a:p>
                   </a:txBody>
-                  <a:tcPr marL="91440" marR="91440" marT="45720" marB="45720" anchor="ctr">
+                  <a:tcPr anchor="ctr">
                     <a:lnL w="9525" cap="flat" cmpd="sng" algn="ctr">
                       <a:solidFill>
                         <a:srgbClr val="D8DBE0"/>
@@ -5939,7 +5829,7 @@
                     <a:bodyPr/>
                     <a:lstStyle/>
                     <a:p>
-                      <a:pPr algn="l" indent="0" marL="0">
+                      <a:pPr marL="0" indent="0" algn="l">
                         <a:buNone/>
                       </a:pPr>
                       <a:r>
@@ -5947,20 +5837,20 @@
                           <a:solidFill>
                             <a:srgbClr val="1F2329"/>
                           </a:solidFill>
-                          <a:latin typeface="微软雅黑" pitchFamily="34" charset="0"/>
-                          <a:ea typeface="微软雅黑" pitchFamily="34" charset="-122"/>
-                          <a:cs typeface="微软雅黑" pitchFamily="34" charset="-120"/>
+                          <a:latin typeface="微软雅黑" panose="020B0503020204020204" pitchFamily="34" charset="-122"/>
+                          <a:ea typeface="微软雅黑" panose="020B0503020204020204" pitchFamily="34" charset="-122"/>
+                          <a:cs typeface="微软雅黑" panose="020B0503020204020204" pitchFamily="34" charset="-120"/>
                         </a:rPr>
                         <a:t>BST/折半/AVL三合一</a:t>
                       </a:r>
                       <a:endParaRPr lang="en-US" sz="1500" dirty="0">
-                        <a:latin typeface="微软雅黑" charset="0"/>
-                        <a:ea typeface="微软雅黑" charset="0"/>
-                        <a:cs typeface="微软雅黑" charset="0"/>
+                        <a:latin typeface="微软雅黑" panose="020B0503020204020204" pitchFamily="34" charset="-122"/>
+                        <a:ea typeface="微软雅黑" panose="020B0503020204020204" pitchFamily="34" charset="-122"/>
+                        <a:cs typeface="微软雅黑" panose="020B0503020204020204" pitchFamily="34" charset="-122"/>
                       </a:endParaRPr>
                     </a:p>
                   </a:txBody>
-                  <a:tcPr marL="91440" marR="91440" marT="45720" marB="45720" anchor="ctr">
+                  <a:tcPr anchor="ctr">
                     <a:lnL w="9525" cap="flat" cmpd="sng" algn="ctr">
                       <a:solidFill>
                         <a:srgbClr val="D8DBE0"/>
@@ -6007,7 +5897,7 @@
                     <a:bodyPr/>
                     <a:lstStyle/>
                     <a:p>
-                      <a:pPr algn="l" indent="0" marL="0">
+                      <a:pPr marL="0" indent="0" algn="l">
                         <a:buNone/>
                       </a:pPr>
                       <a:r>
@@ -6015,20 +5905,20 @@
                           <a:solidFill>
                             <a:srgbClr val="1F2329"/>
                           </a:solidFill>
-                          <a:latin typeface="微软雅黑" pitchFamily="34" charset="0"/>
-                          <a:ea typeface="微软雅黑" pitchFamily="34" charset="-122"/>
-                          <a:cs typeface="微软雅黑" pitchFamily="34" charset="-120"/>
+                          <a:latin typeface="微软雅黑" panose="020B0503020204020204" pitchFamily="34" charset="-122"/>
+                          <a:ea typeface="微软雅黑" panose="020B0503020204020204" pitchFamily="34" charset="-122"/>
+                          <a:cs typeface="微软雅黑" panose="020B0503020204020204" pitchFamily="34" charset="-120"/>
                         </a:rPr>
                         <a:t>长度12的表三小问（依次插入BST+ASL／排序后折半ASL／构造AVL+ASL），2024综合6原题</a:t>
                       </a:r>
                       <a:endParaRPr lang="en-US" sz="1500" dirty="0">
-                        <a:latin typeface="微软雅黑" charset="0"/>
-                        <a:ea typeface="微软雅黑" charset="0"/>
-                        <a:cs typeface="微软雅黑" charset="0"/>
+                        <a:latin typeface="微软雅黑" panose="020B0503020204020204" pitchFamily="34" charset="-122"/>
+                        <a:ea typeface="微软雅黑" panose="020B0503020204020204" pitchFamily="34" charset="-122"/>
+                        <a:cs typeface="微软雅黑" panose="020B0503020204020204" pitchFamily="34" charset="-122"/>
                       </a:endParaRPr>
                     </a:p>
                   </a:txBody>
-                  <a:tcPr marL="91440" marR="91440" marT="45720" marB="45720" anchor="ctr">
+                  <a:tcPr anchor="ctr">
                     <a:lnL w="9525" cap="flat" cmpd="sng" algn="ctr">
                       <a:solidFill>
                         <a:srgbClr val="D8DBE0"/>
@@ -6077,7 +5967,7 @@
                     <a:bodyPr/>
                     <a:lstStyle/>
                     <a:p>
-                      <a:pPr algn="l" indent="0" marL="0">
+                      <a:pPr marL="0" indent="0" algn="l">
                         <a:buNone/>
                       </a:pPr>
                       <a:r>
@@ -6085,20 +5975,20 @@
                           <a:solidFill>
                             <a:srgbClr val="1F2329"/>
                           </a:solidFill>
-                          <a:latin typeface="微软雅黑" pitchFamily="34" charset="0"/>
-                          <a:ea typeface="微软雅黑" pitchFamily="34" charset="-122"/>
-                          <a:cs typeface="微软雅黑" pitchFamily="34" charset="-120"/>
+                          <a:latin typeface="微软雅黑" panose="020B0503020204020204" pitchFamily="34" charset="-122"/>
+                          <a:ea typeface="微软雅黑" panose="020B0503020204020204" pitchFamily="34" charset="-122"/>
+                          <a:cs typeface="微软雅黑" panose="020B0503020204020204" pitchFamily="34" charset="-120"/>
                         </a:rPr>
                         <a:t>9答26</a:t>
                       </a:r>
                       <a:endParaRPr lang="en-US" sz="1500" dirty="0">
-                        <a:latin typeface="微软雅黑" charset="0"/>
-                        <a:ea typeface="微软雅黑" charset="0"/>
-                        <a:cs typeface="微软雅黑" charset="0"/>
+                        <a:latin typeface="微软雅黑" panose="020B0503020204020204" pitchFamily="34" charset="-122"/>
+                        <a:ea typeface="微软雅黑" panose="020B0503020204020204" pitchFamily="34" charset="-122"/>
+                        <a:cs typeface="微软雅黑" panose="020B0503020204020204" pitchFamily="34" charset="-122"/>
                       </a:endParaRPr>
                     </a:p>
                   </a:txBody>
-                  <a:tcPr marL="91440" marR="91440" marT="45720" marB="45720" anchor="ctr">
+                  <a:tcPr anchor="ctr">
                     <a:lnL w="9525" cap="flat" cmpd="sng" algn="ctr">
                       <a:solidFill>
                         <a:srgbClr val="D8DBE0"/>
@@ -6145,7 +6035,7 @@
                     <a:bodyPr/>
                     <a:lstStyle/>
                     <a:p>
-                      <a:pPr algn="l" indent="0" marL="0">
+                      <a:pPr marL="0" indent="0" algn="l">
                         <a:buNone/>
                       </a:pPr>
                       <a:r>
@@ -6153,20 +6043,20 @@
                           <a:solidFill>
                             <a:srgbClr val="1F2329"/>
                           </a:solidFill>
-                          <a:latin typeface="微软雅黑" pitchFamily="34" charset="0"/>
-                          <a:ea typeface="微软雅黑" pitchFamily="34" charset="-122"/>
-                          <a:cs typeface="微软雅黑" pitchFamily="34" charset="-120"/>
+                          <a:latin typeface="微软雅黑" panose="020B0503020204020204" pitchFamily="34" charset="-122"/>
+                          <a:ea typeface="微软雅黑" panose="020B0503020204020204" pitchFamily="34" charset="-122"/>
+                          <a:cs typeface="微软雅黑" panose="020B0503020204020204" pitchFamily="34" charset="-120"/>
                         </a:rPr>
                         <a:t>再散列建表</a:t>
                       </a:r>
                       <a:endParaRPr lang="en-US" sz="1500" dirty="0">
-                        <a:latin typeface="微软雅黑" charset="0"/>
-                        <a:ea typeface="微软雅黑" charset="0"/>
-                        <a:cs typeface="微软雅黑" charset="0"/>
+                        <a:latin typeface="微软雅黑" panose="020B0503020204020204" pitchFamily="34" charset="-122"/>
+                        <a:ea typeface="微软雅黑" panose="020B0503020204020204" pitchFamily="34" charset="-122"/>
+                        <a:cs typeface="微软雅黑" panose="020B0503020204020204" pitchFamily="34" charset="-122"/>
                       </a:endParaRPr>
                     </a:p>
                   </a:txBody>
-                  <a:tcPr marL="91440" marR="91440" marT="45720" marB="45720" anchor="ctr">
+                  <a:tcPr anchor="ctr">
                     <a:lnL w="9525" cap="flat" cmpd="sng" algn="ctr">
                       <a:solidFill>
                         <a:srgbClr val="D8DBE0"/>
@@ -6213,7 +6103,7 @@
                     <a:bodyPr/>
                     <a:lstStyle/>
                     <a:p>
-                      <a:pPr algn="l" indent="0" marL="0">
+                      <a:pPr marL="0" indent="0" algn="l">
                         <a:buNone/>
                       </a:pPr>
                       <a:r>
@@ -6221,20 +6111,20 @@
                           <a:solidFill>
                             <a:srgbClr val="1F2329"/>
                           </a:solidFill>
-                          <a:latin typeface="微软雅黑" pitchFamily="34" charset="0"/>
-                          <a:ea typeface="微软雅黑" pitchFamily="34" charset="-122"/>
-                          <a:cs typeface="微软雅黑" pitchFamily="34" charset="-120"/>
+                          <a:latin typeface="微软雅黑" panose="020B0503020204020204" pitchFamily="34" charset="-122"/>
+                          <a:ea typeface="微软雅黑" panose="020B0503020204020204" pitchFamily="34" charset="-122"/>
+                          <a:cs typeface="微软雅黑" panose="020B0503020204020204" pitchFamily="34" charset="-120"/>
                         </a:rPr>
                         <a:t>开放定址+再散列函数建表，2025综合2原题（双散列）</a:t>
                       </a:r>
                       <a:endParaRPr lang="en-US" sz="1500" dirty="0">
-                        <a:latin typeface="微软雅黑" charset="0"/>
-                        <a:ea typeface="微软雅黑" charset="0"/>
-                        <a:cs typeface="微软雅黑" charset="0"/>
+                        <a:latin typeface="微软雅黑" panose="020B0503020204020204" pitchFamily="34" charset="-122"/>
+                        <a:ea typeface="微软雅黑" panose="020B0503020204020204" pitchFamily="34" charset="-122"/>
+                        <a:cs typeface="微软雅黑" panose="020B0503020204020204" pitchFamily="34" charset="-122"/>
                       </a:endParaRPr>
                     </a:p>
                   </a:txBody>
-                  <a:tcPr marL="91440" marR="91440" marT="45720" marB="45720" anchor="ctr">
+                  <a:tcPr anchor="ctr">
                     <a:lnL w="9525" cap="flat" cmpd="sng" algn="ctr">
                       <a:solidFill>
                         <a:srgbClr val="D8DBE0"/>
@@ -6291,7 +6181,7 @@
 
 <file path=ppt/slides/slide5.xml><?xml version="1.0" encoding="utf-8"?>
 <p:sld xmlns:a="http://schemas.openxmlformats.org/drawingml/2006/main" xmlns:r="http://schemas.openxmlformats.org/officeDocument/2006/relationships" xmlns:p="http://schemas.openxmlformats.org/presentationml/2006/main">
-  <p:cSld name="Slide 5">
+  <p:cSld>
     <p:bg>
       <p:bgPr>
         <a:blipFill dpi="0" rotWithShape="1">
@@ -6335,13 +6225,12 @@
             <a:avLst/>
           </a:prstGeom>
           <a:noFill/>
-          <a:ln/>
         </p:spPr>
         <p:txBody>
           <a:bodyPr wrap="square" rtlCol="0" anchor="ctr"/>
           <a:lstStyle/>
           <a:p>
-            <a:pPr algn="r" indent="0" marL="0">
+            <a:pPr marL="0" indent="0" algn="r">
               <a:buNone/>
             </a:pPr>
             <a:r>
@@ -6349,9 +6238,9 @@
                 <a:solidFill>
                   <a:srgbClr val="8A9099"/>
                 </a:solidFill>
-                <a:latin typeface="微软雅黑" pitchFamily="34" charset="0"/>
-                <a:ea typeface="微软雅黑" pitchFamily="34" charset="-122"/>
-                <a:cs typeface="微软雅黑" pitchFamily="34" charset="-120"/>
+                <a:latin typeface="微软雅黑" panose="020B0503020204020204" pitchFamily="34" charset="-122"/>
+                <a:ea typeface="微软雅黑" panose="020B0503020204020204" pitchFamily="34" charset="-122"/>
+                <a:cs typeface="微软雅黑" panose="020B0503020204020204" pitchFamily="34" charset="-120"/>
               </a:rPr>
               <a:t>5 / 8</a:t>
             </a:r>
@@ -6374,13 +6263,12 @@
             <a:avLst/>
           </a:prstGeom>
           <a:noFill/>
-          <a:ln/>
         </p:spPr>
         <p:txBody>
           <a:bodyPr wrap="square" rtlCol="0" anchor="ctr"/>
           <a:lstStyle/>
           <a:p>
-            <a:pPr algn="l" indent="0" marL="0">
+            <a:pPr marL="0" indent="0" algn="l">
               <a:buNone/>
             </a:pPr>
             <a:r>
@@ -6388,9 +6276,9 @@
                 <a:solidFill>
                   <a:srgbClr val="1F4E9C"/>
                 </a:solidFill>
-                <a:latin typeface="微软雅黑" pitchFamily="34" charset="0"/>
-                <a:ea typeface="微软雅黑" pitchFamily="34" charset="-122"/>
-                <a:cs typeface="微软雅黑" pitchFamily="34" charset="-120"/>
+                <a:latin typeface="微软雅黑" panose="020B0503020204020204" pitchFamily="34" charset="-122"/>
+                <a:ea typeface="微软雅黑" panose="020B0503020204020204" pitchFamily="34" charset="-122"/>
+                <a:cs typeface="微软雅黑" panose="020B0503020204020204" pitchFamily="34" charset="-120"/>
               </a:rPr>
               <a:t>有价值必做</a:t>
             </a:r>
@@ -6413,13 +6301,12 @@
             <a:avLst/>
           </a:prstGeom>
           <a:noFill/>
-          <a:ln/>
         </p:spPr>
         <p:txBody>
           <a:bodyPr wrap="square" rtlCol="0" anchor="ctr"/>
           <a:lstStyle/>
           <a:p>
-            <a:pPr algn="l" indent="0" marL="0">
+            <a:pPr marL="0" indent="0" algn="l">
               <a:buNone/>
             </a:pPr>
             <a:r>
@@ -6427,9 +6314,9 @@
                 <a:solidFill>
                   <a:srgbClr val="1F2329"/>
                 </a:solidFill>
-                <a:latin typeface="微软雅黑" pitchFamily="34" charset="0"/>
-                <a:ea typeface="微软雅黑" pitchFamily="34" charset="-122"/>
-                <a:cs typeface="微软雅黑" pitchFamily="34" charset="-120"/>
+                <a:latin typeface="微软雅黑" panose="020B0503020204020204" pitchFamily="34" charset="-122"/>
+                <a:ea typeface="微软雅黑" panose="020B0503020204020204" pitchFamily="34" charset="-122"/>
+                <a:cs typeface="微软雅黑" panose="020B0503020204020204" pitchFamily="34" charset="-120"/>
               </a:rPr>
               <a:t>必做题（3/3）</a:t>
             </a:r>
@@ -6443,17 +6330,11 @@
           <p:cNvGraphicFramePr>
             <a:graphicFrameLocks noGrp="1"/>
           </p:cNvGraphicFramePr>
-          <p:nvPr>
-            <p:extLst>
-              <p:ext uri="{D42A27DB-BD31-4B8C-83A1-F6EECF244321}">
-                <p14:modId xmlns:p14="http://schemas.microsoft.com/office/powerpoint/2010/main" val="1579011935"/>
-              </p:ext>
-            </p:extLst>
-          </p:nvPr>
+          <p:nvPr/>
         </p:nvGraphicFramePr>
         <p:xfrm>
           <a:off x="822960" y="2395728"/>
-          <a:ext cx="10545775" cy="914400"/>
+          <a:ext cx="10545775" cy="2103120"/>
         </p:xfrm>
         <a:graphic>
           <a:graphicData uri="http://schemas.openxmlformats.org/drawingml/2006/table">
@@ -6470,7 +6351,7 @@
                     <a:bodyPr/>
                     <a:lstStyle/>
                     <a:p>
-                      <a:pPr algn="l" indent="0" marL="0">
+                      <a:pPr marL="0" indent="0" algn="l">
                         <a:buNone/>
                       </a:pPr>
                       <a:r>
@@ -6478,20 +6359,20 @@
                           <a:solidFill>
                             <a:srgbClr val="1F4E9C"/>
                           </a:solidFill>
-                          <a:latin typeface="微软雅黑" pitchFamily="34" charset="0"/>
-                          <a:ea typeface="微软雅黑" pitchFamily="34" charset="-122"/>
-                          <a:cs typeface="微软雅黑" pitchFamily="34" charset="-120"/>
+                          <a:latin typeface="微软雅黑" panose="020B0503020204020204" pitchFamily="34" charset="-122"/>
+                          <a:ea typeface="微软雅黑" panose="020B0503020204020204" pitchFamily="34" charset="-122"/>
+                          <a:cs typeface="微软雅黑" panose="020B0503020204020204" pitchFamily="34" charset="-120"/>
                         </a:rPr>
                         <a:t>题号</a:t>
                       </a:r>
                       <a:endParaRPr lang="en-US" sz="1500" dirty="0">
-                        <a:latin typeface="微软雅黑" charset="0"/>
-                        <a:ea typeface="微软雅黑" charset="0"/>
-                        <a:cs typeface="微软雅黑" charset="0"/>
+                        <a:latin typeface="微软雅黑" panose="020B0503020204020204" pitchFamily="34" charset="-122"/>
+                        <a:ea typeface="微软雅黑" panose="020B0503020204020204" pitchFamily="34" charset="-122"/>
+                        <a:cs typeface="微软雅黑" panose="020B0503020204020204" pitchFamily="34" charset="-122"/>
                       </a:endParaRPr>
                     </a:p>
                   </a:txBody>
-                  <a:tcPr marL="91440" marR="91440" marT="45720" marB="45720" anchor="ctr">
+                  <a:tcPr anchor="ctr">
                     <a:lnL w="9525" cap="flat" cmpd="sng" algn="ctr">
                       <a:solidFill>
                         <a:srgbClr val="D8DBE0"/>
@@ -6538,7 +6419,7 @@
                     <a:bodyPr/>
                     <a:lstStyle/>
                     <a:p>
-                      <a:pPr algn="l" indent="0" marL="0">
+                      <a:pPr marL="0" indent="0" algn="l">
                         <a:buNone/>
                       </a:pPr>
                       <a:r>
@@ -6546,20 +6427,20 @@
                           <a:solidFill>
                             <a:srgbClr val="1F4E9C"/>
                           </a:solidFill>
-                          <a:latin typeface="微软雅黑" pitchFamily="34" charset="0"/>
-                          <a:ea typeface="微软雅黑" pitchFamily="34" charset="-122"/>
-                          <a:cs typeface="微软雅黑" pitchFamily="34" charset="-120"/>
+                          <a:latin typeface="微软雅黑" panose="020B0503020204020204" pitchFamily="34" charset="-122"/>
+                          <a:ea typeface="微软雅黑" panose="020B0503020204020204" pitchFamily="34" charset="-122"/>
+                          <a:cs typeface="微软雅黑" panose="020B0503020204020204" pitchFamily="34" charset="-120"/>
                         </a:rPr>
                         <a:t>考点</a:t>
                       </a:r>
                       <a:endParaRPr lang="en-US" sz="1500" dirty="0">
-                        <a:latin typeface="微软雅黑" charset="0"/>
-                        <a:ea typeface="微软雅黑" charset="0"/>
-                        <a:cs typeface="微软雅黑" charset="0"/>
+                        <a:latin typeface="微软雅黑" panose="020B0503020204020204" pitchFamily="34" charset="-122"/>
+                        <a:ea typeface="微软雅黑" panose="020B0503020204020204" pitchFamily="34" charset="-122"/>
+                        <a:cs typeface="微软雅黑" panose="020B0503020204020204" pitchFamily="34" charset="-122"/>
                       </a:endParaRPr>
                     </a:p>
                   </a:txBody>
-                  <a:tcPr marL="91440" marR="91440" marT="45720" marB="45720" anchor="ctr">
+                  <a:tcPr anchor="ctr">
                     <a:lnL w="9525" cap="flat" cmpd="sng" algn="ctr">
                       <a:solidFill>
                         <a:srgbClr val="D8DBE0"/>
@@ -6606,7 +6487,7 @@
                     <a:bodyPr/>
                     <a:lstStyle/>
                     <a:p>
-                      <a:pPr algn="l" indent="0" marL="0">
+                      <a:pPr marL="0" indent="0" algn="l">
                         <a:buNone/>
                       </a:pPr>
                       <a:r>
@@ -6614,20 +6495,20 @@
                           <a:solidFill>
                             <a:srgbClr val="1F4E9C"/>
                           </a:solidFill>
-                          <a:latin typeface="微软雅黑" pitchFamily="34" charset="0"/>
-                          <a:ea typeface="微软雅黑" pitchFamily="34" charset="-122"/>
-                          <a:cs typeface="微软雅黑" pitchFamily="34" charset="-120"/>
+                          <a:latin typeface="微软雅黑" panose="020B0503020204020204" pitchFamily="34" charset="-122"/>
+                          <a:ea typeface="微软雅黑" panose="020B0503020204020204" pitchFamily="34" charset="-122"/>
+                          <a:cs typeface="微软雅黑" panose="020B0503020204020204" pitchFamily="34" charset="-120"/>
                         </a:rPr>
                         <a:t>价值</a:t>
                       </a:r>
                       <a:endParaRPr lang="en-US" sz="1500" dirty="0">
-                        <a:latin typeface="微软雅黑" charset="0"/>
-                        <a:ea typeface="微软雅黑" charset="0"/>
-                        <a:cs typeface="微软雅黑" charset="0"/>
+                        <a:latin typeface="微软雅黑" panose="020B0503020204020204" pitchFamily="34" charset="-122"/>
+                        <a:ea typeface="微软雅黑" panose="020B0503020204020204" pitchFamily="34" charset="-122"/>
+                        <a:cs typeface="微软雅黑" panose="020B0503020204020204" pitchFamily="34" charset="-122"/>
                       </a:endParaRPr>
                     </a:p>
                   </a:txBody>
-                  <a:tcPr marL="91440" marR="91440" marT="45720" marB="45720" anchor="ctr">
+                  <a:tcPr anchor="ctr">
                     <a:lnL w="9525" cap="flat" cmpd="sng" algn="ctr">
                       <a:solidFill>
                         <a:srgbClr val="D8DBE0"/>
@@ -6676,7 +6557,7 @@
                     <a:bodyPr/>
                     <a:lstStyle/>
                     <a:p>
-                      <a:pPr algn="l" indent="0" marL="0">
+                      <a:pPr marL="0" indent="0" algn="l">
                         <a:buNone/>
                       </a:pPr>
                       <a:r>
@@ -6684,20 +6565,20 @@
                           <a:solidFill>
                             <a:srgbClr val="1F2329"/>
                           </a:solidFill>
-                          <a:latin typeface="微软雅黑" pitchFamily="34" charset="0"/>
-                          <a:ea typeface="微软雅黑" pitchFamily="34" charset="-122"/>
-                          <a:cs typeface="微软雅黑" pitchFamily="34" charset="-120"/>
+                          <a:latin typeface="微软雅黑" panose="020B0503020204020204" pitchFamily="34" charset="-122"/>
+                          <a:ea typeface="微软雅黑" panose="020B0503020204020204" pitchFamily="34" charset="-122"/>
+                          <a:cs typeface="微软雅黑" panose="020B0503020204020204" pitchFamily="34" charset="-120"/>
                         </a:rPr>
                         <a:t>9答27</a:t>
                       </a:r>
                       <a:endParaRPr lang="en-US" sz="1500" dirty="0">
-                        <a:latin typeface="微软雅黑" charset="0"/>
-                        <a:ea typeface="微软雅黑" charset="0"/>
-                        <a:cs typeface="微软雅黑" charset="0"/>
+                        <a:latin typeface="微软雅黑" panose="020B0503020204020204" pitchFamily="34" charset="-122"/>
+                        <a:ea typeface="微软雅黑" panose="020B0503020204020204" pitchFamily="34" charset="-122"/>
+                        <a:cs typeface="微软雅黑" panose="020B0503020204020204" pitchFamily="34" charset="-122"/>
                       </a:endParaRPr>
                     </a:p>
                   </a:txBody>
-                  <a:tcPr marL="91440" marR="91440" marT="45720" marB="45720" anchor="ctr">
+                  <a:tcPr anchor="ctr">
                     <a:lnL w="9525" cap="flat" cmpd="sng" algn="ctr">
                       <a:solidFill>
                         <a:srgbClr val="D8DBE0"/>
@@ -6744,7 +6625,7 @@
                     <a:bodyPr/>
                     <a:lstStyle/>
                     <a:p>
-                      <a:pPr algn="l" indent="0" marL="0">
+                      <a:pPr marL="0" indent="0" algn="l">
                         <a:buNone/>
                       </a:pPr>
                       <a:r>
@@ -6752,20 +6633,20 @@
                           <a:solidFill>
                             <a:srgbClr val="1F2329"/>
                           </a:solidFill>
-                          <a:latin typeface="微软雅黑" pitchFamily="34" charset="0"/>
-                          <a:ea typeface="微软雅黑" pitchFamily="34" charset="-122"/>
-                          <a:cs typeface="微软雅黑" pitchFamily="34" charset="-120"/>
+                          <a:latin typeface="微软雅黑" panose="020B0503020204020204" pitchFamily="34" charset="-122"/>
+                          <a:ea typeface="微软雅黑" panose="020B0503020204020204" pitchFamily="34" charset="-122"/>
+                          <a:cs typeface="微软雅黑" panose="020B0503020204020204" pitchFamily="34" charset="-120"/>
                         </a:rPr>
                         <a:t>建表+ASL</a:t>
                       </a:r>
                       <a:endParaRPr lang="en-US" sz="1500" dirty="0">
-                        <a:latin typeface="微软雅黑" charset="0"/>
-                        <a:ea typeface="微软雅黑" charset="0"/>
-                        <a:cs typeface="微软雅黑" charset="0"/>
+                        <a:latin typeface="微软雅黑" panose="020B0503020204020204" pitchFamily="34" charset="-122"/>
+                        <a:ea typeface="微软雅黑" panose="020B0503020204020204" pitchFamily="34" charset="-122"/>
+                        <a:cs typeface="微软雅黑" panose="020B0503020204020204" pitchFamily="34" charset="-122"/>
                       </a:endParaRPr>
                     </a:p>
                   </a:txBody>
-                  <a:tcPr marL="91440" marR="91440" marT="45720" marB="45720" anchor="ctr">
+                  <a:tcPr anchor="ctr">
                     <a:lnL w="9525" cap="flat" cmpd="sng" algn="ctr">
                       <a:solidFill>
                         <a:srgbClr val="D8DBE0"/>
@@ -6812,7 +6693,7 @@
                     <a:bodyPr/>
                     <a:lstStyle/>
                     <a:p>
-                      <a:pPr algn="l" indent="0" marL="0">
+                      <a:pPr marL="0" indent="0" algn="l">
                         <a:buNone/>
                       </a:pPr>
                       <a:r>
@@ -6820,20 +6701,20 @@
                           <a:solidFill>
                             <a:srgbClr val="1F2329"/>
                           </a:solidFill>
-                          <a:latin typeface="微软雅黑" pitchFamily="34" charset="0"/>
-                          <a:ea typeface="微软雅黑" pitchFamily="34" charset="-122"/>
-                          <a:cs typeface="微软雅黑" pitchFamily="34" charset="-120"/>
+                          <a:latin typeface="微软雅黑" panose="020B0503020204020204" pitchFamily="34" charset="-122"/>
+                          <a:ea typeface="微软雅黑" panose="020B0503020204020204" pitchFamily="34" charset="-122"/>
+                          <a:cs typeface="微软雅黑" panose="020B0503020204020204" pitchFamily="34" charset="-120"/>
                         </a:rPr>
                         <a:t>按装填因子建散列表并算ASL，2024综合2同型</a:t>
                       </a:r>
                       <a:endParaRPr lang="en-US" sz="1500" dirty="0">
-                        <a:latin typeface="微软雅黑" charset="0"/>
-                        <a:ea typeface="微软雅黑" charset="0"/>
-                        <a:cs typeface="微软雅黑" charset="0"/>
+                        <a:latin typeface="微软雅黑" panose="020B0503020204020204" pitchFamily="34" charset="-122"/>
+                        <a:ea typeface="微软雅黑" panose="020B0503020204020204" pitchFamily="34" charset="-122"/>
+                        <a:cs typeface="微软雅黑" panose="020B0503020204020204" pitchFamily="34" charset="-122"/>
                       </a:endParaRPr>
                     </a:p>
                   </a:txBody>
-                  <a:tcPr marL="91440" marR="91440" marT="45720" marB="45720" anchor="ctr">
+                  <a:tcPr anchor="ctr">
                     <a:lnL w="9525" cap="flat" cmpd="sng" algn="ctr">
                       <a:solidFill>
                         <a:srgbClr val="D8DBE0"/>
@@ -6882,7 +6763,7 @@
                     <a:bodyPr/>
                     <a:lstStyle/>
                     <a:p>
-                      <a:pPr algn="l" indent="0" marL="0">
+                      <a:pPr marL="0" indent="0" algn="l">
                         <a:buNone/>
                       </a:pPr>
                       <a:r>
@@ -6890,20 +6771,20 @@
                           <a:solidFill>
                             <a:srgbClr val="1F2329"/>
                           </a:solidFill>
-                          <a:latin typeface="微软雅黑" pitchFamily="34" charset="0"/>
-                          <a:ea typeface="微软雅黑" pitchFamily="34" charset="-122"/>
-                          <a:cs typeface="微软雅黑" pitchFamily="34" charset="-120"/>
+                          <a:latin typeface="微软雅黑" panose="020B0503020204020204" pitchFamily="34" charset="-122"/>
+                          <a:ea typeface="微软雅黑" panose="020B0503020204020204" pitchFamily="34" charset="-122"/>
+                          <a:cs typeface="微软雅黑" panose="020B0503020204020204" pitchFamily="34" charset="-120"/>
                         </a:rPr>
                         <a:t>9答28</a:t>
                       </a:r>
                       <a:endParaRPr lang="en-US" sz="1500" dirty="0">
-                        <a:latin typeface="微软雅黑" charset="0"/>
-                        <a:ea typeface="微软雅黑" charset="0"/>
-                        <a:cs typeface="微软雅黑" charset="0"/>
+                        <a:latin typeface="微软雅黑" panose="020B0503020204020204" pitchFamily="34" charset="-122"/>
+                        <a:ea typeface="微软雅黑" panose="020B0503020204020204" pitchFamily="34" charset="-122"/>
+                        <a:cs typeface="微软雅黑" panose="020B0503020204020204" pitchFamily="34" charset="-122"/>
                       </a:endParaRPr>
                     </a:p>
                   </a:txBody>
-                  <a:tcPr marL="91440" marR="91440" marT="45720" marB="45720" anchor="ctr">
+                  <a:tcPr anchor="ctr">
                     <a:lnL w="9525" cap="flat" cmpd="sng" algn="ctr">
                       <a:solidFill>
                         <a:srgbClr val="D8DBE0"/>
@@ -6950,7 +6831,7 @@
                     <a:bodyPr/>
                     <a:lstStyle/>
                     <a:p>
-                      <a:pPr algn="l" indent="0" marL="0">
+                      <a:pPr marL="0" indent="0" algn="l">
                         <a:buNone/>
                       </a:pPr>
                       <a:r>
@@ -6958,20 +6839,20 @@
                           <a:solidFill>
                             <a:srgbClr val="1F2329"/>
                           </a:solidFill>
-                          <a:latin typeface="微软雅黑" pitchFamily="34" charset="0"/>
-                          <a:ea typeface="微软雅黑" pitchFamily="34" charset="-122"/>
-                          <a:cs typeface="微软雅黑" pitchFamily="34" charset="-120"/>
+                          <a:latin typeface="微软雅黑" panose="020B0503020204020204" pitchFamily="34" charset="-122"/>
+                          <a:ea typeface="微软雅黑" panose="020B0503020204020204" pitchFamily="34" charset="-122"/>
+                          <a:cs typeface="微软雅黑" panose="020B0503020204020204" pitchFamily="34" charset="-120"/>
                         </a:rPr>
                         <a:t>两种冲突处理对比</a:t>
                       </a:r>
                       <a:endParaRPr lang="en-US" sz="1500" dirty="0">
-                        <a:latin typeface="微软雅黑" charset="0"/>
-                        <a:ea typeface="微软雅黑" charset="0"/>
-                        <a:cs typeface="微软雅黑" charset="0"/>
+                        <a:latin typeface="微软雅黑" panose="020B0503020204020204" pitchFamily="34" charset="-122"/>
+                        <a:ea typeface="微软雅黑" panose="020B0503020204020204" pitchFamily="34" charset="-122"/>
+                        <a:cs typeface="微软雅黑" panose="020B0503020204020204" pitchFamily="34" charset="-122"/>
                       </a:endParaRPr>
                     </a:p>
                   </a:txBody>
-                  <a:tcPr marL="91440" marR="91440" marT="45720" marB="45720" anchor="ctr">
+                  <a:tcPr anchor="ctr">
                     <a:lnL w="9525" cap="flat" cmpd="sng" algn="ctr">
                       <a:solidFill>
                         <a:srgbClr val="D8DBE0"/>
@@ -7018,7 +6899,7 @@
                     <a:bodyPr/>
                     <a:lstStyle/>
                     <a:p>
-                      <a:pPr algn="l" indent="0" marL="0">
+                      <a:pPr marL="0" indent="0" algn="l">
                         <a:buNone/>
                       </a:pPr>
                       <a:r>
@@ -7026,20 +6907,20 @@
                           <a:solidFill>
                             <a:srgbClr val="1F2329"/>
                           </a:solidFill>
-                          <a:latin typeface="微软雅黑" pitchFamily="34" charset="0"/>
-                          <a:ea typeface="微软雅黑" pitchFamily="34" charset="-122"/>
-                          <a:cs typeface="微软雅黑" pitchFamily="34" charset="-120"/>
+                          <a:latin typeface="微软雅黑" panose="020B0503020204020204" pitchFamily="34" charset="-122"/>
+                          <a:ea typeface="微软雅黑" panose="020B0503020204020204" pitchFamily="34" charset="-122"/>
+                          <a:cs typeface="微软雅黑" panose="020B0503020204020204" pitchFamily="34" charset="-120"/>
                         </a:rPr>
                         <a:t>同关键字建两表对比，2026综合17(1)(2)</a:t>
                       </a:r>
                       <a:endParaRPr lang="en-US" sz="1500" dirty="0">
-                        <a:latin typeface="微软雅黑" charset="0"/>
-                        <a:ea typeface="微软雅黑" charset="0"/>
-                        <a:cs typeface="微软雅黑" charset="0"/>
+                        <a:latin typeface="微软雅黑" panose="020B0503020204020204" pitchFamily="34" charset="-122"/>
+                        <a:ea typeface="微软雅黑" panose="020B0503020204020204" pitchFamily="34" charset="-122"/>
+                        <a:cs typeface="微软雅黑" panose="020B0503020204020204" pitchFamily="34" charset="-122"/>
                       </a:endParaRPr>
                     </a:p>
                   </a:txBody>
-                  <a:tcPr marL="91440" marR="91440" marT="45720" marB="45720" anchor="ctr">
+                  <a:tcPr anchor="ctr">
                     <a:lnL w="9525" cap="flat" cmpd="sng" algn="ctr">
                       <a:solidFill>
                         <a:srgbClr val="D8DBE0"/>
@@ -7088,7 +6969,7 @@
                     <a:bodyPr/>
                     <a:lstStyle/>
                     <a:p>
-                      <a:pPr algn="l" indent="0" marL="0">
+                      <a:pPr marL="0" indent="0" algn="l">
                         <a:buNone/>
                       </a:pPr>
                       <a:r>
@@ -7096,20 +6977,20 @@
                           <a:solidFill>
                             <a:srgbClr val="1F2329"/>
                           </a:solidFill>
-                          <a:latin typeface="微软雅黑" pitchFamily="34" charset="0"/>
-                          <a:ea typeface="微软雅黑" pitchFamily="34" charset="-122"/>
-                          <a:cs typeface="微软雅黑" pitchFamily="34" charset="-120"/>
+                          <a:latin typeface="微软雅黑" panose="020B0503020204020204" pitchFamily="34" charset="-122"/>
+                          <a:ea typeface="微软雅黑" panose="020B0503020204020204" pitchFamily="34" charset="-122"/>
+                          <a:cs typeface="微软雅黑" panose="020B0503020204020204" pitchFamily="34" charset="-120"/>
                         </a:rPr>
                         <a:t>9算1</a:t>
                       </a:r>
                       <a:endParaRPr lang="en-US" sz="1500" dirty="0">
-                        <a:latin typeface="微软雅黑" charset="0"/>
-                        <a:ea typeface="微软雅黑" charset="0"/>
-                        <a:cs typeface="微软雅黑" charset="0"/>
+                        <a:latin typeface="微软雅黑" panose="020B0503020204020204" pitchFamily="34" charset="-122"/>
+                        <a:ea typeface="微软雅黑" panose="020B0503020204020204" pitchFamily="34" charset="-122"/>
+                        <a:cs typeface="微软雅黑" panose="020B0503020204020204" pitchFamily="34" charset="-122"/>
                       </a:endParaRPr>
                     </a:p>
                   </a:txBody>
-                  <a:tcPr marL="91440" marR="91440" marT="45720" marB="45720" anchor="ctr">
+                  <a:tcPr anchor="ctr">
                     <a:lnL w="9525" cap="flat" cmpd="sng" algn="ctr">
                       <a:solidFill>
                         <a:srgbClr val="D8DBE0"/>
@@ -7156,7 +7037,7 @@
                     <a:bodyPr/>
                     <a:lstStyle/>
                     <a:p>
-                      <a:pPr algn="l" indent="0" marL="0">
+                      <a:pPr marL="0" indent="0" algn="l">
                         <a:buNone/>
                       </a:pPr>
                       <a:r>
@@ -7164,20 +7045,20 @@
                           <a:solidFill>
                             <a:srgbClr val="1F2329"/>
                           </a:solidFill>
-                          <a:latin typeface="微软雅黑" pitchFamily="34" charset="0"/>
-                          <a:ea typeface="微软雅黑" pitchFamily="34" charset="-122"/>
-                          <a:cs typeface="微软雅黑" pitchFamily="34" charset="-120"/>
+                          <a:latin typeface="微软雅黑" panose="020B0503020204020204" pitchFamily="34" charset="-122"/>
+                          <a:ea typeface="微软雅黑" panose="020B0503020204020204" pitchFamily="34" charset="-122"/>
+                          <a:cs typeface="微软雅黑" panose="020B0503020204020204" pitchFamily="34" charset="-120"/>
                         </a:rPr>
                         <a:t>哨兵顺序查找</a:t>
                       </a:r>
                       <a:endParaRPr lang="en-US" sz="1500" dirty="0">
-                        <a:latin typeface="微软雅黑" charset="0"/>
-                        <a:ea typeface="微软雅黑" charset="0"/>
-                        <a:cs typeface="微软雅黑" charset="0"/>
+                        <a:latin typeface="微软雅黑" panose="020B0503020204020204" pitchFamily="34" charset="-122"/>
+                        <a:ea typeface="微软雅黑" panose="020B0503020204020204" pitchFamily="34" charset="-122"/>
+                        <a:cs typeface="微软雅黑" panose="020B0503020204020204" pitchFamily="34" charset="-122"/>
                       </a:endParaRPr>
                     </a:p>
                   </a:txBody>
-                  <a:tcPr marL="91440" marR="91440" marT="45720" marB="45720" anchor="ctr">
+                  <a:tcPr anchor="ctr">
                     <a:lnL w="9525" cap="flat" cmpd="sng" algn="ctr">
                       <a:solidFill>
                         <a:srgbClr val="D8DBE0"/>
@@ -7224,7 +7105,7 @@
                     <a:bodyPr/>
                     <a:lstStyle/>
                     <a:p>
-                      <a:pPr algn="l" indent="0" marL="0">
+                      <a:pPr marL="0" indent="0" algn="l">
                         <a:buNone/>
                       </a:pPr>
                       <a:r>
@@ -7232,20 +7113,20 @@
                           <a:solidFill>
                             <a:srgbClr val="1F2329"/>
                           </a:solidFill>
-                          <a:latin typeface="微软雅黑" pitchFamily="34" charset="0"/>
-                          <a:ea typeface="微软雅黑" pitchFamily="34" charset="-122"/>
-                          <a:cs typeface="微软雅黑" pitchFamily="34" charset="-120"/>
+                          <a:latin typeface="微软雅黑" panose="020B0503020204020204" pitchFamily="34" charset="-122"/>
+                          <a:ea typeface="微软雅黑" panose="020B0503020204020204" pitchFamily="34" charset="-122"/>
+                          <a:cs typeface="微软雅黑" panose="020B0503020204020204" pitchFamily="34" charset="-120"/>
                         </a:rPr>
                         <a:t>监视哨改写+判定树+ASL，顺序哨兵法在数据结构强化课大纲内</a:t>
                       </a:r>
                       <a:endParaRPr lang="en-US" sz="1500" dirty="0">
-                        <a:latin typeface="微软雅黑" charset="0"/>
-                        <a:ea typeface="微软雅黑" charset="0"/>
-                        <a:cs typeface="微软雅黑" charset="0"/>
+                        <a:latin typeface="微软雅黑" panose="020B0503020204020204" pitchFamily="34" charset="-122"/>
+                        <a:ea typeface="微软雅黑" panose="020B0503020204020204" pitchFamily="34" charset="-122"/>
+                        <a:cs typeface="微软雅黑" panose="020B0503020204020204" pitchFamily="34" charset="-122"/>
                       </a:endParaRPr>
                     </a:p>
                   </a:txBody>
-                  <a:tcPr marL="91440" marR="91440" marT="45720" marB="45720" anchor="ctr">
+                  <a:tcPr anchor="ctr">
                     <a:lnL w="9525" cap="flat" cmpd="sng" algn="ctr">
                       <a:solidFill>
                         <a:srgbClr val="D8DBE0"/>
@@ -7294,7 +7175,7 @@
                     <a:bodyPr/>
                     <a:lstStyle/>
                     <a:p>
-                      <a:pPr algn="l" indent="0" marL="0">
+                      <a:pPr marL="0" indent="0" algn="l">
                         <a:buNone/>
                       </a:pPr>
                       <a:r>
@@ -7302,20 +7183,20 @@
                           <a:solidFill>
                             <a:srgbClr val="1F2329"/>
                           </a:solidFill>
-                          <a:latin typeface="微软雅黑" pitchFamily="34" charset="0"/>
-                          <a:ea typeface="微软雅黑" pitchFamily="34" charset="-122"/>
-                          <a:cs typeface="微软雅黑" pitchFamily="34" charset="-120"/>
+                          <a:latin typeface="微软雅黑" panose="020B0503020204020204" pitchFamily="34" charset="-122"/>
+                          <a:ea typeface="微软雅黑" panose="020B0503020204020204" pitchFamily="34" charset="-122"/>
+                          <a:cs typeface="微软雅黑" panose="020B0503020204020204" pitchFamily="34" charset="-120"/>
                         </a:rPr>
                         <a:t>9算7</a:t>
                       </a:r>
                       <a:endParaRPr lang="en-US" sz="1500" dirty="0">
-                        <a:latin typeface="微软雅黑" charset="0"/>
-                        <a:ea typeface="微软雅黑" charset="0"/>
-                        <a:cs typeface="微软雅黑" charset="0"/>
+                        <a:latin typeface="微软雅黑" panose="020B0503020204020204" pitchFamily="34" charset="-122"/>
+                        <a:ea typeface="微软雅黑" panose="020B0503020204020204" pitchFamily="34" charset="-122"/>
+                        <a:cs typeface="微软雅黑" panose="020B0503020204020204" pitchFamily="34" charset="-122"/>
                       </a:endParaRPr>
                     </a:p>
                   </a:txBody>
-                  <a:tcPr marL="91440" marR="91440" marT="45720" marB="45720" anchor="ctr">
+                  <a:tcPr anchor="ctr">
                     <a:lnL w="9525" cap="flat" cmpd="sng" algn="ctr">
                       <a:solidFill>
                         <a:srgbClr val="D8DBE0"/>
@@ -7362,7 +7243,7 @@
                     <a:bodyPr/>
                     <a:lstStyle/>
                     <a:p>
-                      <a:pPr algn="l" indent="0" marL="0">
+                      <a:pPr marL="0" indent="0" algn="l">
                         <a:buNone/>
                       </a:pPr>
                       <a:r>
@@ -7370,20 +7251,20 @@
                           <a:solidFill>
                             <a:srgbClr val="1F2329"/>
                           </a:solidFill>
-                          <a:latin typeface="微软雅黑" pitchFamily="34" charset="0"/>
-                          <a:ea typeface="微软雅黑" pitchFamily="34" charset="-122"/>
-                          <a:cs typeface="微软雅黑" pitchFamily="34" charset="-120"/>
+                          <a:latin typeface="微软雅黑" panose="020B0503020204020204" pitchFamily="34" charset="-122"/>
+                          <a:ea typeface="微软雅黑" panose="020B0503020204020204" pitchFamily="34" charset="-122"/>
+                          <a:cs typeface="微软雅黑" panose="020B0503020204020204" pitchFamily="34" charset="-120"/>
                         </a:rPr>
                         <a:t>判BST</a:t>
                       </a:r>
                       <a:endParaRPr lang="en-US" sz="1500" dirty="0">
-                        <a:latin typeface="微软雅黑" charset="0"/>
-                        <a:ea typeface="微软雅黑" charset="0"/>
-                        <a:cs typeface="微软雅黑" charset="0"/>
+                        <a:latin typeface="微软雅黑" panose="020B0503020204020204" pitchFamily="34" charset="-122"/>
+                        <a:ea typeface="微软雅黑" panose="020B0503020204020204" pitchFamily="34" charset="-122"/>
+                        <a:cs typeface="微软雅黑" panose="020B0503020204020204" pitchFamily="34" charset="-122"/>
                       </a:endParaRPr>
                     </a:p>
                   </a:txBody>
-                  <a:tcPr marL="91440" marR="91440" marT="45720" marB="45720" anchor="ctr">
+                  <a:tcPr anchor="ctr">
                     <a:lnL w="9525" cap="flat" cmpd="sng" algn="ctr">
                       <a:solidFill>
                         <a:srgbClr val="D8DBE0"/>
@@ -7430,7 +7311,7 @@
                     <a:bodyPr/>
                     <a:lstStyle/>
                     <a:p>
-                      <a:pPr algn="l" indent="0" marL="0">
+                      <a:pPr marL="0" indent="0" algn="l">
                         <a:buNone/>
                       </a:pPr>
                       <a:r>
@@ -7438,20 +7319,20 @@
                           <a:solidFill>
                             <a:srgbClr val="1F2329"/>
                           </a:solidFill>
-                          <a:latin typeface="微软雅黑" pitchFamily="34" charset="0"/>
-                          <a:ea typeface="微软雅黑" pitchFamily="34" charset="-122"/>
-                          <a:cs typeface="微软雅黑" pitchFamily="34" charset="-120"/>
+                          <a:latin typeface="微软雅黑" panose="020B0503020204020204" pitchFamily="34" charset="-122"/>
+                          <a:ea typeface="微软雅黑" panose="020B0503020204020204" pitchFamily="34" charset="-122"/>
+                          <a:cs typeface="微软雅黑" panose="020B0503020204020204" pitchFamily="34" charset="-120"/>
                         </a:rPr>
                         <a:t>递归判二叉排序树，2024算法设计1原题（递归三件套+范围）</a:t>
                       </a:r>
                       <a:endParaRPr lang="en-US" sz="1500" dirty="0">
-                        <a:latin typeface="微软雅黑" charset="0"/>
-                        <a:ea typeface="微软雅黑" charset="0"/>
-                        <a:cs typeface="微软雅黑" charset="0"/>
+                        <a:latin typeface="微软雅黑" panose="020B0503020204020204" pitchFamily="34" charset="-122"/>
+                        <a:ea typeface="微软雅黑" panose="020B0503020204020204" pitchFamily="34" charset="-122"/>
+                        <a:cs typeface="微软雅黑" panose="020B0503020204020204" pitchFamily="34" charset="-122"/>
                       </a:endParaRPr>
                     </a:p>
                   </a:txBody>
-                  <a:tcPr marL="91440" marR="91440" marT="45720" marB="45720" anchor="ctr">
+                  <a:tcPr anchor="ctr">
                     <a:lnL w="9525" cap="flat" cmpd="sng" algn="ctr">
                       <a:solidFill>
                         <a:srgbClr val="D8DBE0"/>
@@ -7508,7 +7389,7 @@
 
 <file path=ppt/slides/slide6.xml><?xml version="1.0" encoding="utf-8"?>
 <p:sld xmlns:a="http://schemas.openxmlformats.org/drawingml/2006/main" xmlns:r="http://schemas.openxmlformats.org/officeDocument/2006/relationships" xmlns:p="http://schemas.openxmlformats.org/presentationml/2006/main">
-  <p:cSld name="Slide 6">
+  <p:cSld>
     <p:bg>
       <p:bgPr>
         <a:blipFill dpi="0" rotWithShape="1">
@@ -7552,13 +7433,12 @@
             <a:avLst/>
           </a:prstGeom>
           <a:noFill/>
-          <a:ln/>
         </p:spPr>
         <p:txBody>
           <a:bodyPr wrap="square" rtlCol="0" anchor="ctr"/>
           <a:lstStyle/>
           <a:p>
-            <a:pPr algn="r" indent="0" marL="0">
+            <a:pPr marL="0" indent="0" algn="r">
               <a:buNone/>
             </a:pPr>
             <a:r>
@@ -7566,11 +7446,11 @@
                 <a:solidFill>
                   <a:srgbClr val="8A9099"/>
                 </a:solidFill>
-                <a:latin typeface="微软雅黑" pitchFamily="34" charset="0"/>
-                <a:ea typeface="微软雅黑" pitchFamily="34" charset="-122"/>
-                <a:cs typeface="微软雅黑" pitchFamily="34" charset="-120"/>
+                <a:latin typeface="微软雅黑" panose="020B0503020204020204" pitchFamily="34" charset="-122"/>
+                <a:ea typeface="微软雅黑" panose="020B0503020204020204" pitchFamily="34" charset="-122"/>
+                <a:cs typeface="微软雅黑" panose="020B0503020204020204" pitchFamily="34" charset="-120"/>
               </a:rPr>
-              <a:t>6 / 8</a:t>
+              <a:t>7 / 8</a:t>
             </a:r>
             <a:endParaRPr lang="en-US" sz="1000" dirty="0"/>
           </a:p>
@@ -7591,13 +7471,12 @@
             <a:avLst/>
           </a:prstGeom>
           <a:noFill/>
-          <a:ln/>
         </p:spPr>
         <p:txBody>
           <a:bodyPr wrap="square" rtlCol="0" anchor="ctr"/>
           <a:lstStyle/>
           <a:p>
-            <a:pPr algn="l" indent="0" marL="0">
+            <a:pPr marL="0" indent="0" algn="l">
               <a:buNone/>
             </a:pPr>
             <a:r>
@@ -7605,11 +7484,11 @@
                 <a:solidFill>
                   <a:srgbClr val="1F4E9C"/>
                 </a:solidFill>
-                <a:latin typeface="微软雅黑" pitchFamily="34" charset="0"/>
-                <a:ea typeface="微软雅黑" pitchFamily="34" charset="-122"/>
-                <a:cs typeface="微软雅黑" pitchFamily="34" charset="-120"/>
+                <a:latin typeface="微软雅黑" panose="020B0503020204020204" pitchFamily="34" charset="-122"/>
+                <a:ea typeface="微软雅黑" panose="020B0503020204020204" pitchFamily="34" charset="-122"/>
+                <a:cs typeface="微软雅黑" panose="020B0503020204020204" pitchFamily="34" charset="-120"/>
               </a:rPr>
-              <a:t>可做可不做</a:t>
+              <a:t>完全不做</a:t>
             </a:r>
             <a:endParaRPr lang="en-US" sz="1400" dirty="0"/>
           </a:p>
@@ -7630,13 +7509,12 @@
             <a:avLst/>
           </a:prstGeom>
           <a:noFill/>
-          <a:ln/>
         </p:spPr>
         <p:txBody>
           <a:bodyPr wrap="square" rtlCol="0" anchor="ctr"/>
           <a:lstStyle/>
           <a:p>
-            <a:pPr algn="l" indent="0" marL="0">
+            <a:pPr marL="0" indent="0" algn="l">
               <a:buNone/>
             </a:pPr>
             <a:r>
@@ -7644,11 +7522,11 @@
                 <a:solidFill>
                   <a:srgbClr val="1F2329"/>
                 </a:solidFill>
-                <a:latin typeface="微软雅黑" pitchFamily="34" charset="0"/>
-                <a:ea typeface="微软雅黑" pitchFamily="34" charset="-122"/>
-                <a:cs typeface="微软雅黑" pitchFamily="34" charset="-120"/>
+                <a:latin typeface="微软雅黑" panose="020B0503020204020204" pitchFamily="34" charset="-122"/>
+                <a:ea typeface="微软雅黑" panose="020B0503020204020204" pitchFamily="34" charset="-122"/>
+                <a:cs typeface="微软雅黑" panose="020B0503020204020204" pitchFamily="34" charset="-120"/>
               </a:rPr>
-              <a:t>可做可不做清单</a:t>
+              <a:t>完全不做清单</a:t>
             </a:r>
             <a:endParaRPr lang="en-US" sz="2800" dirty="0"/>
           </a:p>
@@ -7656,21 +7534,15 @@
       </p:sp>
       <p:graphicFrame>
         <p:nvGraphicFramePr>
-          <p:cNvPr id="7" name="Table 0"/>
+          <p:cNvPr id="8" name="Table 0"/>
           <p:cNvGraphicFramePr>
             <a:graphicFrameLocks noGrp="1"/>
           </p:cNvGraphicFramePr>
-          <p:nvPr>
-            <p:extLst>
-              <p:ext uri="{D42A27DB-BD31-4B8C-83A1-F6EECF244321}">
-                <p14:modId xmlns:p14="http://schemas.microsoft.com/office/powerpoint/2010/main" val="1579011935"/>
-              </p:ext>
-            </p:extLst>
-          </p:nvPr>
+          <p:nvPr/>
         </p:nvGraphicFramePr>
         <p:xfrm>
           <a:off x="822960" y="2395728"/>
-          <a:ext cx="10545775" cy="914400"/>
+          <a:ext cx="10545775" cy="2944368"/>
         </p:xfrm>
         <a:graphic>
           <a:graphicData uri="http://schemas.openxmlformats.org/drawingml/2006/table">
@@ -7686,7 +7558,7 @@
                     <a:bodyPr/>
                     <a:lstStyle/>
                     <a:p>
-                      <a:pPr algn="l" indent="0" marL="0">
+                      <a:pPr marL="0" indent="0" algn="l">
                         <a:buNone/>
                       </a:pPr>
                       <a:r>
@@ -7694,20 +7566,20 @@
                           <a:solidFill>
                             <a:srgbClr val="1F4E9C"/>
                           </a:solidFill>
-                          <a:latin typeface="微软雅黑" pitchFamily="34" charset="0"/>
-                          <a:ea typeface="微软雅黑" pitchFamily="34" charset="-122"/>
-                          <a:cs typeface="微软雅黑" pitchFamily="34" charset="-120"/>
+                          <a:latin typeface="微软雅黑" panose="020B0503020204020204" pitchFamily="34" charset="-122"/>
+                          <a:ea typeface="微软雅黑" panose="020B0503020204020204" pitchFamily="34" charset="-122"/>
+                          <a:cs typeface="微软雅黑" panose="020B0503020204020204" pitchFamily="34" charset="-120"/>
                         </a:rPr>
-                        <a:t>分组</a:t>
+                        <a:t>内容</a:t>
                       </a:r>
                       <a:endParaRPr lang="en-US" sz="1500" dirty="0">
-                        <a:latin typeface="微软雅黑" charset="0"/>
-                        <a:ea typeface="微软雅黑" charset="0"/>
-                        <a:cs typeface="微软雅黑" charset="0"/>
+                        <a:latin typeface="微软雅黑" panose="020B0503020204020204" pitchFamily="34" charset="-122"/>
+                        <a:ea typeface="微软雅黑" panose="020B0503020204020204" pitchFamily="34" charset="-122"/>
+                        <a:cs typeface="微软雅黑" panose="020B0503020204020204" pitchFamily="34" charset="-122"/>
                       </a:endParaRPr>
                     </a:p>
                   </a:txBody>
-                  <a:tcPr marL="91440" marR="91440" marT="45720" marB="45720" anchor="ctr">
+                  <a:tcPr anchor="ctr">
                     <a:lnL w="9525" cap="flat" cmpd="sng" algn="ctr">
                       <a:solidFill>
                         <a:srgbClr val="D8DBE0"/>
@@ -7754,7 +7626,7 @@
                     <a:bodyPr/>
                     <a:lstStyle/>
                     <a:p>
-                      <a:pPr algn="l" indent="0" marL="0">
+                      <a:pPr marL="0" indent="0" algn="l">
                         <a:buNone/>
                       </a:pPr>
                       <a:r>
@@ -7762,20 +7634,20 @@
                           <a:solidFill>
                             <a:srgbClr val="1F4E9C"/>
                           </a:solidFill>
-                          <a:latin typeface="微软雅黑" pitchFamily="34" charset="0"/>
-                          <a:ea typeface="微软雅黑" pitchFamily="34" charset="-122"/>
-                          <a:cs typeface="微软雅黑" pitchFamily="34" charset="-120"/>
+                          <a:latin typeface="微软雅黑" panose="020B0503020204020204" pitchFamily="34" charset="-122"/>
+                          <a:ea typeface="微软雅黑" panose="020B0503020204020204" pitchFamily="34" charset="-122"/>
+                          <a:cs typeface="微软雅黑" panose="020B0503020204020204" pitchFamily="34" charset="-120"/>
                         </a:rPr>
                         <a:t>题号</a:t>
                       </a:r>
                       <a:endParaRPr lang="en-US" sz="1500" dirty="0">
-                        <a:latin typeface="微软雅黑" charset="0"/>
-                        <a:ea typeface="微软雅黑" charset="0"/>
-                        <a:cs typeface="微软雅黑" charset="0"/>
+                        <a:latin typeface="微软雅黑" panose="020B0503020204020204" pitchFamily="34" charset="-122"/>
+                        <a:ea typeface="微软雅黑" panose="020B0503020204020204" pitchFamily="34" charset="-122"/>
+                        <a:cs typeface="微软雅黑" panose="020B0503020204020204" pitchFamily="34" charset="-122"/>
                       </a:endParaRPr>
                     </a:p>
                   </a:txBody>
-                  <a:tcPr marL="91440" marR="91440" marT="45720" marB="45720" anchor="ctr">
+                  <a:tcPr anchor="ctr">
                     <a:lnL w="9525" cap="flat" cmpd="sng" algn="ctr">
                       <a:solidFill>
                         <a:srgbClr val="D8DBE0"/>
@@ -7824,7 +7696,7 @@
                     <a:bodyPr/>
                     <a:lstStyle/>
                     <a:p>
-                      <a:pPr algn="l" indent="0" marL="0">
+                      <a:pPr marL="0" indent="0" algn="l">
                         <a:buNone/>
                       </a:pPr>
                       <a:r>
@@ -7832,20 +7704,20 @@
                           <a:solidFill>
                             <a:srgbClr val="1F2329"/>
                           </a:solidFill>
-                          <a:latin typeface="微软雅黑" pitchFamily="34" charset="0"/>
-                          <a:ea typeface="微软雅黑" pitchFamily="34" charset="-122"/>
-                          <a:cs typeface="微软雅黑" pitchFamily="34" charset="-120"/>
+                          <a:latin typeface="微软雅黑" panose="020B0503020204020204" pitchFamily="34" charset="-122"/>
+                          <a:ea typeface="微软雅黑" panose="020B0503020204020204" pitchFamily="34" charset="-122"/>
+                          <a:cs typeface="微软雅黑" panose="020B0503020204020204" pitchFamily="34" charset="-120"/>
                         </a:rPr>
-                        <a:t>选择题：查找概念巩固（顺序/折半条件、BST…</a:t>
+                        <a:t>红黑树</a:t>
                       </a:r>
                       <a:endParaRPr lang="en-US" sz="1500" dirty="0">
-                        <a:latin typeface="微软雅黑" charset="0"/>
-                        <a:ea typeface="微软雅黑" charset="0"/>
-                        <a:cs typeface="微软雅黑" charset="0"/>
+                        <a:latin typeface="微软雅黑" panose="020B0503020204020204" pitchFamily="34" charset="-122"/>
+                        <a:ea typeface="微软雅黑" panose="020B0503020204020204" pitchFamily="34" charset="-122"/>
+                        <a:cs typeface="微软雅黑" panose="020B0503020204020204" pitchFamily="34" charset="-122"/>
                       </a:endParaRPr>
                     </a:p>
                   </a:txBody>
-                  <a:tcPr marL="91440" marR="91440" marT="45720" marB="45720" anchor="ctr">
+                  <a:tcPr anchor="ctr">
                     <a:lnL w="9525" cap="flat" cmpd="sng" algn="ctr">
                       <a:solidFill>
                         <a:srgbClr val="D8DBE0"/>
@@ -7892,7 +7764,7 @@
                     <a:bodyPr/>
                     <a:lstStyle/>
                     <a:p>
-                      <a:pPr algn="l" indent="0" marL="0">
+                      <a:pPr marL="0" indent="0" algn="l">
                         <a:buNone/>
                       </a:pPr>
                       <a:r>
@@ -7900,20 +7772,20 @@
                           <a:solidFill>
                             <a:srgbClr val="1F2329"/>
                           </a:solidFill>
-                          <a:latin typeface="微软雅黑" pitchFamily="34" charset="0"/>
-                          <a:ea typeface="微软雅黑" pitchFamily="34" charset="-122"/>
-                          <a:cs typeface="微软雅黑" pitchFamily="34" charset="-120"/>
+                          <a:latin typeface="微软雅黑" panose="020B0503020204020204" pitchFamily="34" charset="-122"/>
+                          <a:ea typeface="微软雅黑" panose="020B0503020204020204" pitchFamily="34" charset="-122"/>
+                          <a:cs typeface="微软雅黑" panose="020B0503020204020204" pitchFamily="34" charset="-120"/>
                         </a:rPr>
-                        <a:t>选1、3、5、6、8、9、11、13、15—19…</a:t>
+                        <a:t>选35—40；答12—15；算17、18</a:t>
                       </a:r>
                       <a:endParaRPr lang="en-US" sz="1500" dirty="0">
-                        <a:latin typeface="微软雅黑" charset="0"/>
-                        <a:ea typeface="微软雅黑" charset="0"/>
-                        <a:cs typeface="微软雅黑" charset="0"/>
+                        <a:latin typeface="微软雅黑" panose="020B0503020204020204" pitchFamily="34" charset="-122"/>
+                        <a:ea typeface="微软雅黑" panose="020B0503020204020204" pitchFamily="34" charset="-122"/>
+                        <a:cs typeface="微软雅黑" panose="020B0503020204020204" pitchFamily="34" charset="-122"/>
                       </a:endParaRPr>
                     </a:p>
                   </a:txBody>
-                  <a:tcPr marL="91440" marR="91440" marT="45720" marB="45720" anchor="ctr">
+                  <a:tcPr anchor="ctr">
                     <a:lnL w="9525" cap="flat" cmpd="sng" algn="ctr">
                       <a:solidFill>
                         <a:srgbClr val="D8DBE0"/>
@@ -7962,7 +7834,7 @@
                     <a:bodyPr/>
                     <a:lstStyle/>
                     <a:p>
-                      <a:pPr algn="l" indent="0" marL="0">
+                      <a:pPr marL="0" indent="0" algn="l">
                         <a:buNone/>
                       </a:pPr>
                       <a:r>
@@ -7970,20 +7842,20 @@
                           <a:solidFill>
                             <a:srgbClr val="1F2329"/>
                           </a:solidFill>
-                          <a:latin typeface="微软雅黑" pitchFamily="34" charset="0"/>
-                          <a:ea typeface="微软雅黑" pitchFamily="34" charset="-122"/>
-                          <a:cs typeface="微软雅黑" pitchFamily="34" charset="-120"/>
+                          <a:latin typeface="微软雅黑" panose="020B0503020204020204" pitchFamily="34" charset="-122"/>
+                          <a:ea typeface="微软雅黑" panose="020B0503020204020204" pitchFamily="34" charset="-122"/>
+                          <a:cs typeface="微软雅黑" panose="020B0503020204020204" pitchFamily="34" charset="-120"/>
                         </a:rPr>
-                        <a:t>（续）</a:t>
+                        <a:t>跳跃表</a:t>
                       </a:r>
                       <a:endParaRPr lang="en-US" sz="1500" dirty="0">
-                        <a:latin typeface="微软雅黑" charset="0"/>
-                        <a:ea typeface="微软雅黑" charset="0"/>
-                        <a:cs typeface="微软雅黑" charset="0"/>
+                        <a:latin typeface="微软雅黑" panose="020B0503020204020204" pitchFamily="34" charset="-122"/>
+                        <a:ea typeface="微软雅黑" panose="020B0503020204020204" pitchFamily="34" charset="-122"/>
+                        <a:cs typeface="微软雅黑" panose="020B0503020204020204" pitchFamily="34" charset="-122"/>
                       </a:endParaRPr>
                     </a:p>
                   </a:txBody>
-                  <a:tcPr marL="91440" marR="91440" marT="45720" marB="45720" anchor="ctr">
+                  <a:tcPr anchor="ctr">
                     <a:lnL w="9525" cap="flat" cmpd="sng" algn="ctr">
                       <a:solidFill>
                         <a:srgbClr val="D8DBE0"/>
@@ -8030,7 +7902,7 @@
                     <a:bodyPr/>
                     <a:lstStyle/>
                     <a:p>
-                      <a:pPr algn="l" indent="0" marL="0">
+                      <a:pPr marL="0" indent="0" algn="l">
                         <a:buNone/>
                       </a:pPr>
                       <a:r>
@@ -8038,20 +7910,20 @@
                           <a:solidFill>
                             <a:srgbClr val="1F2329"/>
                           </a:solidFill>
-                          <a:latin typeface="微软雅黑" pitchFamily="34" charset="0"/>
-                          <a:ea typeface="微软雅黑" pitchFamily="34" charset="-122"/>
-                          <a:cs typeface="微软雅黑" pitchFamily="34" charset="-120"/>
+                          <a:latin typeface="微软雅黑" panose="020B0503020204020204" pitchFamily="34" charset="-122"/>
+                          <a:ea typeface="微软雅黑" panose="020B0503020204020204" pitchFamily="34" charset="-122"/>
+                          <a:cs typeface="微软雅黑" panose="020B0503020204020204" pitchFamily="34" charset="-120"/>
                         </a:rPr>
-                        <a:t>21—34、41—53、64—67、69—71</a:t>
+                        <a:t>选54—58；答22—24；算21—24</a:t>
                       </a:r>
                       <a:endParaRPr lang="en-US" sz="1500" dirty="0">
-                        <a:latin typeface="微软雅黑" charset="0"/>
-                        <a:ea typeface="微软雅黑" charset="0"/>
-                        <a:cs typeface="微软雅黑" charset="0"/>
+                        <a:latin typeface="微软雅黑" panose="020B0503020204020204" pitchFamily="34" charset="-122"/>
+                        <a:ea typeface="微软雅黑" panose="020B0503020204020204" pitchFamily="34" charset="-122"/>
+                        <a:cs typeface="微软雅黑" panose="020B0503020204020204" pitchFamily="34" charset="-122"/>
                       </a:endParaRPr>
                     </a:p>
                   </a:txBody>
-                  <a:tcPr marL="91440" marR="91440" marT="45720" marB="45720" anchor="ctr">
+                  <a:tcPr anchor="ctr">
                     <a:lnL w="9525" cap="flat" cmpd="sng" algn="ctr">
                       <a:solidFill>
                         <a:srgbClr val="D8DBE0"/>
@@ -8100,7 +7972,7 @@
                     <a:bodyPr/>
                     <a:lstStyle/>
                     <a:p>
-                      <a:pPr algn="l" indent="0" marL="0">
+                      <a:pPr marL="0" indent="0" algn="l">
                         <a:buNone/>
                       </a:pPr>
                       <a:r>
@@ -8108,20 +7980,20 @@
                           <a:solidFill>
                             <a:srgbClr val="1F2329"/>
                           </a:solidFill>
-                          <a:latin typeface="微软雅黑" pitchFamily="34" charset="0"/>
-                          <a:ea typeface="微软雅黑" pitchFamily="34" charset="-122"/>
-                          <a:cs typeface="微软雅黑" pitchFamily="34" charset="-120"/>
+                          <a:latin typeface="微软雅黑" panose="020B0503020204020204" pitchFamily="34" charset="-122"/>
+                          <a:ea typeface="微软雅黑" panose="020B0503020204020204" pitchFamily="34" charset="-122"/>
+                          <a:cs typeface="微软雅黑" panose="020B0503020204020204" pitchFamily="34" charset="-120"/>
                         </a:rPr>
-                        <a:t>解答题：查找域内巩固（顺序表ASL讨论、递归…</a:t>
+                        <a:t>Trie树</a:t>
                       </a:r>
                       <a:endParaRPr lang="en-US" sz="1500" dirty="0">
-                        <a:latin typeface="微软雅黑" charset="0"/>
-                        <a:ea typeface="微软雅黑" charset="0"/>
-                        <a:cs typeface="微软雅黑" charset="0"/>
+                        <a:latin typeface="微软雅黑" panose="020B0503020204020204" pitchFamily="34" charset="-122"/>
+                        <a:ea typeface="微软雅黑" panose="020B0503020204020204" pitchFamily="34" charset="-122"/>
+                        <a:cs typeface="微软雅黑" panose="020B0503020204020204" pitchFamily="34" charset="-122"/>
                       </a:endParaRPr>
                     </a:p>
                   </a:txBody>
-                  <a:tcPr marL="91440" marR="91440" marT="45720" marB="45720" anchor="ctr">
+                  <a:tcPr anchor="ctr">
                     <a:lnL w="9525" cap="flat" cmpd="sng" algn="ctr">
                       <a:solidFill>
                         <a:srgbClr val="D8DBE0"/>
@@ -8168,7 +8040,7 @@
                     <a:bodyPr/>
                     <a:lstStyle/>
                     <a:p>
-                      <a:pPr algn="l" indent="0" marL="0">
+                      <a:pPr marL="0" indent="0" algn="l">
                         <a:buNone/>
                       </a:pPr>
                       <a:r>
@@ -8176,20 +8048,20 @@
                           <a:solidFill>
                             <a:srgbClr val="1F2329"/>
                           </a:solidFill>
-                          <a:latin typeface="微软雅黑" pitchFamily="34" charset="0"/>
-                          <a:ea typeface="微软雅黑" pitchFamily="34" charset="-122"/>
-                          <a:cs typeface="微软雅黑" pitchFamily="34" charset="-120"/>
+                          <a:latin typeface="微软雅黑" panose="020B0503020204020204" pitchFamily="34" charset="-122"/>
+                          <a:ea typeface="微软雅黑" panose="020B0503020204020204" pitchFamily="34" charset="-122"/>
+                          <a:cs typeface="微软雅黑" panose="020B0503020204020204" pitchFamily="34" charset="-120"/>
                         </a:rPr>
-                        <a:t>答1、4—7、10、11、16—21、29—31</a:t>
+                        <a:t>选59—63；答25；算25、26</a:t>
                       </a:r>
                       <a:endParaRPr lang="en-US" sz="1500" dirty="0">
-                        <a:latin typeface="微软雅黑" charset="0"/>
-                        <a:ea typeface="微软雅黑" charset="0"/>
-                        <a:cs typeface="微软雅黑" charset="0"/>
+                        <a:latin typeface="微软雅黑" panose="020B0503020204020204" pitchFamily="34" charset="-122"/>
+                        <a:ea typeface="微软雅黑" panose="020B0503020204020204" pitchFamily="34" charset="-122"/>
+                        <a:cs typeface="微软雅黑" panose="020B0503020204020204" pitchFamily="34" charset="-122"/>
                       </a:endParaRPr>
                     </a:p>
                   </a:txBody>
-                  <a:tcPr marL="91440" marR="91440" marT="45720" marB="45720" anchor="ctr">
+                  <a:tcPr anchor="ctr">
                     <a:lnL w="9525" cap="flat" cmpd="sng" algn="ctr">
                       <a:solidFill>
                         <a:srgbClr val="D8DBE0"/>
@@ -8238,7 +8110,7 @@
                     <a:bodyPr/>
                     <a:lstStyle/>
                     <a:p>
-                      <a:pPr algn="l" indent="0" marL="0">
+                      <a:pPr marL="0" indent="0" algn="l">
                         <a:buNone/>
                       </a:pPr>
                       <a:r>
@@ -8246,20 +8118,20 @@
                           <a:solidFill>
                             <a:srgbClr val="1F2329"/>
                           </a:solidFill>
-                          <a:latin typeface="微软雅黑" pitchFamily="34" charset="0"/>
-                          <a:ea typeface="微软雅黑" pitchFamily="34" charset="-122"/>
-                          <a:cs typeface="微软雅黑" pitchFamily="34" charset="-120"/>
+                          <a:latin typeface="微软雅黑" panose="020B0503020204020204" pitchFamily="34" charset="-122"/>
+                          <a:ea typeface="微软雅黑" panose="020B0503020204020204" pitchFamily="34" charset="-122"/>
+                          <a:cs typeface="微软雅黑" panose="020B0503020204020204" pitchFamily="34" charset="-120"/>
                         </a:rPr>
-                        <a:t>算法设计题：查找域内代码巩固（折半改写、分块…</a:t>
+                        <a:t>布隆过滤器</a:t>
                       </a:r>
                       <a:endParaRPr lang="en-US" sz="1500" dirty="0">
-                        <a:latin typeface="微软雅黑" charset="0"/>
-                        <a:ea typeface="微软雅黑" charset="0"/>
-                        <a:cs typeface="微软雅黑" charset="0"/>
+                        <a:latin typeface="微软雅黑" panose="020B0503020204020204" pitchFamily="34" charset="-122"/>
+                        <a:ea typeface="微软雅黑" panose="020B0503020204020204" pitchFamily="34" charset="-122"/>
+                        <a:cs typeface="微软雅黑" panose="020B0503020204020204" pitchFamily="34" charset="-122"/>
                       </a:endParaRPr>
                     </a:p>
                   </a:txBody>
-                  <a:tcPr marL="91440" marR="91440" marT="45720" marB="45720" anchor="ctr">
+                  <a:tcPr anchor="ctr">
                     <a:lnL w="9525" cap="flat" cmpd="sng" algn="ctr">
                       <a:solidFill>
                         <a:srgbClr val="D8DBE0"/>
@@ -8306,7 +8178,7 @@
                     <a:bodyPr/>
                     <a:lstStyle/>
                     <a:p>
-                      <a:pPr algn="l" indent="0" marL="0">
+                      <a:pPr marL="0" indent="0" algn="l">
                         <a:buNone/>
                       </a:pPr>
                       <a:r>
@@ -8314,20 +8186,296 @@
                           <a:solidFill>
                             <a:srgbClr val="1F2329"/>
                           </a:solidFill>
-                          <a:latin typeface="微软雅黑" pitchFamily="34" charset="0"/>
-                          <a:ea typeface="微软雅黑" pitchFamily="34" charset="-122"/>
-                          <a:cs typeface="微软雅黑" pitchFamily="34" charset="-120"/>
+                          <a:latin typeface="微软雅黑" panose="020B0503020204020204" pitchFamily="34" charset="-122"/>
+                          <a:ea typeface="微软雅黑" panose="020B0503020204020204" pitchFamily="34" charset="-122"/>
+                          <a:cs typeface="微软雅黑" panose="020B0503020204020204" pitchFamily="34" charset="-120"/>
                         </a:rPr>
-                        <a:t>算2—4、8—16、19、20、27—29</a:t>
+                        <a:t>选72—75；答32、33；算30</a:t>
                       </a:r>
                       <a:endParaRPr lang="en-US" sz="1500" dirty="0">
-                        <a:latin typeface="微软雅黑" charset="0"/>
-                        <a:ea typeface="微软雅黑" charset="0"/>
-                        <a:cs typeface="微软雅黑" charset="0"/>
+                        <a:latin typeface="微软雅黑" panose="020B0503020204020204" pitchFamily="34" charset="-122"/>
+                        <a:ea typeface="微软雅黑" panose="020B0503020204020204" pitchFamily="34" charset="-122"/>
+                        <a:cs typeface="微软雅黑" panose="020B0503020204020204" pitchFamily="34" charset="-122"/>
                       </a:endParaRPr>
                     </a:p>
                   </a:txBody>
-                  <a:tcPr marL="91440" marR="91440" marT="45720" marB="45720" anchor="ctr">
+                  <a:tcPr anchor="ctr">
+                    <a:lnL w="9525" cap="flat" cmpd="sng" algn="ctr">
+                      <a:solidFill>
+                        <a:srgbClr val="D8DBE0"/>
+                      </a:solidFill>
+                      <a:prstDash val="solid"/>
+                      <a:round/>
+                      <a:headEnd type="none" w="med" len="med"/>
+                      <a:tailEnd type="none" w="med" len="med"/>
+                    </a:lnL>
+                    <a:lnR w="9525" cap="flat" cmpd="sng" algn="ctr">
+                      <a:solidFill>
+                        <a:srgbClr val="D8DBE0"/>
+                      </a:solidFill>
+                      <a:prstDash val="solid"/>
+                      <a:round/>
+                      <a:headEnd type="none" w="med" len="med"/>
+                      <a:tailEnd type="none" w="med" len="med"/>
+                    </a:lnR>
+                    <a:lnT w="9525" cap="flat" cmpd="sng" algn="ctr">
+                      <a:solidFill>
+                        <a:srgbClr val="D8DBE0"/>
+                      </a:solidFill>
+                      <a:prstDash val="solid"/>
+                      <a:round/>
+                      <a:headEnd type="none" w="med" len="med"/>
+                      <a:tailEnd type="none" w="med" len="med"/>
+                    </a:lnT>
+                    <a:lnB w="9525" cap="flat" cmpd="sng" algn="ctr">
+                      <a:solidFill>
+                        <a:srgbClr val="D8DBE0"/>
+                      </a:solidFill>
+                      <a:prstDash val="solid"/>
+                      <a:round/>
+                      <a:headEnd type="none" w="med" len="med"/>
+                      <a:tailEnd type="none" w="med" len="med"/>
+                    </a:lnB>
+                    <a:solidFill>
+                      <a:srgbClr val="FFFFFF"/>
+                    </a:solidFill>
+                  </a:tcPr>
+                </a:tc>
+              </a:tr>
+              <a:tr h="420624">
+                <a:tc>
+                  <a:txBody>
+                    <a:bodyPr/>
+                    <a:lstStyle/>
+                    <a:p>
+                      <a:pPr marL="0" indent="0" algn="l">
+                        <a:buNone/>
+                      </a:pPr>
+                      <a:r>
+                        <a:rPr lang="en-US" sz="1500" dirty="0">
+                          <a:solidFill>
+                            <a:srgbClr val="1F2329"/>
+                          </a:solidFill>
+                          <a:latin typeface="微软雅黑" panose="020B0503020204020204" pitchFamily="34" charset="-122"/>
+                          <a:ea typeface="微软雅黑" panose="020B0503020204020204" pitchFamily="34" charset="-122"/>
+                          <a:cs typeface="微软雅黑" panose="020B0503020204020204" pitchFamily="34" charset="-120"/>
+                        </a:rPr>
+                        <a:t>次优查找树</a:t>
+                      </a:r>
+                      <a:endParaRPr lang="en-US" sz="1500" dirty="0">
+                        <a:latin typeface="微软雅黑" panose="020B0503020204020204" pitchFamily="34" charset="-122"/>
+                        <a:ea typeface="微软雅黑" panose="020B0503020204020204" pitchFamily="34" charset="-122"/>
+                        <a:cs typeface="微软雅黑" panose="020B0503020204020204" pitchFamily="34" charset="-122"/>
+                      </a:endParaRPr>
+                    </a:p>
+                  </a:txBody>
+                  <a:tcPr anchor="ctr">
+                    <a:lnL w="9525" cap="flat" cmpd="sng" algn="ctr">
+                      <a:solidFill>
+                        <a:srgbClr val="D8DBE0"/>
+                      </a:solidFill>
+                      <a:prstDash val="solid"/>
+                      <a:round/>
+                      <a:headEnd type="none" w="med" len="med"/>
+                      <a:tailEnd type="none" w="med" len="med"/>
+                    </a:lnL>
+                    <a:lnR w="9525" cap="flat" cmpd="sng" algn="ctr">
+                      <a:solidFill>
+                        <a:srgbClr val="D8DBE0"/>
+                      </a:solidFill>
+                      <a:prstDash val="solid"/>
+                      <a:round/>
+                      <a:headEnd type="none" w="med" len="med"/>
+                      <a:tailEnd type="none" w="med" len="med"/>
+                    </a:lnR>
+                    <a:lnT w="9525" cap="flat" cmpd="sng" algn="ctr">
+                      <a:solidFill>
+                        <a:srgbClr val="D8DBE0"/>
+                      </a:solidFill>
+                      <a:prstDash val="solid"/>
+                      <a:round/>
+                      <a:headEnd type="none" w="med" len="med"/>
+                      <a:tailEnd type="none" w="med" len="med"/>
+                    </a:lnT>
+                    <a:lnB w="9525" cap="flat" cmpd="sng" algn="ctr">
+                      <a:solidFill>
+                        <a:srgbClr val="D8DBE0"/>
+                      </a:solidFill>
+                      <a:prstDash val="solid"/>
+                      <a:round/>
+                      <a:headEnd type="none" w="med" len="med"/>
+                      <a:tailEnd type="none" w="med" len="med"/>
+                    </a:lnB>
+                    <a:solidFill>
+                      <a:srgbClr val="FFFFFF"/>
+                    </a:solidFill>
+                  </a:tcPr>
+                </a:tc>
+                <a:tc>
+                  <a:txBody>
+                    <a:bodyPr/>
+                    <a:lstStyle/>
+                    <a:p>
+                      <a:pPr marL="0" indent="0" algn="l">
+                        <a:buNone/>
+                      </a:pPr>
+                      <a:r>
+                        <a:rPr lang="en-US" sz="1500" dirty="0">
+                          <a:solidFill>
+                            <a:srgbClr val="1F2329"/>
+                          </a:solidFill>
+                          <a:latin typeface="微软雅黑" panose="020B0503020204020204" pitchFamily="34" charset="-122"/>
+                          <a:ea typeface="微软雅黑" panose="020B0503020204020204" pitchFamily="34" charset="-122"/>
+                          <a:cs typeface="微软雅黑" panose="020B0503020204020204" pitchFamily="34" charset="-120"/>
+                        </a:rPr>
+                        <a:t>答8</a:t>
+                      </a:r>
+                      <a:endParaRPr lang="en-US" sz="1500" dirty="0">
+                        <a:latin typeface="微软雅黑" panose="020B0503020204020204" pitchFamily="34" charset="-122"/>
+                        <a:ea typeface="微软雅黑" panose="020B0503020204020204" pitchFamily="34" charset="-122"/>
+                        <a:cs typeface="微软雅黑" panose="020B0503020204020204" pitchFamily="34" charset="-122"/>
+                      </a:endParaRPr>
+                    </a:p>
+                  </a:txBody>
+                  <a:tcPr anchor="ctr">
+                    <a:lnL w="9525" cap="flat" cmpd="sng" algn="ctr">
+                      <a:solidFill>
+                        <a:srgbClr val="D8DBE0"/>
+                      </a:solidFill>
+                      <a:prstDash val="solid"/>
+                      <a:round/>
+                      <a:headEnd type="none" w="med" len="med"/>
+                      <a:tailEnd type="none" w="med" len="med"/>
+                    </a:lnL>
+                    <a:lnR w="9525" cap="flat" cmpd="sng" algn="ctr">
+                      <a:solidFill>
+                        <a:srgbClr val="D8DBE0"/>
+                      </a:solidFill>
+                      <a:prstDash val="solid"/>
+                      <a:round/>
+                      <a:headEnd type="none" w="med" len="med"/>
+                      <a:tailEnd type="none" w="med" len="med"/>
+                    </a:lnR>
+                    <a:lnT w="9525" cap="flat" cmpd="sng" algn="ctr">
+                      <a:solidFill>
+                        <a:srgbClr val="D8DBE0"/>
+                      </a:solidFill>
+                      <a:prstDash val="solid"/>
+                      <a:round/>
+                      <a:headEnd type="none" w="med" len="med"/>
+                      <a:tailEnd type="none" w="med" len="med"/>
+                    </a:lnT>
+                    <a:lnB w="9525" cap="flat" cmpd="sng" algn="ctr">
+                      <a:solidFill>
+                        <a:srgbClr val="D8DBE0"/>
+                      </a:solidFill>
+                      <a:prstDash val="solid"/>
+                      <a:round/>
+                      <a:headEnd type="none" w="med" len="med"/>
+                      <a:tailEnd type="none" w="med" len="med"/>
+                    </a:lnB>
+                    <a:solidFill>
+                      <a:srgbClr val="FFFFFF"/>
+                    </a:solidFill>
+                  </a:tcPr>
+                </a:tc>
+              </a:tr>
+              <a:tr h="420624">
+                <a:tc>
+                  <a:txBody>
+                    <a:bodyPr/>
+                    <a:lstStyle/>
+                    <a:p>
+                      <a:pPr marL="0" indent="0" algn="l">
+                        <a:buNone/>
+                      </a:pPr>
+                      <a:r>
+                        <a:rPr lang="en-US" sz="1500" dirty="0">
+                          <a:solidFill>
+                            <a:srgbClr val="1F2329"/>
+                          </a:solidFill>
+                          <a:latin typeface="微软雅黑" panose="020B0503020204020204" pitchFamily="34" charset="-122"/>
+                          <a:ea typeface="微软雅黑" panose="020B0503020204020204" pitchFamily="34" charset="-122"/>
+                          <a:cs typeface="微软雅黑" panose="020B0503020204020204" pitchFamily="34" charset="-120"/>
+                        </a:rPr>
+                        <a:t>自组织表查找</a:t>
+                      </a:r>
+                      <a:endParaRPr lang="en-US" sz="1500" dirty="0">
+                        <a:latin typeface="微软雅黑" panose="020B0503020204020204" pitchFamily="34" charset="-122"/>
+                        <a:ea typeface="微软雅黑" panose="020B0503020204020204" pitchFamily="34" charset="-122"/>
+                        <a:cs typeface="微软雅黑" panose="020B0503020204020204" pitchFamily="34" charset="-122"/>
+                      </a:endParaRPr>
+                    </a:p>
+                  </a:txBody>
+                  <a:tcPr anchor="ctr">
+                    <a:lnL w="9525" cap="flat" cmpd="sng" algn="ctr">
+                      <a:solidFill>
+                        <a:srgbClr val="D8DBE0"/>
+                      </a:solidFill>
+                      <a:prstDash val="solid"/>
+                      <a:round/>
+                      <a:headEnd type="none" w="med" len="med"/>
+                      <a:tailEnd type="none" w="med" len="med"/>
+                    </a:lnL>
+                    <a:lnR w="9525" cap="flat" cmpd="sng" algn="ctr">
+                      <a:solidFill>
+                        <a:srgbClr val="D8DBE0"/>
+                      </a:solidFill>
+                      <a:prstDash val="solid"/>
+                      <a:round/>
+                      <a:headEnd type="none" w="med" len="med"/>
+                      <a:tailEnd type="none" w="med" len="med"/>
+                    </a:lnR>
+                    <a:lnT w="9525" cap="flat" cmpd="sng" algn="ctr">
+                      <a:solidFill>
+                        <a:srgbClr val="D8DBE0"/>
+                      </a:solidFill>
+                      <a:prstDash val="solid"/>
+                      <a:round/>
+                      <a:headEnd type="none" w="med" len="med"/>
+                      <a:tailEnd type="none" w="med" len="med"/>
+                    </a:lnT>
+                    <a:lnB w="9525" cap="flat" cmpd="sng" algn="ctr">
+                      <a:solidFill>
+                        <a:srgbClr val="D8DBE0"/>
+                      </a:solidFill>
+                      <a:prstDash val="solid"/>
+                      <a:round/>
+                      <a:headEnd type="none" w="med" len="med"/>
+                      <a:tailEnd type="none" w="med" len="med"/>
+                    </a:lnB>
+                    <a:solidFill>
+                      <a:srgbClr val="FFFFFF"/>
+                    </a:solidFill>
+                  </a:tcPr>
+                </a:tc>
+                <a:tc>
+                  <a:txBody>
+                    <a:bodyPr/>
+                    <a:lstStyle/>
+                    <a:p>
+                      <a:pPr marL="0" indent="0" algn="l">
+                        <a:buNone/>
+                      </a:pPr>
+                      <a:r>
+                        <a:rPr lang="en-US" sz="1500" dirty="0">
+                          <a:solidFill>
+                            <a:srgbClr val="1F2329"/>
+                          </a:solidFill>
+                          <a:latin typeface="微软雅黑" panose="020B0503020204020204" pitchFamily="34" charset="-122"/>
+                          <a:ea typeface="微软雅黑" panose="020B0503020204020204" pitchFamily="34" charset="-122"/>
+                          <a:cs typeface="微软雅黑" panose="020B0503020204020204" pitchFamily="34" charset="-120"/>
+                        </a:rPr>
+                        <a:t>算5、6</a:t>
+                      </a:r>
+                      <a:endParaRPr lang="en-US" sz="1500" dirty="0">
+                        <a:latin typeface="微软雅黑" panose="020B0503020204020204" pitchFamily="34" charset="-122"/>
+                        <a:ea typeface="微软雅黑" panose="020B0503020204020204" pitchFamily="34" charset="-122"/>
+                        <a:cs typeface="微软雅黑" panose="020B0503020204020204" pitchFamily="34" charset="-122"/>
+                      </a:endParaRPr>
+                    </a:p>
+                  </a:txBody>
+                  <a:tcPr anchor="ctr">
                     <a:lnL w="9525" cap="flat" cmpd="sng" algn="ctr">
                       <a:solidFill>
                         <a:srgbClr val="D8DBE0"/>
@@ -8384,7 +8532,7 @@
 
 <file path=ppt/slides/slide7.xml><?xml version="1.0" encoding="utf-8"?>
 <p:sld xmlns:a="http://schemas.openxmlformats.org/drawingml/2006/main" xmlns:r="http://schemas.openxmlformats.org/officeDocument/2006/relationships" xmlns:p="http://schemas.openxmlformats.org/presentationml/2006/main">
-  <p:cSld name="Slide 7">
+  <p:cSld>
     <p:bg>
       <p:bgPr>
         <a:blipFill dpi="0" rotWithShape="1">
@@ -8428,13 +8576,12 @@
             <a:avLst/>
           </a:prstGeom>
           <a:noFill/>
-          <a:ln/>
         </p:spPr>
         <p:txBody>
           <a:bodyPr wrap="square" rtlCol="0" anchor="ctr"/>
           <a:lstStyle/>
           <a:p>
-            <a:pPr algn="r" indent="0" marL="0">
+            <a:pPr marL="0" indent="0" algn="r">
               <a:buNone/>
             </a:pPr>
             <a:r>
@@ -8442,11 +8589,11 @@
                 <a:solidFill>
                   <a:srgbClr val="8A9099"/>
                 </a:solidFill>
-                <a:latin typeface="微软雅黑" pitchFamily="34" charset="0"/>
-                <a:ea typeface="微软雅黑" pitchFamily="34" charset="-122"/>
-                <a:cs typeface="微软雅黑" pitchFamily="34" charset="-120"/>
+                <a:latin typeface="微软雅黑" panose="020B0503020204020204" pitchFamily="34" charset="-122"/>
+                <a:ea typeface="微软雅黑" panose="020B0503020204020204" pitchFamily="34" charset="-122"/>
+                <a:cs typeface="微软雅黑" panose="020B0503020204020204" pitchFamily="34" charset="-120"/>
               </a:rPr>
-              <a:t>7 / 8</a:t>
+              <a:t>6 / 8</a:t>
             </a:r>
             <a:endParaRPr lang="en-US" sz="1000" dirty="0"/>
           </a:p>
@@ -8467,13 +8614,12 @@
             <a:avLst/>
           </a:prstGeom>
           <a:noFill/>
-          <a:ln/>
         </p:spPr>
         <p:txBody>
           <a:bodyPr wrap="square" rtlCol="0" anchor="ctr"/>
           <a:lstStyle/>
           <a:p>
-            <a:pPr algn="l" indent="0" marL="0">
+            <a:pPr marL="0" indent="0" algn="l">
               <a:buNone/>
             </a:pPr>
             <a:r>
@@ -8481,11 +8627,11 @@
                 <a:solidFill>
                   <a:srgbClr val="1F4E9C"/>
                 </a:solidFill>
-                <a:latin typeface="微软雅黑" pitchFamily="34" charset="0"/>
-                <a:ea typeface="微软雅黑" pitchFamily="34" charset="-122"/>
-                <a:cs typeface="微软雅黑" pitchFamily="34" charset="-120"/>
+                <a:latin typeface="微软雅黑" panose="020B0503020204020204" pitchFamily="34" charset="-122"/>
+                <a:ea typeface="微软雅黑" panose="020B0503020204020204" pitchFamily="34" charset="-122"/>
+                <a:cs typeface="微软雅黑" panose="020B0503020204020204" pitchFamily="34" charset="-120"/>
               </a:rPr>
-              <a:t>完全不做</a:t>
+              <a:t>可做可不做</a:t>
             </a:r>
             <a:endParaRPr lang="en-US" sz="1400" dirty="0"/>
           </a:p>
@@ -8506,13 +8652,12 @@
             <a:avLst/>
           </a:prstGeom>
           <a:noFill/>
-          <a:ln/>
         </p:spPr>
         <p:txBody>
           <a:bodyPr wrap="square" rtlCol="0" anchor="ctr"/>
           <a:lstStyle/>
           <a:p>
-            <a:pPr algn="l" indent="0" marL="0">
+            <a:pPr marL="0" indent="0" algn="l">
               <a:buNone/>
             </a:pPr>
             <a:r>
@@ -8520,11 +8665,11 @@
                 <a:solidFill>
                   <a:srgbClr val="1F2329"/>
                 </a:solidFill>
-                <a:latin typeface="微软雅黑" pitchFamily="34" charset="0"/>
-                <a:ea typeface="微软雅黑" pitchFamily="34" charset="-122"/>
-                <a:cs typeface="微软雅黑" pitchFamily="34" charset="-120"/>
+                <a:latin typeface="微软雅黑" panose="020B0503020204020204" pitchFamily="34" charset="-122"/>
+                <a:ea typeface="微软雅黑" panose="020B0503020204020204" pitchFamily="34" charset="-122"/>
+                <a:cs typeface="微软雅黑" panose="020B0503020204020204" pitchFamily="34" charset="-120"/>
               </a:rPr>
-              <a:t>完全不做清单</a:t>
+              <a:t>可做可不做清单</a:t>
             </a:r>
             <a:endParaRPr lang="en-US" sz="2800" dirty="0"/>
           </a:p>
@@ -8532,21 +8677,15 @@
       </p:sp>
       <p:graphicFrame>
         <p:nvGraphicFramePr>
-          <p:cNvPr id="8" name="Table 0"/>
+          <p:cNvPr id="7" name="Table 0"/>
           <p:cNvGraphicFramePr>
             <a:graphicFrameLocks noGrp="1"/>
           </p:cNvGraphicFramePr>
-          <p:nvPr>
-            <p:extLst>
-              <p:ext uri="{D42A27DB-BD31-4B8C-83A1-F6EECF244321}">
-                <p14:modId xmlns:p14="http://schemas.microsoft.com/office/powerpoint/2010/main" val="1579011935"/>
-              </p:ext>
-            </p:extLst>
-          </p:nvPr>
+          <p:nvPr/>
         </p:nvGraphicFramePr>
         <p:xfrm>
           <a:off x="822960" y="2395728"/>
-          <a:ext cx="10545775" cy="914400"/>
+          <a:ext cx="10545775" cy="2103120"/>
         </p:xfrm>
         <a:graphic>
           <a:graphicData uri="http://schemas.openxmlformats.org/drawingml/2006/table">
@@ -8562,7 +8701,7 @@
                     <a:bodyPr/>
                     <a:lstStyle/>
                     <a:p>
-                      <a:pPr algn="l" indent="0" marL="0">
+                      <a:pPr marL="0" indent="0" algn="l">
                         <a:buNone/>
                       </a:pPr>
                       <a:r>
@@ -8570,20 +8709,20 @@
                           <a:solidFill>
                             <a:srgbClr val="1F4E9C"/>
                           </a:solidFill>
-                          <a:latin typeface="微软雅黑" pitchFamily="34" charset="0"/>
-                          <a:ea typeface="微软雅黑" pitchFamily="34" charset="-122"/>
-                          <a:cs typeface="微软雅黑" pitchFamily="34" charset="-120"/>
+                          <a:latin typeface="微软雅黑" panose="020B0503020204020204" pitchFamily="34" charset="-122"/>
+                          <a:ea typeface="微软雅黑" panose="020B0503020204020204" pitchFamily="34" charset="-122"/>
+                          <a:cs typeface="微软雅黑" panose="020B0503020204020204" pitchFamily="34" charset="-120"/>
                         </a:rPr>
-                        <a:t>内容</a:t>
+                        <a:t>分组</a:t>
                       </a:r>
                       <a:endParaRPr lang="en-US" sz="1500" dirty="0">
-                        <a:latin typeface="微软雅黑" charset="0"/>
-                        <a:ea typeface="微软雅黑" charset="0"/>
-                        <a:cs typeface="微软雅黑" charset="0"/>
+                        <a:latin typeface="微软雅黑" panose="020B0503020204020204" pitchFamily="34" charset="-122"/>
+                        <a:ea typeface="微软雅黑" panose="020B0503020204020204" pitchFamily="34" charset="-122"/>
+                        <a:cs typeface="微软雅黑" panose="020B0503020204020204" pitchFamily="34" charset="-122"/>
                       </a:endParaRPr>
                     </a:p>
                   </a:txBody>
-                  <a:tcPr marL="91440" marR="91440" marT="45720" marB="45720" anchor="ctr">
+                  <a:tcPr anchor="ctr">
                     <a:lnL w="9525" cap="flat" cmpd="sng" algn="ctr">
                       <a:solidFill>
                         <a:srgbClr val="D8DBE0"/>
@@ -8630,7 +8769,7 @@
                     <a:bodyPr/>
                     <a:lstStyle/>
                     <a:p>
-                      <a:pPr algn="l" indent="0" marL="0">
+                      <a:pPr marL="0" indent="0" algn="l">
                         <a:buNone/>
                       </a:pPr>
                       <a:r>
@@ -8638,20 +8777,20 @@
                           <a:solidFill>
                             <a:srgbClr val="1F4E9C"/>
                           </a:solidFill>
-                          <a:latin typeface="微软雅黑" pitchFamily="34" charset="0"/>
-                          <a:ea typeface="微软雅黑" pitchFamily="34" charset="-122"/>
-                          <a:cs typeface="微软雅黑" pitchFamily="34" charset="-120"/>
+                          <a:latin typeface="微软雅黑" panose="020B0503020204020204" pitchFamily="34" charset="-122"/>
+                          <a:ea typeface="微软雅黑" panose="020B0503020204020204" pitchFamily="34" charset="-122"/>
+                          <a:cs typeface="微软雅黑" panose="020B0503020204020204" pitchFamily="34" charset="-120"/>
                         </a:rPr>
                         <a:t>题号</a:t>
                       </a:r>
                       <a:endParaRPr lang="en-US" sz="1500" dirty="0">
-                        <a:latin typeface="微软雅黑" charset="0"/>
-                        <a:ea typeface="微软雅黑" charset="0"/>
-                        <a:cs typeface="微软雅黑" charset="0"/>
+                        <a:latin typeface="微软雅黑" panose="020B0503020204020204" pitchFamily="34" charset="-122"/>
+                        <a:ea typeface="微软雅黑" panose="020B0503020204020204" pitchFamily="34" charset="-122"/>
+                        <a:cs typeface="微软雅黑" panose="020B0503020204020204" pitchFamily="34" charset="-122"/>
                       </a:endParaRPr>
                     </a:p>
                   </a:txBody>
-                  <a:tcPr marL="91440" marR="91440" marT="45720" marB="45720" anchor="ctr">
+                  <a:tcPr anchor="ctr">
                     <a:lnL w="9525" cap="flat" cmpd="sng" algn="ctr">
                       <a:solidFill>
                         <a:srgbClr val="D8DBE0"/>
@@ -8700,7 +8839,7 @@
                     <a:bodyPr/>
                     <a:lstStyle/>
                     <a:p>
-                      <a:pPr algn="l" indent="0" marL="0">
+                      <a:pPr marL="0" indent="0" algn="l">
                         <a:buNone/>
                       </a:pPr>
                       <a:r>
@@ -8708,20 +8847,20 @@
                           <a:solidFill>
                             <a:srgbClr val="1F2329"/>
                           </a:solidFill>
-                          <a:latin typeface="微软雅黑" pitchFamily="34" charset="0"/>
-                          <a:ea typeface="微软雅黑" pitchFamily="34" charset="-122"/>
-                          <a:cs typeface="微软雅黑" pitchFamily="34" charset="-120"/>
+                          <a:latin typeface="微软雅黑" panose="020B0503020204020204" pitchFamily="34" charset="-122"/>
+                          <a:ea typeface="微软雅黑" panose="020B0503020204020204" pitchFamily="34" charset="-122"/>
+                          <a:cs typeface="微软雅黑" panose="020B0503020204020204" pitchFamily="34" charset="-120"/>
                         </a:rPr>
-                        <a:t>红黑树</a:t>
+                        <a:t>选择题：查找概念巩固（顺序/折半条件、BST…</a:t>
                       </a:r>
                       <a:endParaRPr lang="en-US" sz="1500" dirty="0">
-                        <a:latin typeface="微软雅黑" charset="0"/>
-                        <a:ea typeface="微软雅黑" charset="0"/>
-                        <a:cs typeface="微软雅黑" charset="0"/>
+                        <a:latin typeface="微软雅黑" panose="020B0503020204020204" pitchFamily="34" charset="-122"/>
+                        <a:ea typeface="微软雅黑" panose="020B0503020204020204" pitchFamily="34" charset="-122"/>
+                        <a:cs typeface="微软雅黑" panose="020B0503020204020204" pitchFamily="34" charset="-122"/>
                       </a:endParaRPr>
                     </a:p>
                   </a:txBody>
-                  <a:tcPr marL="91440" marR="91440" marT="45720" marB="45720" anchor="ctr">
+                  <a:tcPr anchor="ctr">
                     <a:lnL w="9525" cap="flat" cmpd="sng" algn="ctr">
                       <a:solidFill>
                         <a:srgbClr val="D8DBE0"/>
@@ -8768,7 +8907,7 @@
                     <a:bodyPr/>
                     <a:lstStyle/>
                     <a:p>
-                      <a:pPr algn="l" indent="0" marL="0">
+                      <a:pPr marL="0" indent="0" algn="l">
                         <a:buNone/>
                       </a:pPr>
                       <a:r>
@@ -8776,20 +8915,20 @@
                           <a:solidFill>
                             <a:srgbClr val="1F2329"/>
                           </a:solidFill>
-                          <a:latin typeface="微软雅黑" pitchFamily="34" charset="0"/>
-                          <a:ea typeface="微软雅黑" pitchFamily="34" charset="-122"/>
-                          <a:cs typeface="微软雅黑" pitchFamily="34" charset="-120"/>
+                          <a:latin typeface="微软雅黑" panose="020B0503020204020204" pitchFamily="34" charset="-122"/>
+                          <a:ea typeface="微软雅黑" panose="020B0503020204020204" pitchFamily="34" charset="-122"/>
+                          <a:cs typeface="微软雅黑" panose="020B0503020204020204" pitchFamily="34" charset="-120"/>
                         </a:rPr>
-                        <a:t>选35—40；答12—15；算17、18</a:t>
+                        <a:t>选1、3、5、6、8、9、11、13、15—19…</a:t>
                       </a:r>
                       <a:endParaRPr lang="en-US" sz="1500" dirty="0">
-                        <a:latin typeface="微软雅黑" charset="0"/>
-                        <a:ea typeface="微软雅黑" charset="0"/>
-                        <a:cs typeface="微软雅黑" charset="0"/>
+                        <a:latin typeface="微软雅黑" panose="020B0503020204020204" pitchFamily="34" charset="-122"/>
+                        <a:ea typeface="微软雅黑" panose="020B0503020204020204" pitchFamily="34" charset="-122"/>
+                        <a:cs typeface="微软雅黑" panose="020B0503020204020204" pitchFamily="34" charset="-122"/>
                       </a:endParaRPr>
                     </a:p>
                   </a:txBody>
-                  <a:tcPr marL="91440" marR="91440" marT="45720" marB="45720" anchor="ctr">
+                  <a:tcPr anchor="ctr">
                     <a:lnL w="9525" cap="flat" cmpd="sng" algn="ctr">
                       <a:solidFill>
                         <a:srgbClr val="D8DBE0"/>
@@ -8838,7 +8977,7 @@
                     <a:bodyPr/>
                     <a:lstStyle/>
                     <a:p>
-                      <a:pPr algn="l" indent="0" marL="0">
+                      <a:pPr marL="0" indent="0" algn="l">
                         <a:buNone/>
                       </a:pPr>
                       <a:r>
@@ -8846,20 +8985,20 @@
                           <a:solidFill>
                             <a:srgbClr val="1F2329"/>
                           </a:solidFill>
-                          <a:latin typeface="微软雅黑" pitchFamily="34" charset="0"/>
-                          <a:ea typeface="微软雅黑" pitchFamily="34" charset="-122"/>
-                          <a:cs typeface="微软雅黑" pitchFamily="34" charset="-120"/>
+                          <a:latin typeface="微软雅黑" panose="020B0503020204020204" pitchFamily="34" charset="-122"/>
+                          <a:ea typeface="微软雅黑" panose="020B0503020204020204" pitchFamily="34" charset="-122"/>
+                          <a:cs typeface="微软雅黑" panose="020B0503020204020204" pitchFamily="34" charset="-120"/>
                         </a:rPr>
-                        <a:t>跳跃表</a:t>
+                        <a:t>（续）</a:t>
                       </a:r>
                       <a:endParaRPr lang="en-US" sz="1500" dirty="0">
-                        <a:latin typeface="微软雅黑" charset="0"/>
-                        <a:ea typeface="微软雅黑" charset="0"/>
-                        <a:cs typeface="微软雅黑" charset="0"/>
+                        <a:latin typeface="微软雅黑" panose="020B0503020204020204" pitchFamily="34" charset="-122"/>
+                        <a:ea typeface="微软雅黑" panose="020B0503020204020204" pitchFamily="34" charset="-122"/>
+                        <a:cs typeface="微软雅黑" panose="020B0503020204020204" pitchFamily="34" charset="-122"/>
                       </a:endParaRPr>
                     </a:p>
                   </a:txBody>
-                  <a:tcPr marL="91440" marR="91440" marT="45720" marB="45720" anchor="ctr">
+                  <a:tcPr anchor="ctr">
                     <a:lnL w="9525" cap="flat" cmpd="sng" algn="ctr">
                       <a:solidFill>
                         <a:srgbClr val="D8DBE0"/>
@@ -8906,7 +9045,7 @@
                     <a:bodyPr/>
                     <a:lstStyle/>
                     <a:p>
-                      <a:pPr algn="l" indent="0" marL="0">
+                      <a:pPr marL="0" indent="0" algn="l">
                         <a:buNone/>
                       </a:pPr>
                       <a:r>
@@ -8914,20 +9053,20 @@
                           <a:solidFill>
                             <a:srgbClr val="1F2329"/>
                           </a:solidFill>
-                          <a:latin typeface="微软雅黑" pitchFamily="34" charset="0"/>
-                          <a:ea typeface="微软雅黑" pitchFamily="34" charset="-122"/>
-                          <a:cs typeface="微软雅黑" pitchFamily="34" charset="-120"/>
+                          <a:latin typeface="微软雅黑" panose="020B0503020204020204" pitchFamily="34" charset="-122"/>
+                          <a:ea typeface="微软雅黑" panose="020B0503020204020204" pitchFamily="34" charset="-122"/>
+                          <a:cs typeface="微软雅黑" panose="020B0503020204020204" pitchFamily="34" charset="-120"/>
                         </a:rPr>
-                        <a:t>选54—58；答22—24；算21—24</a:t>
+                        <a:t>21—34、41—53、64—67、69—71</a:t>
                       </a:r>
                       <a:endParaRPr lang="en-US" sz="1500" dirty="0">
-                        <a:latin typeface="微软雅黑" charset="0"/>
-                        <a:ea typeface="微软雅黑" charset="0"/>
-                        <a:cs typeface="微软雅黑" charset="0"/>
+                        <a:latin typeface="微软雅黑" panose="020B0503020204020204" pitchFamily="34" charset="-122"/>
+                        <a:ea typeface="微软雅黑" panose="020B0503020204020204" pitchFamily="34" charset="-122"/>
+                        <a:cs typeface="微软雅黑" panose="020B0503020204020204" pitchFamily="34" charset="-122"/>
                       </a:endParaRPr>
                     </a:p>
                   </a:txBody>
-                  <a:tcPr marL="91440" marR="91440" marT="45720" marB="45720" anchor="ctr">
+                  <a:tcPr anchor="ctr">
                     <a:lnL w="9525" cap="flat" cmpd="sng" algn="ctr">
                       <a:solidFill>
                         <a:srgbClr val="D8DBE0"/>
@@ -8976,7 +9115,7 @@
                     <a:bodyPr/>
                     <a:lstStyle/>
                     <a:p>
-                      <a:pPr algn="l" indent="0" marL="0">
+                      <a:pPr marL="0" indent="0" algn="l">
                         <a:buNone/>
                       </a:pPr>
                       <a:r>
@@ -8984,20 +9123,20 @@
                           <a:solidFill>
                             <a:srgbClr val="1F2329"/>
                           </a:solidFill>
-                          <a:latin typeface="微软雅黑" pitchFamily="34" charset="0"/>
-                          <a:ea typeface="微软雅黑" pitchFamily="34" charset="-122"/>
-                          <a:cs typeface="微软雅黑" pitchFamily="34" charset="-120"/>
+                          <a:latin typeface="微软雅黑" panose="020B0503020204020204" pitchFamily="34" charset="-122"/>
+                          <a:ea typeface="微软雅黑" panose="020B0503020204020204" pitchFamily="34" charset="-122"/>
+                          <a:cs typeface="微软雅黑" panose="020B0503020204020204" pitchFamily="34" charset="-120"/>
                         </a:rPr>
-                        <a:t>Trie树</a:t>
+                        <a:t>解答题：查找域内巩固（顺序表ASL讨论、递归…</a:t>
                       </a:r>
                       <a:endParaRPr lang="en-US" sz="1500" dirty="0">
-                        <a:latin typeface="微软雅黑" charset="0"/>
-                        <a:ea typeface="微软雅黑" charset="0"/>
-                        <a:cs typeface="微软雅黑" charset="0"/>
+                        <a:latin typeface="微软雅黑" panose="020B0503020204020204" pitchFamily="34" charset="-122"/>
+                        <a:ea typeface="微软雅黑" panose="020B0503020204020204" pitchFamily="34" charset="-122"/>
+                        <a:cs typeface="微软雅黑" panose="020B0503020204020204" pitchFamily="34" charset="-122"/>
                       </a:endParaRPr>
                     </a:p>
                   </a:txBody>
-                  <a:tcPr marL="91440" marR="91440" marT="45720" marB="45720" anchor="ctr">
+                  <a:tcPr anchor="ctr">
                     <a:lnL w="9525" cap="flat" cmpd="sng" algn="ctr">
                       <a:solidFill>
                         <a:srgbClr val="D8DBE0"/>
@@ -9044,7 +9183,7 @@
                     <a:bodyPr/>
                     <a:lstStyle/>
                     <a:p>
-                      <a:pPr algn="l" indent="0" marL="0">
+                      <a:pPr marL="0" indent="0" algn="l">
                         <a:buNone/>
                       </a:pPr>
                       <a:r>
@@ -9052,20 +9191,20 @@
                           <a:solidFill>
                             <a:srgbClr val="1F2329"/>
                           </a:solidFill>
-                          <a:latin typeface="微软雅黑" pitchFamily="34" charset="0"/>
-                          <a:ea typeface="微软雅黑" pitchFamily="34" charset="-122"/>
-                          <a:cs typeface="微软雅黑" pitchFamily="34" charset="-120"/>
+                          <a:latin typeface="微软雅黑" panose="020B0503020204020204" pitchFamily="34" charset="-122"/>
+                          <a:ea typeface="微软雅黑" panose="020B0503020204020204" pitchFamily="34" charset="-122"/>
+                          <a:cs typeface="微软雅黑" panose="020B0503020204020204" pitchFamily="34" charset="-120"/>
                         </a:rPr>
-                        <a:t>选59—63；答25；算25、26</a:t>
+                        <a:t>答1、4—7、10、11、16—21、29—31</a:t>
                       </a:r>
                       <a:endParaRPr lang="en-US" sz="1500" dirty="0">
-                        <a:latin typeface="微软雅黑" charset="0"/>
-                        <a:ea typeface="微软雅黑" charset="0"/>
-                        <a:cs typeface="微软雅黑" charset="0"/>
+                        <a:latin typeface="微软雅黑" panose="020B0503020204020204" pitchFamily="34" charset="-122"/>
+                        <a:ea typeface="微软雅黑" panose="020B0503020204020204" pitchFamily="34" charset="-122"/>
+                        <a:cs typeface="微软雅黑" panose="020B0503020204020204" pitchFamily="34" charset="-122"/>
                       </a:endParaRPr>
                     </a:p>
                   </a:txBody>
-                  <a:tcPr marL="91440" marR="91440" marT="45720" marB="45720" anchor="ctr">
+                  <a:tcPr anchor="ctr">
                     <a:lnL w="9525" cap="flat" cmpd="sng" algn="ctr">
                       <a:solidFill>
                         <a:srgbClr val="D8DBE0"/>
@@ -9114,7 +9253,7 @@
                     <a:bodyPr/>
                     <a:lstStyle/>
                     <a:p>
-                      <a:pPr algn="l" indent="0" marL="0">
+                      <a:pPr marL="0" indent="0" algn="l">
                         <a:buNone/>
                       </a:pPr>
                       <a:r>
@@ -9122,20 +9261,20 @@
                           <a:solidFill>
                             <a:srgbClr val="1F2329"/>
                           </a:solidFill>
-                          <a:latin typeface="微软雅黑" pitchFamily="34" charset="0"/>
-                          <a:ea typeface="微软雅黑" pitchFamily="34" charset="-122"/>
-                          <a:cs typeface="微软雅黑" pitchFamily="34" charset="-120"/>
+                          <a:latin typeface="微软雅黑" panose="020B0503020204020204" pitchFamily="34" charset="-122"/>
+                          <a:ea typeface="微软雅黑" panose="020B0503020204020204" pitchFamily="34" charset="-122"/>
+                          <a:cs typeface="微软雅黑" panose="020B0503020204020204" pitchFamily="34" charset="-120"/>
                         </a:rPr>
-                        <a:t>布隆过滤器</a:t>
+                        <a:t>算法设计题：查找域内代码巩固（折半改写、分块…</a:t>
                       </a:r>
                       <a:endParaRPr lang="en-US" sz="1500" dirty="0">
-                        <a:latin typeface="微软雅黑" charset="0"/>
-                        <a:ea typeface="微软雅黑" charset="0"/>
-                        <a:cs typeface="微软雅黑" charset="0"/>
+                        <a:latin typeface="微软雅黑" panose="020B0503020204020204" pitchFamily="34" charset="-122"/>
+                        <a:ea typeface="微软雅黑" panose="020B0503020204020204" pitchFamily="34" charset="-122"/>
+                        <a:cs typeface="微软雅黑" panose="020B0503020204020204" pitchFamily="34" charset="-122"/>
                       </a:endParaRPr>
                     </a:p>
                   </a:txBody>
-                  <a:tcPr marL="91440" marR="91440" marT="45720" marB="45720" anchor="ctr">
+                  <a:tcPr anchor="ctr">
                     <a:lnL w="9525" cap="flat" cmpd="sng" algn="ctr">
                       <a:solidFill>
                         <a:srgbClr val="D8DBE0"/>
@@ -9182,7 +9321,7 @@
                     <a:bodyPr/>
                     <a:lstStyle/>
                     <a:p>
-                      <a:pPr algn="l" indent="0" marL="0">
+                      <a:pPr marL="0" indent="0" algn="l">
                         <a:buNone/>
                       </a:pPr>
                       <a:r>
@@ -9190,296 +9329,20 @@
                           <a:solidFill>
                             <a:srgbClr val="1F2329"/>
                           </a:solidFill>
-                          <a:latin typeface="微软雅黑" pitchFamily="34" charset="0"/>
-                          <a:ea typeface="微软雅黑" pitchFamily="34" charset="-122"/>
-                          <a:cs typeface="微软雅黑" pitchFamily="34" charset="-120"/>
+                          <a:latin typeface="微软雅黑" panose="020B0503020204020204" pitchFamily="34" charset="-122"/>
+                          <a:ea typeface="微软雅黑" panose="020B0503020204020204" pitchFamily="34" charset="-122"/>
+                          <a:cs typeface="微软雅黑" panose="020B0503020204020204" pitchFamily="34" charset="-120"/>
                         </a:rPr>
-                        <a:t>选72—75；答32、33；算30</a:t>
+                        <a:t>算2—4、8—16、19、20、27—29</a:t>
                       </a:r>
                       <a:endParaRPr lang="en-US" sz="1500" dirty="0">
-                        <a:latin typeface="微软雅黑" charset="0"/>
-                        <a:ea typeface="微软雅黑" charset="0"/>
-                        <a:cs typeface="微软雅黑" charset="0"/>
+                        <a:latin typeface="微软雅黑" panose="020B0503020204020204" pitchFamily="34" charset="-122"/>
+                        <a:ea typeface="微软雅黑" panose="020B0503020204020204" pitchFamily="34" charset="-122"/>
+                        <a:cs typeface="微软雅黑" panose="020B0503020204020204" pitchFamily="34" charset="-122"/>
                       </a:endParaRPr>
                     </a:p>
                   </a:txBody>
-                  <a:tcPr marL="91440" marR="91440" marT="45720" marB="45720" anchor="ctr">
-                    <a:lnL w="9525" cap="flat" cmpd="sng" algn="ctr">
-                      <a:solidFill>
-                        <a:srgbClr val="D8DBE0"/>
-                      </a:solidFill>
-                      <a:prstDash val="solid"/>
-                      <a:round/>
-                      <a:headEnd type="none" w="med" len="med"/>
-                      <a:tailEnd type="none" w="med" len="med"/>
-                    </a:lnL>
-                    <a:lnR w="9525" cap="flat" cmpd="sng" algn="ctr">
-                      <a:solidFill>
-                        <a:srgbClr val="D8DBE0"/>
-                      </a:solidFill>
-                      <a:prstDash val="solid"/>
-                      <a:round/>
-                      <a:headEnd type="none" w="med" len="med"/>
-                      <a:tailEnd type="none" w="med" len="med"/>
-                    </a:lnR>
-                    <a:lnT w="9525" cap="flat" cmpd="sng" algn="ctr">
-                      <a:solidFill>
-                        <a:srgbClr val="D8DBE0"/>
-                      </a:solidFill>
-                      <a:prstDash val="solid"/>
-                      <a:round/>
-                      <a:headEnd type="none" w="med" len="med"/>
-                      <a:tailEnd type="none" w="med" len="med"/>
-                    </a:lnT>
-                    <a:lnB w="9525" cap="flat" cmpd="sng" algn="ctr">
-                      <a:solidFill>
-                        <a:srgbClr val="D8DBE0"/>
-                      </a:solidFill>
-                      <a:prstDash val="solid"/>
-                      <a:round/>
-                      <a:headEnd type="none" w="med" len="med"/>
-                      <a:tailEnd type="none" w="med" len="med"/>
-                    </a:lnB>
-                    <a:solidFill>
-                      <a:srgbClr val="FFFFFF"/>
-                    </a:solidFill>
-                  </a:tcPr>
-                </a:tc>
-              </a:tr>
-              <a:tr h="420624">
-                <a:tc>
-                  <a:txBody>
-                    <a:bodyPr/>
-                    <a:lstStyle/>
-                    <a:p>
-                      <a:pPr algn="l" indent="0" marL="0">
-                        <a:buNone/>
-                      </a:pPr>
-                      <a:r>
-                        <a:rPr lang="en-US" sz="1500" dirty="0">
-                          <a:solidFill>
-                            <a:srgbClr val="1F2329"/>
-                          </a:solidFill>
-                          <a:latin typeface="微软雅黑" pitchFamily="34" charset="0"/>
-                          <a:ea typeface="微软雅黑" pitchFamily="34" charset="-122"/>
-                          <a:cs typeface="微软雅黑" pitchFamily="34" charset="-120"/>
-                        </a:rPr>
-                        <a:t>次优查找树</a:t>
-                      </a:r>
-                      <a:endParaRPr lang="en-US" sz="1500" dirty="0">
-                        <a:latin typeface="微软雅黑" charset="0"/>
-                        <a:ea typeface="微软雅黑" charset="0"/>
-                        <a:cs typeface="微软雅黑" charset="0"/>
-                      </a:endParaRPr>
-                    </a:p>
-                  </a:txBody>
-                  <a:tcPr marL="91440" marR="91440" marT="45720" marB="45720" anchor="ctr">
-                    <a:lnL w="9525" cap="flat" cmpd="sng" algn="ctr">
-                      <a:solidFill>
-                        <a:srgbClr val="D8DBE0"/>
-                      </a:solidFill>
-                      <a:prstDash val="solid"/>
-                      <a:round/>
-                      <a:headEnd type="none" w="med" len="med"/>
-                      <a:tailEnd type="none" w="med" len="med"/>
-                    </a:lnL>
-                    <a:lnR w="9525" cap="flat" cmpd="sng" algn="ctr">
-                      <a:solidFill>
-                        <a:srgbClr val="D8DBE0"/>
-                      </a:solidFill>
-                      <a:prstDash val="solid"/>
-                      <a:round/>
-                      <a:headEnd type="none" w="med" len="med"/>
-                      <a:tailEnd type="none" w="med" len="med"/>
-                    </a:lnR>
-                    <a:lnT w="9525" cap="flat" cmpd="sng" algn="ctr">
-                      <a:solidFill>
-                        <a:srgbClr val="D8DBE0"/>
-                      </a:solidFill>
-                      <a:prstDash val="solid"/>
-                      <a:round/>
-                      <a:headEnd type="none" w="med" len="med"/>
-                      <a:tailEnd type="none" w="med" len="med"/>
-                    </a:lnT>
-                    <a:lnB w="9525" cap="flat" cmpd="sng" algn="ctr">
-                      <a:solidFill>
-                        <a:srgbClr val="D8DBE0"/>
-                      </a:solidFill>
-                      <a:prstDash val="solid"/>
-                      <a:round/>
-                      <a:headEnd type="none" w="med" len="med"/>
-                      <a:tailEnd type="none" w="med" len="med"/>
-                    </a:lnB>
-                    <a:solidFill>
-                      <a:srgbClr val="FFFFFF"/>
-                    </a:solidFill>
-                  </a:tcPr>
-                </a:tc>
-                <a:tc>
-                  <a:txBody>
-                    <a:bodyPr/>
-                    <a:lstStyle/>
-                    <a:p>
-                      <a:pPr algn="l" indent="0" marL="0">
-                        <a:buNone/>
-                      </a:pPr>
-                      <a:r>
-                        <a:rPr lang="en-US" sz="1500" dirty="0">
-                          <a:solidFill>
-                            <a:srgbClr val="1F2329"/>
-                          </a:solidFill>
-                          <a:latin typeface="微软雅黑" pitchFamily="34" charset="0"/>
-                          <a:ea typeface="微软雅黑" pitchFamily="34" charset="-122"/>
-                          <a:cs typeface="微软雅黑" pitchFamily="34" charset="-120"/>
-                        </a:rPr>
-                        <a:t>答8</a:t>
-                      </a:r>
-                      <a:endParaRPr lang="en-US" sz="1500" dirty="0">
-                        <a:latin typeface="微软雅黑" charset="0"/>
-                        <a:ea typeface="微软雅黑" charset="0"/>
-                        <a:cs typeface="微软雅黑" charset="0"/>
-                      </a:endParaRPr>
-                    </a:p>
-                  </a:txBody>
-                  <a:tcPr marL="91440" marR="91440" marT="45720" marB="45720" anchor="ctr">
-                    <a:lnL w="9525" cap="flat" cmpd="sng" algn="ctr">
-                      <a:solidFill>
-                        <a:srgbClr val="D8DBE0"/>
-                      </a:solidFill>
-                      <a:prstDash val="solid"/>
-                      <a:round/>
-                      <a:headEnd type="none" w="med" len="med"/>
-                      <a:tailEnd type="none" w="med" len="med"/>
-                    </a:lnL>
-                    <a:lnR w="9525" cap="flat" cmpd="sng" algn="ctr">
-                      <a:solidFill>
-                        <a:srgbClr val="D8DBE0"/>
-                      </a:solidFill>
-                      <a:prstDash val="solid"/>
-                      <a:round/>
-                      <a:headEnd type="none" w="med" len="med"/>
-                      <a:tailEnd type="none" w="med" len="med"/>
-                    </a:lnR>
-                    <a:lnT w="9525" cap="flat" cmpd="sng" algn="ctr">
-                      <a:solidFill>
-                        <a:srgbClr val="D8DBE0"/>
-                      </a:solidFill>
-                      <a:prstDash val="solid"/>
-                      <a:round/>
-                      <a:headEnd type="none" w="med" len="med"/>
-                      <a:tailEnd type="none" w="med" len="med"/>
-                    </a:lnT>
-                    <a:lnB w="9525" cap="flat" cmpd="sng" algn="ctr">
-                      <a:solidFill>
-                        <a:srgbClr val="D8DBE0"/>
-                      </a:solidFill>
-                      <a:prstDash val="solid"/>
-                      <a:round/>
-                      <a:headEnd type="none" w="med" len="med"/>
-                      <a:tailEnd type="none" w="med" len="med"/>
-                    </a:lnB>
-                    <a:solidFill>
-                      <a:srgbClr val="FFFFFF"/>
-                    </a:solidFill>
-                  </a:tcPr>
-                </a:tc>
-              </a:tr>
-              <a:tr h="420624">
-                <a:tc>
-                  <a:txBody>
-                    <a:bodyPr/>
-                    <a:lstStyle/>
-                    <a:p>
-                      <a:pPr algn="l" indent="0" marL="0">
-                        <a:buNone/>
-                      </a:pPr>
-                      <a:r>
-                        <a:rPr lang="en-US" sz="1500" dirty="0">
-                          <a:solidFill>
-                            <a:srgbClr val="1F2329"/>
-                          </a:solidFill>
-                          <a:latin typeface="微软雅黑" pitchFamily="34" charset="0"/>
-                          <a:ea typeface="微软雅黑" pitchFamily="34" charset="-122"/>
-                          <a:cs typeface="微软雅黑" pitchFamily="34" charset="-120"/>
-                        </a:rPr>
-                        <a:t>自组织表查找</a:t>
-                      </a:r>
-                      <a:endParaRPr lang="en-US" sz="1500" dirty="0">
-                        <a:latin typeface="微软雅黑" charset="0"/>
-                        <a:ea typeface="微软雅黑" charset="0"/>
-                        <a:cs typeface="微软雅黑" charset="0"/>
-                      </a:endParaRPr>
-                    </a:p>
-                  </a:txBody>
-                  <a:tcPr marL="91440" marR="91440" marT="45720" marB="45720" anchor="ctr">
-                    <a:lnL w="9525" cap="flat" cmpd="sng" algn="ctr">
-                      <a:solidFill>
-                        <a:srgbClr val="D8DBE0"/>
-                      </a:solidFill>
-                      <a:prstDash val="solid"/>
-                      <a:round/>
-                      <a:headEnd type="none" w="med" len="med"/>
-                      <a:tailEnd type="none" w="med" len="med"/>
-                    </a:lnL>
-                    <a:lnR w="9525" cap="flat" cmpd="sng" algn="ctr">
-                      <a:solidFill>
-                        <a:srgbClr val="D8DBE0"/>
-                      </a:solidFill>
-                      <a:prstDash val="solid"/>
-                      <a:round/>
-                      <a:headEnd type="none" w="med" len="med"/>
-                      <a:tailEnd type="none" w="med" len="med"/>
-                    </a:lnR>
-                    <a:lnT w="9525" cap="flat" cmpd="sng" algn="ctr">
-                      <a:solidFill>
-                        <a:srgbClr val="D8DBE0"/>
-                      </a:solidFill>
-                      <a:prstDash val="solid"/>
-                      <a:round/>
-                      <a:headEnd type="none" w="med" len="med"/>
-                      <a:tailEnd type="none" w="med" len="med"/>
-                    </a:lnT>
-                    <a:lnB w="9525" cap="flat" cmpd="sng" algn="ctr">
-                      <a:solidFill>
-                        <a:srgbClr val="D8DBE0"/>
-                      </a:solidFill>
-                      <a:prstDash val="solid"/>
-                      <a:round/>
-                      <a:headEnd type="none" w="med" len="med"/>
-                      <a:tailEnd type="none" w="med" len="med"/>
-                    </a:lnB>
-                    <a:solidFill>
-                      <a:srgbClr val="FFFFFF"/>
-                    </a:solidFill>
-                  </a:tcPr>
-                </a:tc>
-                <a:tc>
-                  <a:txBody>
-                    <a:bodyPr/>
-                    <a:lstStyle/>
-                    <a:p>
-                      <a:pPr algn="l" indent="0" marL="0">
-                        <a:buNone/>
-                      </a:pPr>
-                      <a:r>
-                        <a:rPr lang="en-US" sz="1500" dirty="0">
-                          <a:solidFill>
-                            <a:srgbClr val="1F2329"/>
-                          </a:solidFill>
-                          <a:latin typeface="微软雅黑" pitchFamily="34" charset="0"/>
-                          <a:ea typeface="微软雅黑" pitchFamily="34" charset="-122"/>
-                          <a:cs typeface="微软雅黑" pitchFamily="34" charset="-120"/>
-                        </a:rPr>
-                        <a:t>算5、6</a:t>
-                      </a:r>
-                      <a:endParaRPr lang="en-US" sz="1500" dirty="0">
-                        <a:latin typeface="微软雅黑" charset="0"/>
-                        <a:ea typeface="微软雅黑" charset="0"/>
-                        <a:cs typeface="微软雅黑" charset="0"/>
-                      </a:endParaRPr>
-                    </a:p>
-                  </a:txBody>
-                  <a:tcPr marL="91440" marR="91440" marT="45720" marB="45720" anchor="ctr">
+                  <a:tcPr anchor="ctr">
                     <a:lnL w="9525" cap="flat" cmpd="sng" algn="ctr">
                       <a:solidFill>
                         <a:srgbClr val="D8DBE0"/>
@@ -9536,7 +9399,7 @@
 
 <file path=ppt/slides/slide8.xml><?xml version="1.0" encoding="utf-8"?>
 <p:sld xmlns:a="http://schemas.openxmlformats.org/drawingml/2006/main" xmlns:r="http://schemas.openxmlformats.org/officeDocument/2006/relationships" xmlns:p="http://schemas.openxmlformats.org/presentationml/2006/main">
-  <p:cSld name="Slide 8">
+  <p:cSld>
     <p:bg>
       <p:bgPr>
         <a:blipFill dpi="0" rotWithShape="1">
@@ -9580,13 +9443,12 @@
             <a:avLst/>
           </a:prstGeom>
           <a:noFill/>
-          <a:ln/>
         </p:spPr>
         <p:txBody>
           <a:bodyPr wrap="square" rtlCol="0" anchor="ctr"/>
           <a:lstStyle/>
           <a:p>
-            <a:pPr algn="r" indent="0" marL="0">
+            <a:pPr marL="0" indent="0" algn="r">
               <a:buNone/>
             </a:pPr>
             <a:r>
@@ -9594,9 +9456,9 @@
                 <a:solidFill>
                   <a:srgbClr val="8A9099"/>
                 </a:solidFill>
-                <a:latin typeface="微软雅黑" pitchFamily="34" charset="0"/>
-                <a:ea typeface="微软雅黑" pitchFamily="34" charset="-122"/>
-                <a:cs typeface="微软雅黑" pitchFamily="34" charset="-120"/>
+                <a:latin typeface="微软雅黑" panose="020B0503020204020204" pitchFamily="34" charset="-122"/>
+                <a:ea typeface="微软雅黑" panose="020B0503020204020204" pitchFamily="34" charset="-122"/>
+                <a:cs typeface="微软雅黑" panose="020B0503020204020204" pitchFamily="34" charset="-120"/>
               </a:rPr>
               <a:t>8 / 8</a:t>
             </a:r>
@@ -9619,13 +9481,12 @@
             <a:avLst/>
           </a:prstGeom>
           <a:noFill/>
-          <a:ln/>
         </p:spPr>
         <p:txBody>
           <a:bodyPr wrap="square" rtlCol="0" anchor="ctr"/>
           <a:lstStyle/>
           <a:p>
-            <a:pPr algn="l" indent="0" marL="0">
+            <a:pPr marL="0" indent="0" algn="l">
               <a:buNone/>
             </a:pPr>
             <a:r>
@@ -9633,9 +9494,9 @@
                 <a:solidFill>
                   <a:srgbClr val="1F4E9C"/>
                 </a:solidFill>
-                <a:latin typeface="微软雅黑" pitchFamily="34" charset="0"/>
-                <a:ea typeface="微软雅黑" pitchFamily="34" charset="-122"/>
-                <a:cs typeface="微软雅黑" pitchFamily="34" charset="-120"/>
+                <a:latin typeface="微软雅黑" panose="020B0503020204020204" pitchFamily="34" charset="-122"/>
+                <a:ea typeface="微软雅黑" panose="020B0503020204020204" pitchFamily="34" charset="-122"/>
+                <a:cs typeface="微软雅黑" panose="020B0503020204020204" pitchFamily="34" charset="-120"/>
               </a:rPr>
               <a:t>使用建议</a:t>
             </a:r>
@@ -9658,13 +9519,12 @@
             <a:avLst/>
           </a:prstGeom>
           <a:noFill/>
-          <a:ln/>
         </p:spPr>
         <p:txBody>
           <a:bodyPr wrap="square" rtlCol="0" anchor="ctr"/>
           <a:lstStyle/>
           <a:p>
-            <a:pPr algn="l" indent="0" marL="0">
+            <a:pPr marL="0" indent="0" algn="l">
               <a:buNone/>
             </a:pPr>
             <a:r>
@@ -9672,9 +9532,9 @@
                 <a:solidFill>
                   <a:srgbClr val="1F2329"/>
                 </a:solidFill>
-                <a:latin typeface="微软雅黑" pitchFamily="34" charset="0"/>
-                <a:ea typeface="微软雅黑" pitchFamily="34" charset="-122"/>
-                <a:cs typeface="微软雅黑" pitchFamily="34" charset="-120"/>
+                <a:latin typeface="微软雅黑" panose="020B0503020204020204" pitchFamily="34" charset="-122"/>
+                <a:ea typeface="微软雅黑" panose="020B0503020204020204" pitchFamily="34" charset="-122"/>
+                <a:cs typeface="微软雅黑" panose="020B0503020204020204" pitchFamily="34" charset="-120"/>
               </a:rPr>
               <a:t>第9章刷题路线</a:t>
             </a:r>
@@ -9697,13 +9557,12 @@
             <a:avLst/>
           </a:prstGeom>
           <a:noFill/>
-          <a:ln/>
         </p:spPr>
         <p:txBody>
           <a:bodyPr wrap="square" rtlCol="0" anchor="t"/>
           <a:lstStyle/>
           <a:p>
-            <a:pPr algn="l" indent="0" marL="0">
+            <a:pPr marL="0" indent="0" algn="l">
               <a:lnSpc>
                 <a:spcPct val="115000"/>
               </a:lnSpc>
@@ -9714,18 +9573,12 @@
                 <a:solidFill>
                   <a:srgbClr val="1F4E9C"/>
                 </a:solidFill>
-                <a:latin typeface="微软雅黑" pitchFamily="34" charset="0"/>
-                <a:ea typeface="微软雅黑" pitchFamily="34" charset="-122"/>
-                <a:cs typeface="微软雅黑" pitchFamily="34" charset="-120"/>
+                <a:latin typeface="微软雅黑" panose="020B0503020204020204" pitchFamily="34" charset="-122"/>
+                <a:ea typeface="微软雅黑" panose="020B0503020204020204" pitchFamily="34" charset="-122"/>
+                <a:cs typeface="微软雅黑" panose="020B0503020204020204" pitchFamily="34" charset="-120"/>
               </a:rPr>
               <a:t>•  </a:t>
             </a:r>
-            <a:pPr algn="l" indent="0" marL="0">
-              <a:lnSpc>
-                <a:spcPct val="115000"/>
-              </a:lnSpc>
-              <a:buNone/>
-            </a:pPr>
             <a:r>
               <a:rPr lang="en-US" sz="1800" dirty="0">
                 <a:solidFill>
@@ -9753,13 +9606,12 @@
             <a:avLst/>
           </a:prstGeom>
           <a:noFill/>
-          <a:ln/>
         </p:spPr>
         <p:txBody>
           <a:bodyPr wrap="square" rtlCol="0" anchor="t"/>
           <a:lstStyle/>
           <a:p>
-            <a:pPr algn="l" indent="0" marL="0">
+            <a:pPr marL="0" indent="0" algn="l">
               <a:lnSpc>
                 <a:spcPct val="115000"/>
               </a:lnSpc>
@@ -9770,18 +9622,12 @@
                 <a:solidFill>
                   <a:srgbClr val="1F4E9C"/>
                 </a:solidFill>
-                <a:latin typeface="微软雅黑" pitchFamily="34" charset="0"/>
-                <a:ea typeface="微软雅黑" pitchFamily="34" charset="-122"/>
-                <a:cs typeface="微软雅黑" pitchFamily="34" charset="-120"/>
+                <a:latin typeface="微软雅黑" panose="020B0503020204020204" pitchFamily="34" charset="-122"/>
+                <a:ea typeface="微软雅黑" panose="020B0503020204020204" pitchFamily="34" charset="-122"/>
+                <a:cs typeface="微软雅黑" panose="020B0503020204020204" pitchFamily="34" charset="-120"/>
               </a:rPr>
               <a:t>•  </a:t>
             </a:r>
-            <a:pPr algn="l" indent="0" marL="0">
-              <a:lnSpc>
-                <a:spcPct val="115000"/>
-              </a:lnSpc>
-              <a:buNone/>
-            </a:pPr>
             <a:r>
               <a:rPr lang="en-US" sz="1800" dirty="0">
                 <a:solidFill>
@@ -9809,13 +9655,12 @@
             <a:avLst/>
           </a:prstGeom>
           <a:noFill/>
-          <a:ln/>
         </p:spPr>
         <p:txBody>
           <a:bodyPr wrap="square" rtlCol="0" anchor="t"/>
           <a:lstStyle/>
           <a:p>
-            <a:pPr algn="l" indent="0" marL="0">
+            <a:pPr marL="0" indent="0" algn="l">
               <a:lnSpc>
                 <a:spcPct val="115000"/>
               </a:lnSpc>
@@ -9826,18 +9671,12 @@
                 <a:solidFill>
                   <a:srgbClr val="1F4E9C"/>
                 </a:solidFill>
-                <a:latin typeface="微软雅黑" pitchFamily="34" charset="0"/>
-                <a:ea typeface="微软雅黑" pitchFamily="34" charset="-122"/>
-                <a:cs typeface="微软雅黑" pitchFamily="34" charset="-120"/>
+                <a:latin typeface="微软雅黑" panose="020B0503020204020204" pitchFamily="34" charset="-122"/>
+                <a:ea typeface="微软雅黑" panose="020B0503020204020204" pitchFamily="34" charset="-122"/>
+                <a:cs typeface="微软雅黑" panose="020B0503020204020204" pitchFamily="34" charset="-120"/>
               </a:rPr>
               <a:t>•  </a:t>
             </a:r>
-            <a:pPr algn="l" indent="0" marL="0">
-              <a:lnSpc>
-                <a:spcPct val="115000"/>
-              </a:lnSpc>
-              <a:buNone/>
-            </a:pPr>
             <a:r>
               <a:rPr lang="en-US" sz="1800" dirty="0">
                 <a:solidFill>
@@ -9865,13 +9704,12 @@
             <a:avLst/>
           </a:prstGeom>
           <a:noFill/>
-          <a:ln/>
         </p:spPr>
         <p:txBody>
           <a:bodyPr wrap="square" rtlCol="0" anchor="t"/>
           <a:lstStyle/>
           <a:p>
-            <a:pPr algn="l" indent="0" marL="0">
+            <a:pPr marL="0" indent="0" algn="l">
               <a:buNone/>
             </a:pPr>
             <a:r>
@@ -9879,9 +9717,9 @@
                 <a:solidFill>
                   <a:srgbClr val="8A9099"/>
                 </a:solidFill>
-                <a:latin typeface="微软雅黑" pitchFamily="34" charset="0"/>
-                <a:ea typeface="微软雅黑" pitchFamily="34" charset="-122"/>
-                <a:cs typeface="微软雅黑" pitchFamily="34" charset="-120"/>
+                <a:latin typeface="微软雅黑" panose="020B0503020204020204" pitchFamily="34" charset="-122"/>
+                <a:ea typeface="微软雅黑" panose="020B0503020204020204" pitchFamily="34" charset="-122"/>
+                <a:cs typeface="微软雅黑" panose="020B0503020204020204" pitchFamily="34" charset="-120"/>
               </a:rPr>
               <a:t>知识点回看：重邮数据结构笔记「查找」对应小节；答疑进页面底部群。</a:t>
             </a:r>
@@ -9940,7 +9778,7 @@
     </a:clrScheme>
     <a:fontScheme name="Office">
       <a:majorFont>
-        <a:latin typeface="Calibri Light" panose="020F0302020204030204"/>
+        <a:latin typeface="Calibri Light"/>
         <a:ea typeface=""/>
         <a:cs typeface=""/>
         <a:font script="Jpan" typeface="游ゴシック Light"/>
@@ -9973,26 +9811,9 @@
         <a:font script="Viet" typeface="Times New Roman"/>
         <a:font script="Uigh" typeface="Microsoft Uighur"/>
         <a:font script="Geor" typeface="Sylfaen"/>
-        <a:font script="Armn" typeface="Arial"/>
-        <a:font script="Bugi" typeface="Leelawadee UI"/>
-        <a:font script="Bopo" typeface="Microsoft JhengHei"/>
-        <a:font script="Java" typeface="Javanese Text"/>
-        <a:font script="Lisu" typeface="Segoe UI"/>
-        <a:font script="Mymr" typeface="Myanmar Text"/>
-        <a:font script="Nkoo" typeface="Ebrima"/>
-        <a:font script="Olck" typeface="Nirmala UI"/>
-        <a:font script="Osma" typeface="Ebrima"/>
-        <a:font script="Phag" typeface="Phagspa"/>
-        <a:font script="Syrn" typeface="Estrangelo Edessa"/>
-        <a:font script="Syrj" typeface="Estrangelo Edessa"/>
-        <a:font script="Syre" typeface="Estrangelo Edessa"/>
-        <a:font script="Sora" typeface="Nirmala UI"/>
-        <a:font script="Tale" typeface="Microsoft Tai Le"/>
-        <a:font script="Talu" typeface="Microsoft New Tai Lue"/>
-        <a:font script="Tfng" typeface="Ebrima"/>
       </a:majorFont>
       <a:minorFont>
-        <a:latin typeface="Calibri" panose="020F0502020204030204"/>
+        <a:latin typeface="Calibri"/>
         <a:ea typeface=""/>
         <a:cs typeface=""/>
         <a:font script="Jpan" typeface="游ゴシック"/>
@@ -10025,23 +9846,6 @@
         <a:font script="Viet" typeface="Arial"/>
         <a:font script="Uigh" typeface="Microsoft Uighur"/>
         <a:font script="Geor" typeface="Sylfaen"/>
-        <a:font script="Armn" typeface="Arial"/>
-        <a:font script="Bugi" typeface="Leelawadee UI"/>
-        <a:font script="Bopo" typeface="Microsoft JhengHei"/>
-        <a:font script="Java" typeface="Javanese Text"/>
-        <a:font script="Lisu" typeface="Segoe UI"/>
-        <a:font script="Mymr" typeface="Myanmar Text"/>
-        <a:font script="Nkoo" typeface="Ebrima"/>
-        <a:font script="Olck" typeface="Nirmala UI"/>
-        <a:font script="Osma" typeface="Ebrima"/>
-        <a:font script="Phag" typeface="Phagspa"/>
-        <a:font script="Syrn" typeface="Estrangelo Edessa"/>
-        <a:font script="Syrj" typeface="Estrangelo Edessa"/>
-        <a:font script="Syre" typeface="Estrangelo Edessa"/>
-        <a:font script="Sora" typeface="Nirmala UI"/>
-        <a:font script="Tale" typeface="Microsoft Tai Le"/>
-        <a:font script="Talu" typeface="Microsoft New Tai Lue"/>
-        <a:font script="Tfng" typeface="Ebrima"/>
       </a:minorFont>
     </a:fontScheme>
     <a:fmtScheme name="Office">
@@ -10182,8 +9986,265 @@
       </a:bgFillStyleLst>
     </a:fmtScheme>
   </a:themeElements>
-  <a:objectDefaults/>
-  <a:extraClrSchemeLst/>
+  <a:extLst>
+    <a:ext uri="{05A4C25C-085E-4340-85A3-A5531E510DB2}">
+      <thm15:themeFamily xmlns:thm15="http://schemas.microsoft.com/office/thememl/2012/main" name="Office Theme" id="{62F939B6-93AF-4DB8-9C6B-D6C7DFDC589F}" vid="{4A3C46E8-61CC-4603-A589-7422A47A8E4A}"/>
+    </a:ext>
+  </a:extLst>
+</a:theme>
+</file>
+
+<file path=ppt/theme/theme2.xml><?xml version="1.0" encoding="utf-8"?>
+<a:theme xmlns:a="http://schemas.openxmlformats.org/drawingml/2006/main" name="Office Theme">
+  <a:themeElements>
+    <a:clrScheme name="Office">
+      <a:dk1>
+        <a:sysClr val="windowText" lastClr="000000"/>
+      </a:dk1>
+      <a:lt1>
+        <a:sysClr val="window" lastClr="FFFFFF"/>
+      </a:lt1>
+      <a:dk2>
+        <a:srgbClr val="44546A"/>
+      </a:dk2>
+      <a:lt2>
+        <a:srgbClr val="E7E6E6"/>
+      </a:lt2>
+      <a:accent1>
+        <a:srgbClr val="4472C4"/>
+      </a:accent1>
+      <a:accent2>
+        <a:srgbClr val="ED7D31"/>
+      </a:accent2>
+      <a:accent3>
+        <a:srgbClr val="A5A5A5"/>
+      </a:accent3>
+      <a:accent4>
+        <a:srgbClr val="FFC000"/>
+      </a:accent4>
+      <a:accent5>
+        <a:srgbClr val="5B9BD5"/>
+      </a:accent5>
+      <a:accent6>
+        <a:srgbClr val="70AD47"/>
+      </a:accent6>
+      <a:hlink>
+        <a:srgbClr val="0563C1"/>
+      </a:hlink>
+      <a:folHlink>
+        <a:srgbClr val="954F72"/>
+      </a:folHlink>
+    </a:clrScheme>
+    <a:fontScheme name="Office">
+      <a:majorFont>
+        <a:latin typeface="Calibri Light"/>
+        <a:ea typeface=""/>
+        <a:cs typeface=""/>
+        <a:font script="Jpan" typeface="游ゴシック Light"/>
+        <a:font script="Hang" typeface="맑은 고딕"/>
+        <a:font script="Hans" typeface="等线 Light"/>
+        <a:font script="Hant" typeface="新細明體"/>
+        <a:font script="Arab" typeface="Times New Roman"/>
+        <a:font script="Hebr" typeface="Times New Roman"/>
+        <a:font script="Thai" typeface="Angsana New"/>
+        <a:font script="Ethi" typeface="Nyala"/>
+        <a:font script="Beng" typeface="Vrinda"/>
+        <a:font script="Gujr" typeface="Shruti"/>
+        <a:font script="Khmr" typeface="MoolBoran"/>
+        <a:font script="Knda" typeface="Tunga"/>
+        <a:font script="Guru" typeface="Raavi"/>
+        <a:font script="Cans" typeface="Euphemia"/>
+        <a:font script="Cher" typeface="Plantagenet Cherokee"/>
+        <a:font script="Yiii" typeface="Microsoft Yi Baiti"/>
+        <a:font script="Tibt" typeface="Microsoft Himalaya"/>
+        <a:font script="Thaa" typeface="MV Boli"/>
+        <a:font script="Deva" typeface="Mangal"/>
+        <a:font script="Telu" typeface="Gautami"/>
+        <a:font script="Taml" typeface="Latha"/>
+        <a:font script="Syrc" typeface="Estrangelo Edessa"/>
+        <a:font script="Orya" typeface="Kalinga"/>
+        <a:font script="Mlym" typeface="Kartika"/>
+        <a:font script="Laoo" typeface="DokChampa"/>
+        <a:font script="Sinh" typeface="Iskoola Pota"/>
+        <a:font script="Mong" typeface="Mongolian Baiti"/>
+        <a:font script="Viet" typeface="Times New Roman"/>
+        <a:font script="Uigh" typeface="Microsoft Uighur"/>
+        <a:font script="Geor" typeface="Sylfaen"/>
+      </a:majorFont>
+      <a:minorFont>
+        <a:latin typeface="Calibri"/>
+        <a:ea typeface=""/>
+        <a:cs typeface=""/>
+        <a:font script="Jpan" typeface="游ゴシック"/>
+        <a:font script="Hang" typeface="맑은 고딕"/>
+        <a:font script="Hans" typeface="等线"/>
+        <a:font script="Hant" typeface="新細明體"/>
+        <a:font script="Arab" typeface="Arial"/>
+        <a:font script="Hebr" typeface="Arial"/>
+        <a:font script="Thai" typeface="Cordia New"/>
+        <a:font script="Ethi" typeface="Nyala"/>
+        <a:font script="Beng" typeface="Vrinda"/>
+        <a:font script="Gujr" typeface="Shruti"/>
+        <a:font script="Khmr" typeface="DaunPenh"/>
+        <a:font script="Knda" typeface="Tunga"/>
+        <a:font script="Guru" typeface="Raavi"/>
+        <a:font script="Cans" typeface="Euphemia"/>
+        <a:font script="Cher" typeface="Plantagenet Cherokee"/>
+        <a:font script="Yiii" typeface="Microsoft Yi Baiti"/>
+        <a:font script="Tibt" typeface="Microsoft Himalaya"/>
+        <a:font script="Thaa" typeface="MV Boli"/>
+        <a:font script="Deva" typeface="Mangal"/>
+        <a:font script="Telu" typeface="Gautami"/>
+        <a:font script="Taml" typeface="Latha"/>
+        <a:font script="Syrc" typeface="Estrangelo Edessa"/>
+        <a:font script="Orya" typeface="Kalinga"/>
+        <a:font script="Mlym" typeface="Kartika"/>
+        <a:font script="Laoo" typeface="DokChampa"/>
+        <a:font script="Sinh" typeface="Iskoola Pota"/>
+        <a:font script="Mong" typeface="Mongolian Baiti"/>
+        <a:font script="Viet" typeface="Arial"/>
+        <a:font script="Uigh" typeface="Microsoft Uighur"/>
+        <a:font script="Geor" typeface="Sylfaen"/>
+      </a:minorFont>
+    </a:fontScheme>
+    <a:fmtScheme name="Office">
+      <a:fillStyleLst>
+        <a:solidFill>
+          <a:schemeClr val="phClr"/>
+        </a:solidFill>
+        <a:gradFill rotWithShape="1">
+          <a:gsLst>
+            <a:gs pos="0">
+              <a:schemeClr val="phClr">
+                <a:lumMod val="110000"/>
+                <a:satMod val="105000"/>
+                <a:tint val="67000"/>
+              </a:schemeClr>
+            </a:gs>
+            <a:gs pos="50000">
+              <a:schemeClr val="phClr">
+                <a:lumMod val="105000"/>
+                <a:satMod val="103000"/>
+                <a:tint val="73000"/>
+              </a:schemeClr>
+            </a:gs>
+            <a:gs pos="100000">
+              <a:schemeClr val="phClr">
+                <a:lumMod val="105000"/>
+                <a:satMod val="109000"/>
+                <a:tint val="81000"/>
+              </a:schemeClr>
+            </a:gs>
+          </a:gsLst>
+          <a:lin ang="5400000" scaled="0"/>
+        </a:gradFill>
+        <a:gradFill rotWithShape="1">
+          <a:gsLst>
+            <a:gs pos="0">
+              <a:schemeClr val="phClr">
+                <a:satMod val="103000"/>
+                <a:lumMod val="102000"/>
+                <a:tint val="94000"/>
+              </a:schemeClr>
+            </a:gs>
+            <a:gs pos="50000">
+              <a:schemeClr val="phClr">
+                <a:satMod val="110000"/>
+                <a:lumMod val="100000"/>
+                <a:shade val="100000"/>
+              </a:schemeClr>
+            </a:gs>
+            <a:gs pos="100000">
+              <a:schemeClr val="phClr">
+                <a:lumMod val="99000"/>
+                <a:satMod val="120000"/>
+                <a:shade val="78000"/>
+              </a:schemeClr>
+            </a:gs>
+          </a:gsLst>
+          <a:lin ang="5400000" scaled="0"/>
+        </a:gradFill>
+      </a:fillStyleLst>
+      <a:lnStyleLst>
+        <a:ln w="6350" cap="flat" cmpd="sng" algn="ctr">
+          <a:solidFill>
+            <a:schemeClr val="phClr"/>
+          </a:solidFill>
+          <a:prstDash val="solid"/>
+          <a:miter lim="800000"/>
+        </a:ln>
+        <a:ln w="12700" cap="flat" cmpd="sng" algn="ctr">
+          <a:solidFill>
+            <a:schemeClr val="phClr"/>
+          </a:solidFill>
+          <a:prstDash val="solid"/>
+          <a:miter lim="800000"/>
+        </a:ln>
+        <a:ln w="19050" cap="flat" cmpd="sng" algn="ctr">
+          <a:solidFill>
+            <a:schemeClr val="phClr"/>
+          </a:solidFill>
+          <a:prstDash val="solid"/>
+          <a:miter lim="800000"/>
+        </a:ln>
+      </a:lnStyleLst>
+      <a:effectStyleLst>
+        <a:effectStyle>
+          <a:effectLst/>
+        </a:effectStyle>
+        <a:effectStyle>
+          <a:effectLst/>
+        </a:effectStyle>
+        <a:effectStyle>
+          <a:effectLst>
+            <a:outerShdw blurRad="57150" dist="19050" dir="5400000" algn="ctr" rotWithShape="0">
+              <a:srgbClr val="000000">
+                <a:alpha val="63000"/>
+              </a:srgbClr>
+            </a:outerShdw>
+          </a:effectLst>
+        </a:effectStyle>
+      </a:effectStyleLst>
+      <a:bgFillStyleLst>
+        <a:solidFill>
+          <a:schemeClr val="phClr"/>
+        </a:solidFill>
+        <a:solidFill>
+          <a:schemeClr val="phClr">
+            <a:tint val="95000"/>
+            <a:satMod val="170000"/>
+          </a:schemeClr>
+        </a:solidFill>
+        <a:gradFill rotWithShape="1">
+          <a:gsLst>
+            <a:gs pos="0">
+              <a:schemeClr val="phClr">
+                <a:tint val="93000"/>
+                <a:satMod val="150000"/>
+                <a:shade val="98000"/>
+                <a:lumMod val="102000"/>
+              </a:schemeClr>
+            </a:gs>
+            <a:gs pos="50000">
+              <a:schemeClr val="phClr">
+                <a:tint val="98000"/>
+                <a:satMod val="130000"/>
+                <a:shade val="90000"/>
+                <a:lumMod val="103000"/>
+              </a:schemeClr>
+            </a:gs>
+            <a:gs pos="100000">
+              <a:schemeClr val="phClr">
+                <a:shade val="63000"/>
+                <a:satMod val="120000"/>
+              </a:schemeClr>
+            </a:gs>
+          </a:gsLst>
+          <a:lin ang="5400000" scaled="0"/>
+        </a:gradFill>
+      </a:bgFillStyleLst>
+    </a:fmtScheme>
+  </a:themeElements>
   <a:extLst>
     <a:ext uri="{05A4C25C-085E-4340-85A3-A5531E510DB2}">
       <thm15:themeFamily xmlns:thm15="http://schemas.microsoft.com/office/thememl/2012/main" name="Office Theme" id="{62F939B6-93AF-4DB8-9C6B-D6C7DFDC589F}" vid="{4A3C46E8-61CC-4603-A589-7422A47A8E4A}"/>
